--- a/docs/主治医意見書読み取り_概要.pptx
+++ b/docs/主治医意見書読み取り_概要.pptx
@@ -5204,7 +5204,7 @@
                 </a:solidFill>
                 <a:latin typeface="Yu Gothic"/>
               </a:rPr>
-              <a:t>・GitHub の Issue に問題を残している（全 47 件 / 未対応 4 件）</a:t>
+              <a:t>・GitHub の Issue に問題を残している（全 47 件 / 未対応 3 件）</a:t>
             </a:r>
           </a:p>
           <a:p>
@@ -5491,7 +5491,7 @@
                 </a:solidFill>
                 <a:latin typeface="Yu Gothic"/>
               </a:rPr>
-              <a:t>・医療機関一覧を全国分そろえる</a:t>
+              <a:t>・単一HTMLファイル版でのテキストOCR</a:t>
             </a:r>
           </a:p>
           <a:p>
@@ -5507,87 +5507,103 @@
                 </a:solidFill>
                 <a:latin typeface="Yu Gothic"/>
               </a:rPr>
+              <a:t>　　ブラウザの制約があり、方法を検討中</a:t>
+            </a:r>
+          </a:p>
+          <a:p>
+            <a:pPr algn="l">
+              <a:spcBef>
+                <a:spcPts val="1000"/>
+              </a:spcBef>
+            </a:pPr>
+            <a:r>
+              <a:rPr sz="1700" b="1">
+                <a:solidFill>
+                  <a:srgbClr val="1B1F24"/>
+                </a:solidFill>
+                <a:latin typeface="Yu Gothic"/>
+              </a:rPr>
+              <a:t>・読み取り精度の継続的な検証</a:t>
+            </a:r>
+          </a:p>
+          <a:p>
+            <a:pPr algn="l">
+              <a:spcBef>
+                <a:spcPts val="200"/>
+              </a:spcBef>
+            </a:pPr>
+            <a:r>
+              <a:rPr sz="1400" b="0">
+                <a:solidFill>
+                  <a:srgbClr val="5B636E"/>
+                </a:solidFill>
+                <a:latin typeface="Yu Gothic"/>
+              </a:rPr>
+              <a:t>　　操作ログの「どこをどれだけ直したか」を精度の指標に使う</a:t>
+            </a:r>
+          </a:p>
+          <a:p>
+            <a:pPr algn="l">
+              <a:spcBef>
+                <a:spcPts val="1000"/>
+              </a:spcBef>
+            </a:pPr>
+            <a:r>
+              <a:rPr sz="1700" b="1">
+                <a:solidFill>
+                  <a:srgbClr val="1B1F24"/>
+                </a:solidFill>
+                <a:latin typeface="Yu Gothic"/>
+              </a:rPr>
+              <a:t>・様式が変わったときの追従</a:t>
+            </a:r>
+          </a:p>
+          <a:p>
+            <a:pPr algn="l">
+              <a:spcBef>
+                <a:spcPts val="200"/>
+              </a:spcBef>
+            </a:pPr>
+            <a:r>
+              <a:rPr sz="1400" b="0">
+                <a:solidFill>
+                  <a:srgbClr val="5B636E"/>
+                </a:solidFill>
+                <a:latin typeface="Yu Gothic"/>
+              </a:rPr>
+              <a:t>　　テンプレートは管理画面から差し替えられる</a:t>
+            </a:r>
+          </a:p>
+          <a:p>
+            <a:pPr algn="l">
+              <a:spcBef>
+                <a:spcPts val="1000"/>
+              </a:spcBef>
+            </a:pPr>
+            <a:r>
+              <a:rPr sz="1700" b="1">
+                <a:solidFill>
+                  <a:srgbClr val="1B1F24"/>
+                </a:solidFill>
+                <a:latin typeface="Yu Gothic"/>
+              </a:rPr>
+              <a:t>・対応済み：医療機関一覧を全国分そろえ、管理画面から更新できるようにした</a:t>
+            </a:r>
+          </a:p>
+          <a:p>
+            <a:pPr algn="l">
+              <a:spcBef>
+                <a:spcPts val="200"/>
+              </a:spcBef>
+            </a:pPr>
+            <a:r>
+              <a:rPr sz="1400" b="0">
+                <a:solidFill>
+                  <a:srgbClr val="5B636E"/>
+                </a:solidFill>
+                <a:latin typeface="Yu Gothic"/>
+              </a:rPr>
               <a:t>　　厚生局ごとに公開の形が違うため、中身を見て判定する方式に作り替えた</a:t>
-            </a:r>
-          </a:p>
-          <a:p>
-            <a:pPr algn="l">
-              <a:spcBef>
-                <a:spcPts val="1000"/>
-              </a:spcBef>
-            </a:pPr>
-            <a:r>
-              <a:rPr sz="1700" b="1">
-                <a:solidFill>
-                  <a:srgbClr val="1B1F24"/>
-                </a:solidFill>
-                <a:latin typeface="Yu Gothic"/>
-              </a:rPr>
-              <a:t>・管理画面から「最新版に更新」できるようにする</a:t>
-            </a:r>
-          </a:p>
-          <a:p>
-            <a:pPr algn="l">
-              <a:spcBef>
-                <a:spcPts val="1000"/>
-              </a:spcBef>
-            </a:pPr>
-            <a:r>
-              <a:rPr sz="1700" b="1">
-                <a:solidFill>
-                  <a:srgbClr val="1B1F24"/>
-                </a:solidFill>
-                <a:latin typeface="Yu Gothic"/>
-              </a:rPr>
-              <a:t>・単一HTMLファイル版でのテキストOCR</a:t>
-            </a:r>
-          </a:p>
-          <a:p>
-            <a:pPr algn="l">
-              <a:spcBef>
-                <a:spcPts val="200"/>
-              </a:spcBef>
-            </a:pPr>
-            <a:r>
-              <a:rPr sz="1400" b="0">
-                <a:solidFill>
-                  <a:srgbClr val="5B636E"/>
-                </a:solidFill>
-                <a:latin typeface="Yu Gothic"/>
-              </a:rPr>
-              <a:t>　　ブラウザの制約があり、方法を検討中</a:t>
-            </a:r>
-          </a:p>
-          <a:p>
-            <a:pPr algn="l">
-              <a:spcBef>
-                <a:spcPts val="1000"/>
-              </a:spcBef>
-            </a:pPr>
-            <a:r>
-              <a:rPr sz="1700" b="1">
-                <a:solidFill>
-                  <a:srgbClr val="1B1F24"/>
-                </a:solidFill>
-                <a:latin typeface="Yu Gothic"/>
-              </a:rPr>
-              <a:t>・読み取り精度の継続的な検証</a:t>
-            </a:r>
-          </a:p>
-          <a:p>
-            <a:pPr algn="l">
-              <a:spcBef>
-                <a:spcPts val="200"/>
-              </a:spcBef>
-            </a:pPr>
-            <a:r>
-              <a:rPr sz="1400" b="0">
-                <a:solidFill>
-                  <a:srgbClr val="5B636E"/>
-                </a:solidFill>
-                <a:latin typeface="Yu Gothic"/>
-              </a:rPr>
-              <a:t>　　操作ログの「どこをどれだけ直したか」を精度の指標に使う</a:t>
             </a:r>
           </a:p>
         </p:txBody>

--- a/docs/主治医意見書読み取り_概要.pptx
+++ b/docs/主治医意見書読み取り_概要.pptx
@@ -3299,7 +3299,7 @@
                 </a:solidFill>
                 <a:latin typeface="Yu Gothic"/>
               </a:rPr>
-              <a:t>2026年9月6日</a:t>
+              <a:t>2026年9月8日</a:t>
             </a:r>
           </a:p>
         </p:txBody>
@@ -5204,7 +5204,7 @@
                 </a:solidFill>
                 <a:latin typeface="Yu Gothic"/>
               </a:rPr>
-              <a:t>・GitHub の Issue に問題を残している（全 47 件 / 未対応 3 件）</a:t>
+              <a:t>・GitHub の Issue に問題を残している（全 47 件 / 未対応 1 件）</a:t>
             </a:r>
           </a:p>
           <a:p>
@@ -7373,7 +7373,7 @@
                 </a:solidFill>
                 <a:latin typeface="Yu Gothic"/>
               </a:rPr>
-              <a:t>ベンチマーク② OCRエンジンの比較</a:t>
+              <a:t>ベンチマーク② 文字を読むモデルの比較</a:t>
             </a:r>
           </a:p>
           <a:p>
@@ -7389,7 +7389,7 @@
                 </a:solidFill>
                 <a:latin typeface="Yu Gothic"/>
               </a:rPr>
-              <a:t>同じ切り抜き画像を各エンジンに通した実測</a:t>
+              <a:t>正解データ（72項目）と突き合わせた実測。位置合わせと欄の切り出しは共通</a:t>
             </a:r>
           </a:p>
         </p:txBody>
@@ -7448,7 +7448,7 @@
         </p:nvGraphicFramePr>
         <p:xfrm>
           <a:off x="685800" y="1783080"/>
-          <a:ext cx="10789917" cy="2395728"/>
+          <a:ext cx="10789916" cy="1627632"/>
         </p:xfrm>
         <a:graphic>
           <a:graphicData uri="http://schemas.openxmlformats.org/drawingml/2006/table">
@@ -7457,26 +7457,27 @@
                 <a:tableStyleId>{5C22544A-7EE6-4342-B048-85BDC9FD1C3A}</a:tableStyleId>
               </a:tblPr>
               <a:tblGrid>
-                <a:gridCol w="1625878"/>
-                <a:gridCol w="2217106"/>
-                <a:gridCol w="2217106"/>
-                <a:gridCol w="2217106"/>
-                <a:gridCol w="2512721"/>
+                <a:gridCol w="2911565"/>
+                <a:gridCol w="1712685"/>
+                <a:gridCol w="1712685"/>
+                <a:gridCol w="1712685"/>
+                <a:gridCol w="1370148"/>
+                <a:gridCol w="1370148"/>
               </a:tblGrid>
-              <a:tr h="399288">
-                <a:tc>
-                  <a:txBody>
-                    <a:bodyPr/>
-                    <a:lstStyle/>
-                    <a:p>
-                      <a:r>
-                        <a:rPr sz="1150" b="1">
+              <a:tr h="406908">
+                <a:tc>
+                  <a:txBody>
+                    <a:bodyPr/>
+                    <a:lstStyle/>
+                    <a:p>
+                      <a:r>
+                        <a:rPr sz="1300" b="1">
                           <a:solidFill>
                             <a:srgbClr val="FFFFFF"/>
                           </a:solidFill>
                           <a:latin typeface="Yu Gothic"/>
                         </a:rPr>
-                        <a:t>欄</a:t>
+                        <a:t>エンジン</a:t>
                       </a:r>
                     </a:p>
                   </a:txBody>
@@ -7492,13 +7493,13 @@
                     <a:lstStyle/>
                     <a:p>
                       <a:r>
-                        <a:rPr sz="1150" b="1">
+                        <a:rPr sz="1300" b="1">
                           <a:solidFill>
                             <a:srgbClr val="FFFFFF"/>
                           </a:solidFill>
                           <a:latin typeface="Yu Gothic"/>
                         </a:rPr>
-                        <a:t>正解</a:t>
+                        <a:t>文字正解率</a:t>
                       </a:r>
                     </a:p>
                   </a:txBody>
@@ -7514,81 +7515,371 @@
                     <a:lstStyle/>
                     <a:p>
                       <a:r>
-                        <a:rPr sz="1150" b="1">
+                        <a:rPr sz="1300" b="1">
                           <a:solidFill>
                             <a:srgbClr val="FFFFFF"/>
                           </a:solidFill>
                           <a:latin typeface="Yu Gothic"/>
                         </a:rPr>
+                        <a:t>完全一致</a:t>
+                      </a:r>
+                    </a:p>
+                  </a:txBody>
+                  <a:tcPr marT="38100" marB="38100">
+                    <a:solidFill>
+                      <a:srgbClr val="1E5AA8"/>
+                    </a:solidFill>
+                  </a:tcPr>
+                </a:tc>
+                <a:tc>
+                  <a:txBody>
+                    <a:bodyPr/>
+                    <a:lstStyle/>
+                    <a:p>
+                      <a:r>
+                        <a:rPr sz="1300" b="1">
+                          <a:solidFill>
+                            <a:srgbClr val="FFFFFF"/>
+                          </a:solidFill>
+                          <a:latin typeface="Yu Gothic"/>
+                        </a:rPr>
+                        <a:t>空欄の判定</a:t>
+                      </a:r>
+                    </a:p>
+                  </a:txBody>
+                  <a:tcPr marT="38100" marB="38100">
+                    <a:solidFill>
+                      <a:srgbClr val="1E5AA8"/>
+                    </a:solidFill>
+                  </a:tcPr>
+                </a:tc>
+                <a:tc>
+                  <a:txBody>
+                    <a:bodyPr/>
+                    <a:lstStyle/>
+                    <a:p>
+                      <a:r>
+                        <a:rPr sz="1300" b="1">
+                          <a:solidFill>
+                            <a:srgbClr val="FFFFFF"/>
+                          </a:solidFill>
+                          <a:latin typeface="Yu Gothic"/>
+                        </a:rPr>
+                        <a:t>拾い読み</a:t>
+                      </a:r>
+                    </a:p>
+                  </a:txBody>
+                  <a:tcPr marT="38100" marB="38100">
+                    <a:solidFill>
+                      <a:srgbClr val="1E5AA8"/>
+                    </a:solidFill>
+                  </a:tcPr>
+                </a:tc>
+                <a:tc>
+                  <a:txBody>
+                    <a:bodyPr/>
+                    <a:lstStyle/>
+                    <a:p>
+                      <a:r>
+                        <a:rPr sz="1300" b="1">
+                          <a:solidFill>
+                            <a:srgbClr val="FFFFFF"/>
+                          </a:solidFill>
+                          <a:latin typeface="Yu Gothic"/>
+                        </a:rPr>
+                        <a:t>所要</a:t>
+                      </a:r>
+                    </a:p>
+                  </a:txBody>
+                  <a:tcPr marT="38100" marB="38100">
+                    <a:solidFill>
+                      <a:srgbClr val="1E5AA8"/>
+                    </a:solidFill>
+                  </a:tcPr>
+                </a:tc>
+              </a:tr>
+              <a:tr h="406908">
+                <a:tc>
+                  <a:txBody>
+                    <a:bodyPr/>
+                    <a:lstStyle/>
+                    <a:p>
+                      <a:r>
+                        <a:rPr sz="1300" b="0">
+                          <a:solidFill>
+                            <a:srgbClr val="1B1F24"/>
+                          </a:solidFill>
+                          <a:latin typeface="Yu Gothic"/>
+                        </a:rPr>
+                        <a:t>rapidocr:japan_v4</a:t>
+                      </a:r>
+                    </a:p>
+                  </a:txBody>
+                  <a:tcPr marT="38100" marB="38100">
+                    <a:solidFill>
+                      <a:srgbClr val="FFFFFF"/>
+                    </a:solidFill>
+                  </a:tcPr>
+                </a:tc>
+                <a:tc>
+                  <a:txBody>
+                    <a:bodyPr/>
+                    <a:lstStyle/>
+                    <a:p>
+                      <a:r>
+                        <a:rPr sz="1300" b="0">
+                          <a:solidFill>
+                            <a:srgbClr val="1A7F4B"/>
+                          </a:solidFill>
+                          <a:latin typeface="Yu Gothic"/>
+                        </a:rPr>
+                        <a:t>93.0%</a:t>
+                      </a:r>
+                    </a:p>
+                  </a:txBody>
+                  <a:tcPr marT="38100" marB="38100">
+                    <a:solidFill>
+                      <a:srgbClr val="FFFFFF"/>
+                    </a:solidFill>
+                  </a:tcPr>
+                </a:tc>
+                <a:tc>
+                  <a:txBody>
+                    <a:bodyPr/>
+                    <a:lstStyle/>
+                    <a:p>
+                      <a:r>
+                        <a:rPr sz="1300" b="0">
+                          <a:solidFill>
+                            <a:srgbClr val="1A7F4B"/>
+                          </a:solidFill>
+                          <a:latin typeface="Yu Gothic"/>
+                        </a:rPr>
+                        <a:t>60.0%</a:t>
+                      </a:r>
+                    </a:p>
+                  </a:txBody>
+                  <a:tcPr marT="38100" marB="38100">
+                    <a:solidFill>
+                      <a:srgbClr val="FFFFFF"/>
+                    </a:solidFill>
+                  </a:tcPr>
+                </a:tc>
+                <a:tc>
+                  <a:txBody>
+                    <a:bodyPr/>
+                    <a:lstStyle/>
+                    <a:p>
+                      <a:r>
+                        <a:rPr sz="1300" b="0">
+                          <a:solidFill>
+                            <a:srgbClr val="1A7F4B"/>
+                          </a:solidFill>
+                          <a:latin typeface="Yu Gothic"/>
+                        </a:rPr>
+                        <a:t>95.5%</a:t>
+                      </a:r>
+                    </a:p>
+                  </a:txBody>
+                  <a:tcPr marT="38100" marB="38100">
+                    <a:solidFill>
+                      <a:srgbClr val="FFFFFF"/>
+                    </a:solidFill>
+                  </a:tcPr>
+                </a:tc>
+                <a:tc>
+                  <a:txBody>
+                    <a:bodyPr/>
+                    <a:lstStyle/>
+                    <a:p>
+                      <a:r>
+                        <a:rPr sz="1300" b="0">
+                          <a:solidFill>
+                            <a:srgbClr val="1A7F4B"/>
+                          </a:solidFill>
+                          <a:latin typeface="Yu Gothic"/>
+                        </a:rPr>
+                        <a:t>0件</a:t>
+                      </a:r>
+                    </a:p>
+                  </a:txBody>
+                  <a:tcPr marT="38100" marB="38100">
+                    <a:solidFill>
+                      <a:srgbClr val="FFFFFF"/>
+                    </a:solidFill>
+                  </a:tcPr>
+                </a:tc>
+                <a:tc>
+                  <a:txBody>
+                    <a:bodyPr/>
+                    <a:lstStyle/>
+                    <a:p>
+                      <a:r>
+                        <a:rPr sz="1300" b="0">
+                          <a:solidFill>
+                            <a:srgbClr val="1A7F4B"/>
+                          </a:solidFill>
+                          <a:latin typeface="Yu Gothic"/>
+                        </a:rPr>
+                        <a:t>45.3秒</a:t>
+                      </a:r>
+                    </a:p>
+                  </a:txBody>
+                  <a:tcPr marT="38100" marB="38100">
+                    <a:solidFill>
+                      <a:srgbClr val="FFFFFF"/>
+                    </a:solidFill>
+                  </a:tcPr>
+                </a:tc>
+              </a:tr>
+              <a:tr h="406908">
+                <a:tc>
+                  <a:txBody>
+                    <a:bodyPr/>
+                    <a:lstStyle/>
+                    <a:p>
+                      <a:r>
+                        <a:rPr sz="1300" b="0">
+                          <a:solidFill>
+                            <a:srgbClr val="1B1F24"/>
+                          </a:solidFill>
+                          <a:latin typeface="Yu Gothic"/>
+                        </a:rPr>
                         <a:t>tesseract</a:t>
                       </a:r>
                     </a:p>
                   </a:txBody>
                   <a:tcPr marT="38100" marB="38100">
                     <a:solidFill>
-                      <a:srgbClr val="1E5AA8"/>
-                    </a:solidFill>
-                  </a:tcPr>
-                </a:tc>
-                <a:tc>
-                  <a:txBody>
-                    <a:bodyPr/>
-                    <a:lstStyle/>
-                    <a:p>
-                      <a:r>
-                        <a:rPr sz="1150" b="1">
-                          <a:solidFill>
-                            <a:srgbClr val="FFFFFF"/>
-                          </a:solidFill>
-                          <a:latin typeface="Yu Gothic"/>
-                        </a:rPr>
-                        <a:t>RapidOCR</a:t>
-                      </a:r>
-                    </a:p>
-                  </a:txBody>
-                  <a:tcPr marT="38100" marB="38100">
-                    <a:solidFill>
-                      <a:srgbClr val="1E5AA8"/>
-                    </a:solidFill>
-                  </a:tcPr>
-                </a:tc>
-                <a:tc>
-                  <a:txBody>
-                    <a:bodyPr/>
-                    <a:lstStyle/>
-                    <a:p>
-                      <a:r>
-                        <a:rPr sz="1150" b="1">
-                          <a:solidFill>
-                            <a:srgbClr val="FFFFFF"/>
-                          </a:solidFill>
-                          <a:latin typeface="Yu Gothic"/>
-                        </a:rPr>
-                        <a:t>manga-ocr</a:t>
-                      </a:r>
-                    </a:p>
-                  </a:txBody>
-                  <a:tcPr marT="38100" marB="38100">
-                    <a:solidFill>
-                      <a:srgbClr val="1E5AA8"/>
+                      <a:srgbClr val="F2F5F9"/>
+                    </a:solidFill>
+                  </a:tcPr>
+                </a:tc>
+                <a:tc>
+                  <a:txBody>
+                    <a:bodyPr/>
+                    <a:lstStyle/>
+                    <a:p>
+                      <a:r>
+                        <a:rPr sz="1300" b="0">
+                          <a:solidFill>
+                            <a:srgbClr val="1B1F24"/>
+                          </a:solidFill>
+                          <a:latin typeface="Yu Gothic"/>
+                        </a:rPr>
+                        <a:t>85.3%</a:t>
+                      </a:r>
+                    </a:p>
+                  </a:txBody>
+                  <a:tcPr marT="38100" marB="38100">
+                    <a:solidFill>
+                      <a:srgbClr val="F2F5F9"/>
+                    </a:solidFill>
+                  </a:tcPr>
+                </a:tc>
+                <a:tc>
+                  <a:txBody>
+                    <a:bodyPr/>
+                    <a:lstStyle/>
+                    <a:p>
+                      <a:r>
+                        <a:rPr sz="1300" b="0">
+                          <a:solidFill>
+                            <a:srgbClr val="1B1F24"/>
+                          </a:solidFill>
+                          <a:latin typeface="Yu Gothic"/>
+                        </a:rPr>
+                        <a:t>54.0%</a:t>
+                      </a:r>
+                    </a:p>
+                  </a:txBody>
+                  <a:tcPr marT="38100" marB="38100">
+                    <a:solidFill>
+                      <a:srgbClr val="F2F5F9"/>
+                    </a:solidFill>
+                  </a:tcPr>
+                </a:tc>
+                <a:tc>
+                  <a:txBody>
+                    <a:bodyPr/>
+                    <a:lstStyle/>
+                    <a:p>
+                      <a:r>
+                        <a:rPr sz="1300" b="0">
+                          <a:solidFill>
+                            <a:srgbClr val="1B1F24"/>
+                          </a:solidFill>
+                          <a:latin typeface="Yu Gothic"/>
+                        </a:rPr>
+                        <a:t>81.8%</a:t>
+                      </a:r>
+                    </a:p>
+                  </a:txBody>
+                  <a:tcPr marT="38100" marB="38100">
+                    <a:solidFill>
+                      <a:srgbClr val="F2F5F9"/>
+                    </a:solidFill>
+                  </a:tcPr>
+                </a:tc>
+                <a:tc>
+                  <a:txBody>
+                    <a:bodyPr/>
+                    <a:lstStyle/>
+                    <a:p>
+                      <a:r>
+                        <a:rPr sz="1300" b="0">
+                          <a:solidFill>
+                            <a:srgbClr val="1B1F24"/>
+                          </a:solidFill>
+                          <a:latin typeface="Yu Gothic"/>
+                        </a:rPr>
+                        <a:t>2件</a:t>
+                      </a:r>
+                    </a:p>
+                  </a:txBody>
+                  <a:tcPr marT="38100" marB="38100">
+                    <a:solidFill>
+                      <a:srgbClr val="F2F5F9"/>
+                    </a:solidFill>
+                  </a:tcPr>
+                </a:tc>
+                <a:tc>
+                  <a:txBody>
+                    <a:bodyPr/>
+                    <a:lstStyle/>
+                    <a:p>
+                      <a:r>
+                        <a:rPr sz="1300" b="0">
+                          <a:solidFill>
+                            <a:srgbClr val="1B1F24"/>
+                          </a:solidFill>
+                          <a:latin typeface="Yu Gothic"/>
+                        </a:rPr>
+                        <a:t>9.5秒</a:t>
+                      </a:r>
+                    </a:p>
+                  </a:txBody>
+                  <a:tcPr marT="38100" marB="38100">
+                    <a:solidFill>
+                      <a:srgbClr val="F2F5F9"/>
                     </a:solidFill>
                   </a:tcPr>
                 </a:tc>
               </a:tr>
-              <a:tr h="399288">
-                <a:tc>
-                  <a:txBody>
-                    <a:bodyPr/>
-                    <a:lstStyle/>
-                    <a:p>
-                      <a:r>
-                        <a:rPr sz="1150" b="0">
+              <a:tr h="406908">
+                <a:tc>
+                  <a:txBody>
+                    <a:bodyPr/>
+                    <a:lstStyle/>
+                    <a:p>
+                      <a:r>
+                        <a:rPr sz="1300" b="0">
                           <a:solidFill>
                             <a:srgbClr val="1B1F24"/>
                           </a:solidFill>
                           <a:latin typeface="Yu Gothic"/>
                         </a:rPr>
-                        <a:t>医療機関名</a:t>
+                        <a:t>rapidocr</a:t>
                       </a:r>
                     </a:p>
                   </a:txBody>
@@ -7604,13 +7895,13 @@
                     <a:lstStyle/>
                     <a:p>
                       <a:r>
-                        <a:rPr sz="1150" b="0">
+                        <a:rPr sz="1300" b="0">
                           <a:solidFill>
                             <a:srgbClr val="1B1F24"/>
                           </a:solidFill>
                           <a:latin typeface="Yu Gothic"/>
                         </a:rPr>
-                        <a:t>牛久愛和総合病院</a:t>
+                        <a:t>80.4%</a:t>
                       </a:r>
                     </a:p>
                   </a:txBody>
@@ -7626,13 +7917,13 @@
                     <a:lstStyle/>
                     <a:p>
                       <a:r>
-                        <a:rPr sz="1150" b="0">
+                        <a:rPr sz="1300" b="0">
                           <a:solidFill>
                             <a:srgbClr val="1B1F24"/>
                           </a:solidFill>
                           <a:latin typeface="Yu Gothic"/>
                         </a:rPr>
-                        <a:t>生ん愛和総合病院</a:t>
+                        <a:t>42.0%</a:t>
                       </a:r>
                     </a:p>
                   </a:txBody>
@@ -7648,13 +7939,13 @@
                     <a:lstStyle/>
                     <a:p>
                       <a:r>
-                        <a:rPr sz="1150" b="0">
+                        <a:rPr sz="1300" b="0">
                           <a:solidFill>
                             <a:srgbClr val="1B1F24"/>
                           </a:solidFill>
                           <a:latin typeface="Yu Gothic"/>
                         </a:rPr>
-                        <a:t>生久爱和合病院</a:t>
+                        <a:t>90.9%</a:t>
                       </a:r>
                     </a:p>
                   </a:txBody>
@@ -7670,13 +7961,13 @@
                     <a:lstStyle/>
                     <a:p>
                       <a:r>
-                        <a:rPr sz="1150" b="0">
+                        <a:rPr sz="1300" b="0">
                           <a:solidFill>
                             <a:srgbClr val="1B1F24"/>
                           </a:solidFill>
                           <a:latin typeface="Yu Gothic"/>
                         </a:rPr>
-                        <a:t>ここで、年の経験経営者には</a:t>
+                        <a:t>1件</a:t>
                       </a:r>
                     </a:p>
                   </a:txBody>
@@ -7686,445 +7977,19 @@
                     </a:solidFill>
                   </a:tcPr>
                 </a:tc>
-              </a:tr>
-              <a:tr h="399288">
-                <a:tc>
-                  <a:txBody>
-                    <a:bodyPr/>
-                    <a:lstStyle/>
-                    <a:p>
-                      <a:r>
-                        <a:rPr sz="1150" b="0">
+                <a:tc>
+                  <a:txBody>
+                    <a:bodyPr/>
+                    <a:lstStyle/>
+                    <a:p>
+                      <a:r>
+                        <a:rPr sz="1300" b="0">
                           <a:solidFill>
                             <a:srgbClr val="1B1F24"/>
                           </a:solidFill>
                           <a:latin typeface="Yu Gothic"/>
                         </a:rPr>
-                        <a:t>診断名</a:t>
-                      </a:r>
-                    </a:p>
-                  </a:txBody>
-                  <a:tcPr marT="38100" marB="38100">
-                    <a:solidFill>
-                      <a:srgbClr val="F2F5F9"/>
-                    </a:solidFill>
-                  </a:tcPr>
-                </a:tc>
-                <a:tc>
-                  <a:txBody>
-                    <a:bodyPr/>
-                    <a:lstStyle/>
-                    <a:p>
-                      <a:r>
-                        <a:rPr sz="1150" b="0">
-                          <a:solidFill>
-                            <a:srgbClr val="1B1F24"/>
-                          </a:solidFill>
-                          <a:latin typeface="Yu Gothic"/>
-                        </a:rPr>
-                        <a:t>変形性膝関節症</a:t>
-                      </a:r>
-                    </a:p>
-                  </a:txBody>
-                  <a:tcPr marT="38100" marB="38100">
-                    <a:solidFill>
-                      <a:srgbClr val="F2F5F9"/>
-                    </a:solidFill>
-                  </a:tcPr>
-                </a:tc>
-                <a:tc>
-                  <a:txBody>
-                    <a:bodyPr/>
-                    <a:lstStyle/>
-                    <a:p>
-                      <a:r>
-                        <a:rPr sz="1150" b="0">
-                          <a:solidFill>
-                            <a:srgbClr val="1B1F24"/>
-                          </a:solidFill>
-                          <a:latin typeface="Yu Gothic"/>
-                        </a:rPr>
-                        <a:t>変形性膝関節症</a:t>
-                      </a:r>
-                    </a:p>
-                  </a:txBody>
-                  <a:tcPr marT="38100" marB="38100">
-                    <a:solidFill>
-                      <a:srgbClr val="F2F5F9"/>
-                    </a:solidFill>
-                  </a:tcPr>
-                </a:tc>
-                <a:tc>
-                  <a:txBody>
-                    <a:bodyPr/>
-                    <a:lstStyle/>
-                    <a:p>
-                      <a:r>
-                        <a:rPr sz="1150" b="0">
-                          <a:solidFill>
-                            <a:srgbClr val="1B1F24"/>
-                          </a:solidFill>
-                          <a:latin typeface="Yu Gothic"/>
-                        </a:rPr>
-                        <a:t>变形性膝節症</a:t>
-                      </a:r>
-                    </a:p>
-                  </a:txBody>
-                  <a:tcPr marT="38100" marB="38100">
-                    <a:solidFill>
-                      <a:srgbClr val="F2F5F9"/>
-                    </a:solidFill>
-                  </a:tcPr>
-                </a:tc>
-                <a:tc>
-                  <a:txBody>
-                    <a:bodyPr/>
-                    <a:lstStyle/>
-                    <a:p>
-                      <a:r>
-                        <a:rPr sz="1150" b="0">
-                          <a:solidFill>
-                            <a:srgbClr val="1B1F24"/>
-                          </a:solidFill>
-                          <a:latin typeface="Yu Gothic"/>
-                        </a:rPr>
-                        <a:t>．．．変材推察課題に</a:t>
-                      </a:r>
-                    </a:p>
-                  </a:txBody>
-                  <a:tcPr marT="38100" marB="38100">
-                    <a:solidFill>
-                      <a:srgbClr val="F2F5F9"/>
-                    </a:solidFill>
-                  </a:tcPr>
-                </a:tc>
-              </a:tr>
-              <a:tr h="399288">
-                <a:tc>
-                  <a:txBody>
-                    <a:bodyPr/>
-                    <a:lstStyle/>
-                    <a:p>
-                      <a:r>
-                        <a:rPr sz="1150" b="0">
-                          <a:solidFill>
-                            <a:srgbClr val="1B1F24"/>
-                          </a:solidFill>
-                          <a:latin typeface="Yu Gothic"/>
-                        </a:rPr>
-                        <a:t>住所</a:t>
-                      </a:r>
-                    </a:p>
-                  </a:txBody>
-                  <a:tcPr marT="38100" marB="38100">
-                    <a:solidFill>
-                      <a:srgbClr val="FFFFFF"/>
-                    </a:solidFill>
-                  </a:tcPr>
-                </a:tc>
-                <a:tc>
-                  <a:txBody>
-                    <a:bodyPr/>
-                    <a:lstStyle/>
-                    <a:p>
-                      <a:r>
-                        <a:rPr sz="1150" b="0">
-                          <a:solidFill>
-                            <a:srgbClr val="1B1F24"/>
-                          </a:solidFill>
-                          <a:latin typeface="Yu Gothic"/>
-                        </a:rPr>
-                        <a:t>茨城県土浦市中央8-21-17</a:t>
-                      </a:r>
-                    </a:p>
-                  </a:txBody>
-                  <a:tcPr marT="38100" marB="38100">
-                    <a:solidFill>
-                      <a:srgbClr val="FFFFFF"/>
-                    </a:solidFill>
-                  </a:tcPr>
-                </a:tc>
-                <a:tc>
-                  <a:txBody>
-                    <a:bodyPr/>
-                    <a:lstStyle/>
-                    <a:p>
-                      <a:r>
-                        <a:rPr sz="1150" b="0">
-                          <a:solidFill>
-                            <a:srgbClr val="1B1F24"/>
-                          </a:solidFill>
-                          <a:latin typeface="Yu Gothic"/>
-                        </a:rPr>
-                        <a:t>茨城県二浦市中央8-21-17</a:t>
-                      </a:r>
-                    </a:p>
-                  </a:txBody>
-                  <a:tcPr marT="38100" marB="38100">
-                    <a:solidFill>
-                      <a:srgbClr val="FFFFFF"/>
-                    </a:solidFill>
-                  </a:tcPr>
-                </a:tc>
-                <a:tc>
-                  <a:txBody>
-                    <a:bodyPr/>
-                    <a:lstStyle/>
-                    <a:p>
-                      <a:r>
-                        <a:rPr sz="1150" b="0">
-                          <a:solidFill>
-                            <a:srgbClr val="1B1F24"/>
-                          </a:solidFill>
-                          <a:latin typeface="Yu Gothic"/>
-                        </a:rPr>
-                        <a:t>茨城土浦市中央8-21-17</a:t>
-                      </a:r>
-                    </a:p>
-                  </a:txBody>
-                  <a:tcPr marT="38100" marB="38100">
-                    <a:solidFill>
-                      <a:srgbClr val="FFFFFF"/>
-                    </a:solidFill>
-                  </a:tcPr>
-                </a:tc>
-                <a:tc>
-                  <a:txBody>
-                    <a:bodyPr/>
-                    <a:lstStyle/>
-                    <a:p>
-                      <a:r>
-                        <a:rPr sz="1150" b="0">
-                          <a:solidFill>
-                            <a:srgbClr val="1B1F24"/>
-                          </a:solidFill>
-                          <a:latin typeface="Yu Gothic"/>
-                        </a:rPr>
-                        <a:t>茨城県土浦市中央８２１１７</a:t>
-                      </a:r>
-                    </a:p>
-                  </a:txBody>
-                  <a:tcPr marT="38100" marB="38100">
-                    <a:solidFill>
-                      <a:srgbClr val="FFFFFF"/>
-                    </a:solidFill>
-                  </a:tcPr>
-                </a:tc>
-              </a:tr>
-              <a:tr h="399288">
-                <a:tc>
-                  <a:txBody>
-                    <a:bodyPr/>
-                    <a:lstStyle/>
-                    <a:p>
-                      <a:r>
-                        <a:rPr sz="1150" b="0">
-                          <a:solidFill>
-                            <a:srgbClr val="1B1F24"/>
-                          </a:solidFill>
-                          <a:latin typeface="Yu Gothic"/>
-                        </a:rPr>
-                        <a:t>特記（長文）</a:t>
-                      </a:r>
-                    </a:p>
-                  </a:txBody>
-                  <a:tcPr marT="38100" marB="38100">
-                    <a:solidFill>
-                      <a:srgbClr val="F2F5F9"/>
-                    </a:solidFill>
-                  </a:tcPr>
-                </a:tc>
-                <a:tc>
-                  <a:txBody>
-                    <a:bodyPr/>
-                    <a:lstStyle/>
-                    <a:p>
-                      <a:r>
-                        <a:rPr sz="1150" b="0">
-                          <a:solidFill>
-                            <a:srgbClr val="1B1F24"/>
-                          </a:solidFill>
-                          <a:latin typeface="Yu Gothic"/>
-                        </a:rPr>
-                        <a:t>独居であり……</a:t>
-                      </a:r>
-                    </a:p>
-                  </a:txBody>
-                  <a:tcPr marT="38100" marB="38100">
-                    <a:solidFill>
-                      <a:srgbClr val="F2F5F9"/>
-                    </a:solidFill>
-                  </a:tcPr>
-                </a:tc>
-                <a:tc>
-                  <a:txBody>
-                    <a:bodyPr/>
-                    <a:lstStyle/>
-                    <a:p>
-                      <a:r>
-                        <a:rPr sz="1150" b="0">
-                          <a:solidFill>
-                            <a:srgbClr val="1B1F24"/>
-                          </a:solidFill>
-                          <a:latin typeface="Yu Gothic"/>
-                        </a:rPr>
-                        <a:t>ほぼ全文正解</a:t>
-                      </a:r>
-                    </a:p>
-                  </a:txBody>
-                  <a:tcPr marT="38100" marB="38100">
-                    <a:solidFill>
-                      <a:srgbClr val="F2F5F9"/>
-                    </a:solidFill>
-                  </a:tcPr>
-                </a:tc>
-                <a:tc>
-                  <a:txBody>
-                    <a:bodyPr/>
-                    <a:lstStyle/>
-                    <a:p>
-                      <a:r>
-                        <a:rPr sz="1150" b="0">
-                          <a:solidFill>
-                            <a:srgbClr val="1B1F24"/>
-                          </a:solidFill>
-                          <a:latin typeface="Yu Gothic"/>
-                        </a:rPr>
-                        <a:t>助詞が大量に脱落</a:t>
-                      </a:r>
-                    </a:p>
-                  </a:txBody>
-                  <a:tcPr marT="38100" marB="38100">
-                    <a:solidFill>
-                      <a:srgbClr val="F2F5F9"/>
-                    </a:solidFill>
-                  </a:tcPr>
-                </a:tc>
-                <a:tc>
-                  <a:txBody>
-                    <a:bodyPr/>
-                    <a:lstStyle/>
-                    <a:p>
-                      <a:r>
-                        <a:rPr sz="1150" b="0">
-                          <a:solidFill>
-                            <a:srgbClr val="1B1F24"/>
-                          </a:solidFill>
-                          <a:latin typeface="Yu Gothic"/>
-                        </a:rPr>
-                        <a:t>－</a:t>
-                      </a:r>
-                    </a:p>
-                  </a:txBody>
-                  <a:tcPr marT="38100" marB="38100">
-                    <a:solidFill>
-                      <a:srgbClr val="F2F5F9"/>
-                    </a:solidFill>
-                  </a:tcPr>
-                </a:tc>
-              </a:tr>
-              <a:tr h="399288">
-                <a:tc>
-                  <a:txBody>
-                    <a:bodyPr/>
-                    <a:lstStyle/>
-                    <a:p>
-                      <a:r>
-                        <a:rPr sz="1150" b="0">
-                          <a:solidFill>
-                            <a:srgbClr val="1B1F24"/>
-                          </a:solidFill>
-                          <a:latin typeface="Yu Gothic"/>
-                        </a:rPr>
-                        <a:t>氏名（手書き）</a:t>
-                      </a:r>
-                    </a:p>
-                  </a:txBody>
-                  <a:tcPr marT="38100" marB="38100">
-                    <a:solidFill>
-                      <a:srgbClr val="FFFFFF"/>
-                    </a:solidFill>
-                  </a:tcPr>
-                </a:tc>
-                <a:tc>
-                  <a:txBody>
-                    <a:bodyPr/>
-                    <a:lstStyle/>
-                    <a:p>
-                      <a:r>
-                        <a:rPr sz="1150" b="0">
-                          <a:solidFill>
-                            <a:srgbClr val="1B1F24"/>
-                          </a:solidFill>
-                          <a:latin typeface="Yu Gothic"/>
-                        </a:rPr>
-                        <a:t>石井 とめ</a:t>
-                      </a:r>
-                    </a:p>
-                  </a:txBody>
-                  <a:tcPr marT="38100" marB="38100">
-                    <a:solidFill>
-                      <a:srgbClr val="FFFFFF"/>
-                    </a:solidFill>
-                  </a:tcPr>
-                </a:tc>
-                <a:tc>
-                  <a:txBody>
-                    <a:bodyPr/>
-                    <a:lstStyle/>
-                    <a:p>
-                      <a:r>
-                        <a:rPr sz="1150" b="0">
-                          <a:solidFill>
-                            <a:srgbClr val="1B1F24"/>
-                          </a:solidFill>
-                          <a:latin typeface="Yu Gothic"/>
-                        </a:rPr>
-                        <a:t>（空）</a:t>
-                      </a:r>
-                    </a:p>
-                  </a:txBody>
-                  <a:tcPr marT="38100" marB="38100">
-                    <a:solidFill>
-                      <a:srgbClr val="FFFFFF"/>
-                    </a:solidFill>
-                  </a:tcPr>
-                </a:tc>
-                <a:tc>
-                  <a:txBody>
-                    <a:bodyPr/>
-                    <a:lstStyle/>
-                    <a:p>
-                      <a:r>
-                        <a:rPr sz="1150" b="0">
-                          <a:solidFill>
-                            <a:srgbClr val="1B1F24"/>
-                          </a:solidFill>
-                          <a:latin typeface="Yu Gothic"/>
-                        </a:rPr>
-                        <a:t>石井</a:t>
-                      </a:r>
-                    </a:p>
-                  </a:txBody>
-                  <a:tcPr marT="38100" marB="38100">
-                    <a:solidFill>
-                      <a:srgbClr val="FFFFFF"/>
-                    </a:solidFill>
-                  </a:tcPr>
-                </a:tc>
-                <a:tc>
-                  <a:txBody>
-                    <a:bodyPr/>
-                    <a:lstStyle/>
-                    <a:p>
-                      <a:r>
-                        <a:rPr sz="1150" b="0">
-                          <a:solidFill>
-                            <a:srgbClr val="1B1F24"/>
-                          </a:solidFill>
-                          <a:latin typeface="Yu Gothic"/>
-                        </a:rPr>
-                        <a:t>でも、石井とめでは、</a:t>
+                        <a:t>55.9秒</a:t>
                       </a:r>
                     </a:p>
                   </a:txBody>
@@ -8147,8 +8012,8 @@
         </p:nvSpPr>
         <p:spPr>
           <a:xfrm>
-            <a:off x="685800" y="5120640"/>
-            <a:ext cx="10881360" cy="548640"/>
+            <a:off x="685800" y="3657600"/>
+            <a:ext cx="10881360" cy="4572000"/>
           </a:xfrm>
           <a:prstGeom prst="rect">
             <a:avLst/>
@@ -8163,17 +8028,129 @@
           <a:p>
             <a:pPr algn="l">
               <a:spcBef>
-                <a:spcPts val="0"/>
-              </a:spcBef>
-            </a:pPr>
-            <a:r>
-              <a:rPr sz="1300" b="0">
-                <a:solidFill>
-                  <a:srgbClr val="B04A0A"/>
-                </a:solidFill>
-                <a:latin typeface="Yu Gothic"/>
-              </a:rPr>
-              <a:t>tesseract を既定にした。manga-ocr は生成型のため、文字が少ない欄で「もっともらしい文章を作り出す」ので使わない。</a:t>
+                <a:spcPts val="1000"/>
+              </a:spcBef>
+            </a:pPr>
+            <a:r>
+              <a:rPr sz="1500" b="1">
+                <a:solidFill>
+                  <a:srgbClr val="1B1F24"/>
+                </a:solidFill>
+                <a:latin typeface="Yu Gothic"/>
+              </a:rPr>
+              <a:t>・日本語専用の認識モデルに替えた（PP-OCRv4）</a:t>
+            </a:r>
+          </a:p>
+          <a:p>
+            <a:pPr algn="l">
+              <a:spcBef>
+                <a:spcPts val="200"/>
+              </a:spcBef>
+            </a:pPr>
+            <a:r>
+              <a:rPr sz="1200" b="0">
+                <a:solidFill>
+                  <a:srgbClr val="5B636E"/>
+                </a:solidFill>
+                <a:latin typeface="Yu Gothic"/>
+              </a:rPr>
+              <a:t>　　既定のRapidOCRは中国語向け。tesseractは日本語のかな・医療用語に弱い</a:t>
+            </a:r>
+          </a:p>
+          <a:p>
+            <a:pPr algn="l">
+              <a:spcBef>
+                <a:spcPts val="1000"/>
+              </a:spcBef>
+            </a:pPr>
+            <a:r>
+              <a:rPr sz="1500" b="1">
+                <a:solidFill>
+                  <a:srgbClr val="1B1F24"/>
+                </a:solidFill>
+                <a:latin typeface="Yu Gothic"/>
+              </a:rPr>
+              <a:t>・罫線・カッコ・単位を切り落としてから読む</a:t>
+            </a:r>
+          </a:p>
+          <a:p>
+            <a:pPr algn="l">
+              <a:spcBef>
+                <a:spcPts val="200"/>
+              </a:spcBef>
+            </a:pPr>
+            <a:r>
+              <a:rPr sz="1200" b="0">
+                <a:solidFill>
+                  <a:srgbClr val="5B636E"/>
+                </a:solidFill>
+                <a:latin typeface="Yu Gothic"/>
+              </a:rPr>
+              <a:t>　　白紙様式との差分で印刷と書き込みを見分ける。生読みで 78.0% → 84.6%</a:t>
+            </a:r>
+          </a:p>
+          <a:p>
+            <a:pPr algn="l">
+              <a:spcBef>
+                <a:spcPts val="1000"/>
+              </a:spcBef>
+            </a:pPr>
+            <a:r>
+              <a:rPr sz="1500" b="1">
+                <a:solidFill>
+                  <a:srgbClr val="1B1F24"/>
+                </a:solidFill>
+                <a:latin typeface="Yu Gothic"/>
+              </a:rPr>
+              <a:t>・書き込みが無い欄は読まない</a:t>
+            </a:r>
+          </a:p>
+          <a:p>
+            <a:pPr algn="l">
+              <a:spcBef>
+                <a:spcPts val="200"/>
+              </a:spcBef>
+            </a:pPr>
+            <a:r>
+              <a:rPr sz="1200" b="0">
+                <a:solidFill>
+                  <a:srgbClr val="5B636E"/>
+                </a:solidFill>
+                <a:latin typeface="Yu Gothic"/>
+              </a:rPr>
+              <a:t>　　罫線から文字を作る「拾い読み」を防ぐ</a:t>
+            </a:r>
+          </a:p>
+          <a:p>
+            <a:pPr algn="l">
+              <a:spcBef>
+                <a:spcPts val="1000"/>
+              </a:spcBef>
+            </a:pPr>
+            <a:r>
+              <a:rPr sz="1500" b="1">
+                <a:solidFill>
+                  <a:srgbClr val="1B1F24"/>
+                </a:solidFill>
+                <a:latin typeface="Yu Gothic"/>
+              </a:rPr>
+              <a:t>・ブラウザ版も同じモデルを動かす（onnxruntime-web）</a:t>
+            </a:r>
+          </a:p>
+          <a:p>
+            <a:pPr algn="l">
+              <a:spcBef>
+                <a:spcPts val="200"/>
+              </a:spcBef>
+            </a:pPr>
+            <a:r>
+              <a:rPr sz="1200" b="0">
+                <a:solidFill>
+                  <a:srgbClr val="5B636E"/>
+                </a:solidFill>
+                <a:latin typeface="Yu Gothic"/>
+              </a:rPr>
+              <a:t>　　実測 92.1%。Python版 93.0% とほぼ揃った</a:t>
             </a:r>
           </a:p>
         </p:txBody>

--- a/docs/主治医意見書読み取り_概要.pptx
+++ b/docs/主治医意見書読み取り_概要.pptx
@@ -20,6 +20,11 @@
     <p:sldId id="268" r:id="rId19"/>
     <p:sldId id="269" r:id="rId20"/>
     <p:sldId id="270" r:id="rId21"/>
+    <p:sldId id="271" r:id="rId22"/>
+    <p:sldId id="272" r:id="rId23"/>
+    <p:sldId id="273" r:id="rId24"/>
+    <p:sldId id="274" r:id="rId25"/>
+    <p:sldId id="275" r:id="rId26"/>
   </p:sldIdLst>
   <p:sldSz cx="12191695" cy="6858000" type="screen4x3"/>
   <p:notesSz cx="6858000" cy="9144000"/>
@@ -3299,7 +3304,7 @@
                 </a:solidFill>
                 <a:latin typeface="Yu Gothic"/>
               </a:rPr>
-              <a:t>2026年9月8日</a:t>
+              <a:t>2026年9月12日</a:t>
             </a:r>
           </a:p>
         </p:txBody>
@@ -3356,23 +3361,7 @@
                 </a:solidFill>
                 <a:latin typeface="Yu Gothic"/>
               </a:rPr>
-              <a:t>確認・編集画面の工夫</a:t>
-            </a:r>
-          </a:p>
-          <a:p>
-            <a:pPr algn="l">
-              <a:spcBef>
-                <a:spcPts val="400"/>
-              </a:spcBef>
-            </a:pPr>
-            <a:r>
-              <a:rPr sz="1400" b="0">
-                <a:solidFill>
-                  <a:srgbClr val="5B636E"/>
-                </a:solidFill>
-                <a:latin typeface="Yu Gothic"/>
-              </a:rPr>
-              <a:t>読み違いを見つけやすく、直しやすくする</a:t>
+              <a:t>医療辞書と医療機関一覧</a:t>
             </a:r>
           </a:p>
         </p:txBody>
@@ -3449,13 +3438,13 @@
               </a:spcBef>
             </a:pPr>
             <a:r>
-              <a:rPr sz="1600" b="1">
+              <a:rPr sz="1700" b="1">
                 <a:solidFill>
                   <a:srgbClr val="1B1F24"/>
                 </a:solidFill>
                 <a:latin typeface="Yu Gothic"/>
               </a:rPr>
-              <a:t>・確信度を色で示す（高・中・要確認・修正済み・確定・匿名化）</a:t>
+              <a:t>・傷病名は ICD-10 コードと介護保険の特定疾病フラグを持つ</a:t>
             </a:r>
           </a:p>
           <a:p>
@@ -3465,13 +3454,13 @@
               </a:spcBef>
             </a:pPr>
             <a:r>
-              <a:rPr sz="1300" b="0">
+              <a:rPr sz="1400" b="0">
                 <a:solidFill>
                   <a:srgbClr val="5B636E"/>
                 </a:solidFill>
                 <a:latin typeface="Yu Gothic"/>
               </a:rPr>
-              <a:t>　　タグだけでなく背景色にも反映し、元画像の該当箇所にも同じ色を重ねる</a:t>
+              <a:t>　　編集距離ベースの照合で1文字違いも拾う（骨粗葵症→骨粗鬆症、慢性裳臓病→慢性腎臓病）</a:t>
             </a:r>
           </a:p>
           <a:p>
@@ -3481,13 +3470,29 @@
               </a:spcBef>
             </a:pPr>
             <a:r>
-              <a:rPr sz="1600" b="1">
+              <a:rPr sz="1700" b="1">
                 <a:solidFill>
                   <a:srgbClr val="1B1F24"/>
                 </a:solidFill>
                 <a:latin typeface="Yu Gothic"/>
               </a:rPr>
-              <a:t>・様式と同じ並びで表示する</a:t>
+              <a:t>・診療科しか入らない欄には診療科の辞書を当てる</a:t>
+            </a:r>
+          </a:p>
+          <a:p>
+            <a:pPr algn="l">
+              <a:spcBef>
+                <a:spcPts val="1000"/>
+              </a:spcBef>
+            </a:pPr>
+            <a:r>
+              <a:rPr sz="1700" b="1">
+                <a:solidFill>
+                  <a:srgbClr val="1B1F24"/>
+                </a:solidFill>
+                <a:latin typeface="Yu Gothic"/>
+              </a:rPr>
+              <a:t>・医療機関は厚生労働省の一覧と突き合わせる（47 都道府県 / 97,399 件 / 2026-09-06 現在）</a:t>
             </a:r>
           </a:p>
           <a:p>
@@ -3497,13 +3502,13 @@
               </a:spcBef>
             </a:pPr>
             <a:r>
-              <a:rPr sz="1300" b="0">
+              <a:rPr sz="1400" b="0">
                 <a:solidFill>
                   <a:srgbClr val="5B636E"/>
                 </a:solidFill>
                 <a:latin typeface="Yu Gothic"/>
               </a:rPr>
-              <a:t>　　選択肢の行・列、関連項目のまとまり（褥瘡＝有無＋部位＋程度）</a:t>
+              <a:t>　　確認画面では都道府県を選んで検索でき、選ぶと所在地と電話も自動で入る</a:t>
             </a:r>
           </a:p>
           <a:p>
@@ -3513,13 +3518,13 @@
               </a:spcBef>
             </a:pPr>
             <a:r>
-              <a:rPr sz="1600" b="1">
+              <a:rPr sz="1700" b="1">
                 <a:solidFill>
                   <a:srgbClr val="1B1F24"/>
                 </a:solidFill>
                 <a:latin typeface="Yu Gothic"/>
               </a:rPr>
-              <a:t>・「確定」（黄緑）と「削除して確定」</a:t>
+              <a:t>・辞書で「短くしてしまう」置き換えはしない</a:t>
             </a:r>
           </a:p>
           <a:p>
@@ -3529,77 +3534,13 @@
               </a:spcBef>
             </a:pPr>
             <a:r>
-              <a:rPr sz="1300" b="0">
+              <a:rPr sz="1400" b="0">
                 <a:solidFill>
                   <a:srgbClr val="5B636E"/>
                 </a:solidFill>
                 <a:latin typeface="Yu Gothic"/>
               </a:rPr>
-              <a:t>　　記入が無い欄に文字が入った場合を1操作で片付ける</a:t>
-            </a:r>
-          </a:p>
-          <a:p>
-            <a:pPr algn="l">
-              <a:spcBef>
-                <a:spcPts val="1000"/>
-              </a:spcBef>
-            </a:pPr>
-            <a:r>
-              <a:rPr sz="1600" b="1">
-                <a:solidFill>
-                  <a:srgbClr val="1B1F24"/>
-                </a:solidFill>
-                <a:latin typeface="Yu Gothic"/>
-              </a:rPr>
-              <a:t>・候補ボタン（辞書・LLM・OCR生読み）と、辞書からの検索</a:t>
-            </a:r>
-          </a:p>
-          <a:p>
-            <a:pPr algn="l">
-              <a:spcBef>
-                <a:spcPts val="1000"/>
-              </a:spcBef>
-            </a:pPr>
-            <a:r>
-              <a:rPr sz="1600" b="1">
-                <a:solidFill>
-                  <a:srgbClr val="1B1F24"/>
-                </a:solidFill>
-                <a:latin typeface="Yu Gothic"/>
-              </a:rPr>
-              <a:t>・記述欄は音声入力もできる</a:t>
-            </a:r>
-          </a:p>
-          <a:p>
-            <a:pPr algn="l">
-              <a:spcBef>
-                <a:spcPts val="200"/>
-              </a:spcBef>
-            </a:pPr>
-            <a:r>
-              <a:rPr sz="1300" b="0">
-                <a:solidFill>
-                  <a:srgbClr val="5B636E"/>
-                </a:solidFill>
-                <a:latin typeface="Yu Gothic"/>
-              </a:rPr>
-              <a:t>　　ブラウザの音声認識を使うため、初回に確認を出す</a:t>
-            </a:r>
-          </a:p>
-          <a:p>
-            <a:pPr algn="l">
-              <a:spcBef>
-                <a:spcPts val="1000"/>
-              </a:spcBef>
-            </a:pPr>
-            <a:r>
-              <a:rPr sz="1600" b="1">
-                <a:solidFill>
-                  <a:srgbClr val="1B1F24"/>
-                </a:solidFill>
-                <a:latin typeface="Yu Gothic"/>
-              </a:rPr>
-              <a:t>・拡大表示は掴んで動かせる／集計は上部に固定</a:t>
+              <a:t>　　『筑波記念病院』が『病院』に、『右大腿骨骨折』が『骨折』に潰れていたのを修正</a:t>
             </a:r>
           </a:p>
         </p:txBody>
@@ -3691,7 +3632,23 @@
                 </a:solidFill>
                 <a:latin typeface="Yu Gothic"/>
               </a:rPr>
-              <a:t>匿名化・操作ログ・利用者の区別</a:t>
+              <a:t>確認・編集画面の工夫</a:t>
+            </a:r>
+          </a:p>
+          <a:p>
+            <a:pPr algn="l">
+              <a:spcBef>
+                <a:spcPts val="400"/>
+              </a:spcBef>
+            </a:pPr>
+            <a:r>
+              <a:rPr sz="1400" b="0">
+                <a:solidFill>
+                  <a:srgbClr val="5B636E"/>
+                </a:solidFill>
+                <a:latin typeface="Yu Gothic"/>
+              </a:rPr>
+              <a:t>読み違いを見つけやすく、直しやすくする</a:t>
             </a:r>
           </a:p>
         </p:txBody>
@@ -3774,7 +3731,7 @@
                 </a:solidFill>
                 <a:latin typeface="Yu Gothic"/>
               </a:rPr>
-              <a:t>・匿名化加工済みデータ（研究用）</a:t>
+              <a:t>・確信度を色で示す（高・中・要確認・修正済み・確定・匿名化）</a:t>
             </a:r>
           </a:p>
           <a:p>
@@ -3790,7 +3747,7 @@
                 </a:solidFill>
                 <a:latin typeface="Yu Gothic"/>
               </a:rPr>
-              <a:t>　　氏名欄が白抜きなら「匿名化済み」。指定すると住所・連絡先も「マスク済み」にし、元の読み取り値ごと捨てる</a:t>
+              <a:t>　　タグだけでなく背景色にも反映し、元画像の該当箇所にも同じ色を重ねる</a:t>
             </a:r>
           </a:p>
           <a:p>
@@ -3806,7 +3763,7 @@
                 </a:solidFill>
                 <a:latin typeface="Yu Gothic"/>
               </a:rPr>
-              <a:t>・操作ログ</a:t>
+              <a:t>・様式と同じ並びで表示する</a:t>
             </a:r>
           </a:p>
           <a:p>
@@ -3822,7 +3779,7 @@
                 </a:solidFill>
                 <a:latin typeface="Yu Gothic"/>
               </a:rPr>
-              <a:t>　　読み取り・修正（直す前→直した後）・確定・候補採用・音声入力を記録し、JSON / CSV で保存できる。個人情報の項目は値を残さず文字数だけ</a:t>
+              <a:t>　　選択肢の行・列、関連項目のまとまり（褥瘡＝有無＋部位＋程度）</a:t>
             </a:r>
           </a:p>
           <a:p>
@@ -3838,7 +3795,7 @@
                 </a:solidFill>
                 <a:latin typeface="Yu Gothic"/>
               </a:rPr>
-              <a:t>・利用者トークン</a:t>
+              <a:t>・「確定」（黄緑）と「削除して確定」</a:t>
             </a:r>
           </a:p>
           <a:p>
@@ -3854,7 +3811,7 @@
                 </a:solidFill>
                 <a:latin typeface="Yu Gothic"/>
               </a:rPr>
-              <a:t>　　同じ端末を複数人が使っても履歴が混ざらないよう、ブラウザごとに発行したトークンで保存先を分ける。共用端末では作業後に消せる</a:t>
+              <a:t>　　記入が無い欄に文字が入った場合を1操作で片付ける</a:t>
             </a:r>
           </a:p>
           <a:p>
@@ -3870,7 +3827,23 @@
                 </a:solidFill>
                 <a:latin typeface="Yu Gothic"/>
               </a:rPr>
-              <a:t>・サイト全体は Basic 認証で保護</a:t>
+              <a:t>・候補ボタン（辞書・LLM・OCR生読み）と、辞書からの検索</a:t>
+            </a:r>
+          </a:p>
+          <a:p>
+            <a:pPr algn="l">
+              <a:spcBef>
+                <a:spcPts val="1000"/>
+              </a:spcBef>
+            </a:pPr>
+            <a:r>
+              <a:rPr sz="1600" b="1">
+                <a:solidFill>
+                  <a:srgbClr val="1B1F24"/>
+                </a:solidFill>
+                <a:latin typeface="Yu Gothic"/>
+              </a:rPr>
+              <a:t>・記述欄は音声入力もできる</a:t>
             </a:r>
           </a:p>
           <a:p>
@@ -3886,7 +3859,23 @@
                 </a:solidFill>
                 <a:latin typeface="Yu Gothic"/>
               </a:rPr>
-              <a:t>　　トークンは認証ではない、と画面にも明記している</a:t>
+              <a:t>　　ブラウザの音声認識を使うため、初回に確認を出す</a:t>
+            </a:r>
+          </a:p>
+          <a:p>
+            <a:pPr algn="l">
+              <a:spcBef>
+                <a:spcPts val="1000"/>
+              </a:spcBef>
+            </a:pPr>
+            <a:r>
+              <a:rPr sz="1600" b="1">
+                <a:solidFill>
+                  <a:srgbClr val="1B1F24"/>
+                </a:solidFill>
+                <a:latin typeface="Yu Gothic"/>
+              </a:rPr>
+              <a:t>・拡大表示は掴んで動かせる／集計は上部に固定</a:t>
             </a:r>
           </a:p>
         </p:txBody>
@@ -3978,23 +3967,7 @@
                 </a:solidFill>
                 <a:latin typeface="Yu Gothic"/>
               </a:rPr>
-              <a:t>品質チェックで見つけた重大な不具合</a:t>
-            </a:r>
-          </a:p>
-          <a:p>
-            <a:pPr algn="l">
-              <a:spcBef>
-                <a:spcPts val="400"/>
-              </a:spcBef>
-            </a:pPr>
-            <a:r>
-              <a:rPr sz="1400" b="0">
-                <a:solidFill>
-                  <a:srgbClr val="5B636E"/>
-                </a:solidFill>
-                <a:latin typeface="Yu Gothic"/>
-              </a:rPr>
-              <a:t>「見た目は正しく確信度も高いのに中身が違う」型を、実測で洗い出した</a:t>
+              <a:t>匿名化・操作ログ・利用者の区別</a:t>
             </a:r>
           </a:p>
         </p:txBody>
@@ -4043,410 +4016,16 @@
           </a:p>
         </p:txBody>
       </p:sp>
-      <p:graphicFrame>
-        <p:nvGraphicFramePr>
-          <p:cNvPr id="4" name="Table 3"/>
-          <p:cNvGraphicFramePr>
-            <a:graphicFrameLocks noGrp="1"/>
-          </p:cNvGraphicFramePr>
-          <p:nvPr/>
-        </p:nvGraphicFramePr>
-        <p:xfrm>
-          <a:off x="685800" y="1783080"/>
-          <a:ext cx="10789920" cy="3163824"/>
-        </p:xfrm>
-        <a:graphic>
-          <a:graphicData uri="http://schemas.openxmlformats.org/drawingml/2006/table">
-            <a:tbl>
-              <a:tblPr firstRow="1" bandRow="1">
-                <a:tableStyleId>{5C22544A-7EE6-4342-B048-85BDC9FD1C3A}</a:tableStyleId>
-              </a:tblPr>
-              <a:tblGrid>
-                <a:gridCol w="4495800"/>
-                <a:gridCol w="6294120"/>
-              </a:tblGrid>
-              <a:tr h="395478">
-                <a:tc>
-                  <a:txBody>
-                    <a:bodyPr/>
-                    <a:lstStyle/>
-                    <a:p>
-                      <a:r>
-                        <a:rPr sz="1300" b="1">
-                          <a:solidFill>
-                            <a:srgbClr val="FFFFFF"/>
-                          </a:solidFill>
-                          <a:latin typeface="Yu Gothic"/>
-                        </a:rPr>
-                        <a:t>見つかった不具合</a:t>
-                      </a:r>
-                    </a:p>
-                  </a:txBody>
-                  <a:tcPr marT="38100" marB="38100">
-                    <a:solidFill>
-                      <a:srgbClr val="1E5AA8"/>
-                    </a:solidFill>
-                  </a:tcPr>
-                </a:tc>
-                <a:tc>
-                  <a:txBody>
-                    <a:bodyPr/>
-                    <a:lstStyle/>
-                    <a:p>
-                      <a:r>
-                        <a:rPr sz="1300" b="1">
-                          <a:solidFill>
-                            <a:srgbClr val="FFFFFF"/>
-                          </a:solidFill>
-                          <a:latin typeface="Yu Gothic"/>
-                        </a:rPr>
-                        <a:t>起きていたこと</a:t>
-                      </a:r>
-                    </a:p>
-                  </a:txBody>
-                  <a:tcPr marT="38100" marB="38100">
-                    <a:solidFill>
-                      <a:srgbClr val="1E5AA8"/>
-                    </a:solidFill>
-                  </a:tcPr>
-                </a:tc>
-              </a:tr>
-              <a:tr h="395478">
-                <a:tc>
-                  <a:txBody>
-                    <a:bodyPr/>
-                    <a:lstStyle/>
-                    <a:p>
-                      <a:r>
-                        <a:rPr sz="1300" b="0">
-                          <a:solidFill>
-                            <a:srgbClr val="1B1F24"/>
-                          </a:solidFill>
-                          <a:latin typeface="Yu Gothic"/>
-                        </a:rPr>
-                        <a:t>定型文フィルタが臨床情報を消す</a:t>
-                      </a:r>
-                    </a:p>
-                  </a:txBody>
-                  <a:tcPr marT="38100" marB="38100">
-                    <a:solidFill>
-                      <a:srgbClr val="FFFFFF"/>
-                    </a:solidFill>
-                  </a:tcPr>
-                </a:tc>
-                <a:tc>
-                  <a:txBody>
-                    <a:bodyPr/>
-                    <a:lstStyle/>
-                    <a:p>
-                      <a:r>
-                        <a:rPr sz="1300" b="0">
-                          <a:solidFill>
-                            <a:srgbClr val="1B1F24"/>
-                          </a:solidFill>
-                          <a:latin typeface="Yu Gothic"/>
-                        </a:rPr>
-                        <a:t>『認知症』『骨折』『がん』が空になる</a:t>
-                      </a:r>
-                    </a:p>
-                  </a:txBody>
-                  <a:tcPr marT="38100" marB="38100">
-                    <a:solidFill>
-                      <a:srgbClr val="FFFFFF"/>
-                    </a:solidFill>
-                  </a:tcPr>
-                </a:tc>
-              </a:tr>
-              <a:tr h="395478">
-                <a:tc>
-                  <a:txBody>
-                    <a:bodyPr/>
-                    <a:lstStyle/>
-                    <a:p>
-                      <a:r>
-                        <a:rPr sz="1300" b="0">
-                          <a:solidFill>
-                            <a:srgbClr val="1B1F24"/>
-                          </a:solidFill>
-                          <a:latin typeface="Yu Gothic"/>
-                        </a:rPr>
-                        <a:t>病名が別の病名に化ける</a:t>
-                      </a:r>
-                    </a:p>
-                  </a:txBody>
-                  <a:tcPr marT="38100" marB="38100">
-                    <a:solidFill>
-                      <a:srgbClr val="F2F5F9"/>
-                    </a:solidFill>
-                  </a:tcPr>
-                </a:tc>
-                <a:tc>
-                  <a:txBody>
-                    <a:bodyPr/>
-                    <a:lstStyle/>
-                    <a:p>
-                      <a:r>
-                        <a:rPr sz="1300" b="0">
-                          <a:solidFill>
-                            <a:srgbClr val="1B1F24"/>
-                          </a:solidFill>
-                          <a:latin typeface="Yu Gothic"/>
-                        </a:rPr>
-                        <a:t>『糖尿病』→『糖尿病性腎症』を確信度100%で採用</a:t>
-                      </a:r>
-                    </a:p>
-                  </a:txBody>
-                  <a:tcPr marT="38100" marB="38100">
-                    <a:solidFill>
-                      <a:srgbClr val="F2F5F9"/>
-                    </a:solidFill>
-                  </a:tcPr>
-                </a:tc>
-              </a:tr>
-              <a:tr h="395478">
-                <a:tc>
-                  <a:txBody>
-                    <a:bodyPr/>
-                    <a:lstStyle/>
-                    <a:p>
-                      <a:r>
-                        <a:rPr sz="1300" b="0">
-                          <a:solidFill>
-                            <a:srgbClr val="1B1F24"/>
-                          </a:solidFill>
-                          <a:latin typeface="Yu Gothic"/>
-                        </a:rPr>
-                        <a:t>数字の切り詰め</a:t>
-                      </a:r>
-                    </a:p>
-                  </a:txBody>
-                  <a:tcPr marT="38100" marB="38100">
-                    <a:solidFill>
-                      <a:srgbClr val="FFFFFF"/>
-                    </a:solidFill>
-                  </a:tcPr>
-                </a:tc>
-                <a:tc>
-                  <a:txBody>
-                    <a:bodyPr/>
-                    <a:lstStyle/>
-                    <a:p>
-                      <a:r>
-                        <a:rPr sz="1300" b="0">
-                          <a:solidFill>
-                            <a:srgbClr val="1B1F24"/>
-                          </a:solidFill>
-                          <a:latin typeface="Yu Gothic"/>
-                        </a:rPr>
-                        <a:t>『2024年』→『20年』→ 西暦2038年</a:t>
-                      </a:r>
-                    </a:p>
-                  </a:txBody>
-                  <a:tcPr marT="38100" marB="38100">
-                    <a:solidFill>
-                      <a:srgbClr val="FFFFFF"/>
-                    </a:solidFill>
-                  </a:tcPr>
-                </a:tc>
-              </a:tr>
-              <a:tr h="395478">
-                <a:tc>
-                  <a:txBody>
-                    <a:bodyPr/>
-                    <a:lstStyle/>
-                    <a:p>
-                      <a:r>
-                        <a:rPr sz="1300" b="0">
-                          <a:solidFill>
-                            <a:srgbClr val="1B1F24"/>
-                          </a:solidFill>
-                          <a:latin typeface="Yu Gothic"/>
-                        </a:rPr>
-                        <a:t>記入が無い欄の拾い読みが素通り</a:t>
-                      </a:r>
-                    </a:p>
-                  </a:txBody>
-                  <a:tcPr marT="38100" marB="38100">
-                    <a:solidFill>
-                      <a:srgbClr val="F2F5F9"/>
-                    </a:solidFill>
-                  </a:tcPr>
-                </a:tc>
-                <a:tc>
-                  <a:txBody>
-                    <a:bodyPr/>
-                    <a:lstStyle/>
-                    <a:p>
-                      <a:r>
-                        <a:rPr sz="1300" b="0">
-                          <a:solidFill>
-                            <a:srgbClr val="1B1F24"/>
-                          </a:solidFill>
-                          <a:latin typeface="Yu Gothic"/>
-                        </a:rPr>
-                        <a:t>『摂食の留意事項＝い』が確信度0.816（緑）</a:t>
-                      </a:r>
-                    </a:p>
-                  </a:txBody>
-                  <a:tcPr marT="38100" marB="38100">
-                    <a:solidFill>
-                      <a:srgbClr val="F2F5F9"/>
-                    </a:solidFill>
-                  </a:tcPr>
-                </a:tc>
-              </a:tr>
-              <a:tr h="395478">
-                <a:tc>
-                  <a:txBody>
-                    <a:bodyPr/>
-                    <a:lstStyle/>
-                    <a:p>
-                      <a:r>
-                        <a:rPr sz="1300" b="0">
-                          <a:solidFill>
-                            <a:srgbClr val="1B1F24"/>
-                          </a:solidFill>
-                          <a:latin typeface="Yu Gothic"/>
-                        </a:rPr>
-                        <a:t>操作ログに個人情報</a:t>
-                      </a:r>
-                    </a:p>
-                  </a:txBody>
-                  <a:tcPr marT="38100" marB="38100">
-                    <a:solidFill>
-                      <a:srgbClr val="FFFFFF"/>
-                    </a:solidFill>
-                  </a:tcPr>
-                </a:tc>
-                <a:tc>
-                  <a:txBody>
-                    <a:bodyPr/>
-                    <a:lstStyle/>
-                    <a:p>
-                      <a:r>
-                        <a:rPr sz="1300" b="0">
-                          <a:solidFill>
-                            <a:srgbClr val="1B1F24"/>
-                          </a:solidFill>
-                          <a:latin typeface="Yu Gothic"/>
-                        </a:rPr>
-                        <a:t>ファイル名（氏名を含む）と医療機関名が生で残る</a:t>
-                      </a:r>
-                    </a:p>
-                  </a:txBody>
-                  <a:tcPr marT="38100" marB="38100">
-                    <a:solidFill>
-                      <a:srgbClr val="FFFFFF"/>
-                    </a:solidFill>
-                  </a:tcPr>
-                </a:tc>
-              </a:tr>
-              <a:tr h="395478">
-                <a:tc>
-                  <a:txBody>
-                    <a:bodyPr/>
-                    <a:lstStyle/>
-                    <a:p>
-                      <a:r>
-                        <a:rPr sz="1300" b="0">
-                          <a:solidFill>
-                            <a:srgbClr val="1B1F24"/>
-                          </a:solidFill>
-                          <a:latin typeface="Yu Gothic"/>
-                        </a:rPr>
-                        <a:t>編集ログが別の意見書と混ざる</a:t>
-                      </a:r>
-                    </a:p>
-                  </a:txBody>
-                  <a:tcPr marT="38100" marB="38100">
-                    <a:solidFill>
-                      <a:srgbClr val="F2F5F9"/>
-                    </a:solidFill>
-                  </a:tcPr>
-                </a:tc>
-                <a:tc>
-                  <a:txBody>
-                    <a:bodyPr/>
-                    <a:lstStyle/>
-                    <a:p>
-                      <a:r>
-                        <a:rPr sz="1300" b="0">
-                          <a:solidFill>
-                            <a:srgbClr val="1B1F24"/>
-                          </a:solidFill>
-                          <a:latin typeface="Yu Gothic"/>
-                        </a:rPr>
-                        <a:t>存在しない訂正が記録される</a:t>
-                      </a:r>
-                    </a:p>
-                  </a:txBody>
-                  <a:tcPr marT="38100" marB="38100">
-                    <a:solidFill>
-                      <a:srgbClr val="F2F5F9"/>
-                    </a:solidFill>
-                  </a:tcPr>
-                </a:tc>
-              </a:tr>
-              <a:tr h="395478">
-                <a:tc>
-                  <a:txBody>
-                    <a:bodyPr/>
-                    <a:lstStyle/>
-                    <a:p>
-                      <a:r>
-                        <a:rPr sz="1300" b="0">
-                          <a:solidFill>
-                            <a:srgbClr val="1B1F24"/>
-                          </a:solidFill>
-                          <a:latin typeface="Yu Gothic"/>
-                        </a:rPr>
-                        <a:t>欄が画像の端に掛かると落ちる</a:t>
-                      </a:r>
-                    </a:p>
-                  </a:txBody>
-                  <a:tcPr marT="38100" marB="38100">
-                    <a:solidFill>
-                      <a:srgbClr val="FFFFFF"/>
-                    </a:solidFill>
-                  </a:tcPr>
-                </a:tc>
-                <a:tc>
-                  <a:txBody>
-                    <a:bodyPr/>
-                    <a:lstStyle/>
-                    <a:p>
-                      <a:r>
-                        <a:rPr sz="1300" b="0">
-                          <a:solidFill>
-                            <a:srgbClr val="1B1F24"/>
-                          </a:solidFill>
-                          <a:latin typeface="Yu Gothic"/>
-                        </a:rPr>
-                        <a:t>1件まるごと失われる</a:t>
-                      </a:r>
-                    </a:p>
-                  </a:txBody>
-                  <a:tcPr marT="38100" marB="38100">
-                    <a:solidFill>
-                      <a:srgbClr val="FFFFFF"/>
-                    </a:solidFill>
-                  </a:tcPr>
-                </a:tc>
-              </a:tr>
-            </a:tbl>
-          </a:graphicData>
-        </a:graphic>
-      </p:graphicFrame>
-      <p:sp>
-        <p:nvSpPr>
-          <p:cNvPr id="5" name="TextBox 4"/>
+      <p:sp>
+        <p:nvSpPr>
+          <p:cNvPr id="4" name="TextBox 3"/>
           <p:cNvSpPr txBox="1"/>
           <p:nvPr/>
         </p:nvSpPr>
         <p:spPr>
           <a:xfrm>
-            <a:off x="685800" y="5486400"/>
-            <a:ext cx="10881360" cy="548640"/>
+            <a:off x="685800" y="1691640"/>
+            <a:ext cx="10881360" cy="4572000"/>
           </a:xfrm>
           <a:prstGeom prst="rect">
             <a:avLst/>
@@ -4461,7 +4040,23 @@
           <a:p>
             <a:pPr algn="l">
               <a:spcBef>
-                <a:spcPts val="0"/>
+                <a:spcPts val="1000"/>
+              </a:spcBef>
+            </a:pPr>
+            <a:r>
+              <a:rPr sz="1600" b="1">
+                <a:solidFill>
+                  <a:srgbClr val="1B1F24"/>
+                </a:solidFill>
+                <a:latin typeface="Yu Gothic"/>
+              </a:rPr>
+              <a:t>・匿名化加工済みデータ（研究用）</a:t>
+            </a:r>
+          </a:p>
+          <a:p>
+            <a:pPr algn="l">
+              <a:spcBef>
+                <a:spcPts val="200"/>
               </a:spcBef>
             </a:pPr>
             <a:r>
@@ -4471,14 +4066,110 @@
                 </a:solidFill>
                 <a:latin typeface="Yu Gothic"/>
               </a:rPr>
-              <a:t>同じ判定を Python とブラウザの両方に持つため、同じ入力で値が一致するかを必ず突き合わせる。</a:t>
-            </a:r>
-          </a:p>
-        </p:txBody>
-      </p:sp>
-      <p:sp>
-        <p:nvSpPr>
-          <p:cNvPr id="6" name="TextBox 5"/>
+              <a:t>　　氏名欄が白抜きなら「匿名化済み」。指定すると住所・連絡先も「マスク済み」にし、元の読み取り値ごと捨てる</a:t>
+            </a:r>
+          </a:p>
+          <a:p>
+            <a:pPr algn="l">
+              <a:spcBef>
+                <a:spcPts val="1000"/>
+              </a:spcBef>
+            </a:pPr>
+            <a:r>
+              <a:rPr sz="1600" b="1">
+                <a:solidFill>
+                  <a:srgbClr val="1B1F24"/>
+                </a:solidFill>
+                <a:latin typeface="Yu Gothic"/>
+              </a:rPr>
+              <a:t>・操作ログ</a:t>
+            </a:r>
+          </a:p>
+          <a:p>
+            <a:pPr algn="l">
+              <a:spcBef>
+                <a:spcPts val="200"/>
+              </a:spcBef>
+            </a:pPr>
+            <a:r>
+              <a:rPr sz="1300" b="0">
+                <a:solidFill>
+                  <a:srgbClr val="5B636E"/>
+                </a:solidFill>
+                <a:latin typeface="Yu Gothic"/>
+              </a:rPr>
+              <a:t>　　読み取り・修正（直す前→直した後）・確定・候補採用・音声入力を記録し、JSON / CSV で保存できる。個人情報の項目は値を残さず文字数だけ</a:t>
+            </a:r>
+          </a:p>
+          <a:p>
+            <a:pPr algn="l">
+              <a:spcBef>
+                <a:spcPts val="1000"/>
+              </a:spcBef>
+            </a:pPr>
+            <a:r>
+              <a:rPr sz="1600" b="1">
+                <a:solidFill>
+                  <a:srgbClr val="1B1F24"/>
+                </a:solidFill>
+                <a:latin typeface="Yu Gothic"/>
+              </a:rPr>
+              <a:t>・利用者トークン</a:t>
+            </a:r>
+          </a:p>
+          <a:p>
+            <a:pPr algn="l">
+              <a:spcBef>
+                <a:spcPts val="200"/>
+              </a:spcBef>
+            </a:pPr>
+            <a:r>
+              <a:rPr sz="1300" b="0">
+                <a:solidFill>
+                  <a:srgbClr val="5B636E"/>
+                </a:solidFill>
+                <a:latin typeface="Yu Gothic"/>
+              </a:rPr>
+              <a:t>　　同じ端末を複数人が使っても履歴が混ざらないよう、ブラウザごとに発行したトークンで保存先を分ける。共用端末では作業後に消せる</a:t>
+            </a:r>
+          </a:p>
+          <a:p>
+            <a:pPr algn="l">
+              <a:spcBef>
+                <a:spcPts val="1000"/>
+              </a:spcBef>
+            </a:pPr>
+            <a:r>
+              <a:rPr sz="1600" b="1">
+                <a:solidFill>
+                  <a:srgbClr val="1B1F24"/>
+                </a:solidFill>
+                <a:latin typeface="Yu Gothic"/>
+              </a:rPr>
+              <a:t>・サイト全体は Basic 認証で保護</a:t>
+            </a:r>
+          </a:p>
+          <a:p>
+            <a:pPr algn="l">
+              <a:spcBef>
+                <a:spcPts val="200"/>
+              </a:spcBef>
+            </a:pPr>
+            <a:r>
+              <a:rPr sz="1300" b="0">
+                <a:solidFill>
+                  <a:srgbClr val="5B636E"/>
+                </a:solidFill>
+                <a:latin typeface="Yu Gothic"/>
+              </a:rPr>
+              <a:t>　　トークンは認証ではない、と画面にも明記している</a:t>
+            </a:r>
+          </a:p>
+        </p:txBody>
+      </p:sp>
+      <p:sp>
+        <p:nvSpPr>
+          <p:cNvPr id="5" name="TextBox 4"/>
           <p:cNvSpPr txBox="1"/>
           <p:nvPr/>
         </p:nvSpPr>
@@ -4563,7 +4254,23 @@
                 </a:solidFill>
                 <a:latin typeface="Yu Gothic"/>
               </a:rPr>
-              <a:t>配布のしかた</a:t>
+              <a:t>品質チェックで見つけた重大な不具合</a:t>
+            </a:r>
+          </a:p>
+          <a:p>
+            <a:pPr algn="l">
+              <a:spcBef>
+                <a:spcPts val="400"/>
+              </a:spcBef>
+            </a:pPr>
+            <a:r>
+              <a:rPr sz="1400" b="0">
+                <a:solidFill>
+                  <a:srgbClr val="5B636E"/>
+                </a:solidFill>
+                <a:latin typeface="Yu Gothic"/>
+              </a:rPr>
+              <a:t>「見た目は正しく確信度も高いのに中身が違う」型を、実測で洗い出した</a:t>
             </a:r>
           </a:p>
         </p:txBody>
@@ -4621,8 +4328,8 @@
           <p:nvPr/>
         </p:nvGraphicFramePr>
         <p:xfrm>
-          <a:off x="685800" y="1828800"/>
-          <a:ext cx="10789920" cy="2011680"/>
+          <a:off x="685800" y="1783080"/>
+          <a:ext cx="10789920" cy="4315968"/>
         </p:xfrm>
         <a:graphic>
           <a:graphicData uri="http://schemas.openxmlformats.org/drawingml/2006/table">
@@ -4631,24 +4338,23 @@
                 <a:tableStyleId>{5C22544A-7EE6-4342-B048-85BDC9FD1C3A}</a:tableStyleId>
               </a:tblPr>
               <a:tblGrid>
-                <a:gridCol w="2877312"/>
-                <a:gridCol w="3057144"/>
-                <a:gridCol w="4855464"/>
+                <a:gridCol w="4495800"/>
+                <a:gridCol w="6294120"/>
               </a:tblGrid>
-              <a:tr h="402336">
-                <a:tc>
-                  <a:txBody>
-                    <a:bodyPr/>
-                    <a:lstStyle/>
-                    <a:p>
-                      <a:r>
-                        <a:rPr sz="1400" b="1">
+              <a:tr h="392360">
+                <a:tc>
+                  <a:txBody>
+                    <a:bodyPr/>
+                    <a:lstStyle/>
+                    <a:p>
+                      <a:r>
+                        <a:rPr sz="1300" b="1">
                           <a:solidFill>
                             <a:srgbClr val="FFFFFF"/>
                           </a:solidFill>
                           <a:latin typeface="Yu Gothic"/>
                         </a:rPr>
-                        <a:t>方法</a:t>
+                        <a:t>見つかった不具合</a:t>
                       </a:r>
                     </a:p>
                   </a:txBody>
@@ -4664,13 +4370,13 @@
                     <a:lstStyle/>
                     <a:p>
                       <a:r>
-                        <a:rPr sz="1400" b="1">
+                        <a:rPr sz="1300" b="1">
                           <a:solidFill>
                             <a:srgbClr val="FFFFFF"/>
                           </a:solidFill>
                           <a:latin typeface="Yu Gothic"/>
                         </a:rPr>
-                        <a:t>対象</a:t>
+                        <a:t>起きていたこと</a:t>
                       </a:r>
                     </a:p>
                   </a:txBody>
@@ -4680,43 +4386,21 @@
                     </a:solidFill>
                   </a:tcPr>
                 </a:tc>
-                <a:tc>
-                  <a:txBody>
-                    <a:bodyPr/>
-                    <a:lstStyle/>
-                    <a:p>
-                      <a:r>
-                        <a:rPr sz="1400" b="1">
-                          <a:solidFill>
-                            <a:srgbClr val="FFFFFF"/>
-                          </a:solidFill>
-                          <a:latin typeface="Yu Gothic"/>
-                        </a:rPr>
-                        <a:t>特徴</a:t>
-                      </a:r>
-                    </a:p>
-                  </a:txBody>
-                  <a:tcPr marT="38100" marB="38100">
-                    <a:solidFill>
-                      <a:srgbClr val="1E5AA8"/>
-                    </a:solidFill>
-                  </a:tcPr>
-                </a:tc>
               </a:tr>
-              <a:tr h="402336">
-                <a:tc>
-                  <a:txBody>
-                    <a:bodyPr/>
-                    <a:lstStyle/>
-                    <a:p>
-                      <a:r>
-                        <a:rPr sz="1400" b="0">
-                          <a:solidFill>
-                            <a:srgbClr val="1B1F24"/>
-                          </a:solidFill>
-                          <a:latin typeface="Yu Gothic"/>
-                        </a:rPr>
-                        <a:t>Web版（サーバに設置）</a:t>
+              <a:tr h="392360">
+                <a:tc>
+                  <a:txBody>
+                    <a:bodyPr/>
+                    <a:lstStyle/>
+                    <a:p>
+                      <a:r>
+                        <a:rPr sz="1300" b="0">
+                          <a:solidFill>
+                            <a:srgbClr val="1B1F24"/>
+                          </a:solidFill>
+                          <a:latin typeface="Yu Gothic"/>
+                        </a:rPr>
+                        <a:t>定型文フィルタが臨床情報を消す</a:t>
                       </a:r>
                     </a:p>
                   </a:txBody>
@@ -4732,13 +4416,13 @@
                     <a:lstStyle/>
                     <a:p>
                       <a:r>
-                        <a:rPr sz="1400" b="0">
-                          <a:solidFill>
-                            <a:srgbClr val="1B1F24"/>
-                          </a:solidFill>
-                          <a:latin typeface="Yu Gothic"/>
-                        </a:rPr>
-                        <a:t>組織で使う</a:t>
+                        <a:rPr sz="1300" b="0">
+                          <a:solidFill>
+                            <a:srgbClr val="1B1F24"/>
+                          </a:solidFill>
+                          <a:latin typeface="Yu Gothic"/>
+                        </a:rPr>
+                        <a:t>『認知症』『骨折』『がん』が空になる</a:t>
                       </a:r>
                     </a:p>
                   </a:txBody>
@@ -4748,19 +4432,67 @@
                     </a:solidFill>
                   </a:tcPr>
                 </a:tc>
-                <a:tc>
-                  <a:txBody>
-                    <a:bodyPr/>
-                    <a:lstStyle/>
-                    <a:p>
-                      <a:r>
-                        <a:rPr sz="1400" b="0">
-                          <a:solidFill>
-                            <a:srgbClr val="1B1F24"/>
-                          </a:solidFill>
-                          <a:latin typeface="Yu Gothic"/>
-                        </a:rPr>
-                        <a:t>全機能。Basic認証で保護</a:t>
+              </a:tr>
+              <a:tr h="392360">
+                <a:tc>
+                  <a:txBody>
+                    <a:bodyPr/>
+                    <a:lstStyle/>
+                    <a:p>
+                      <a:r>
+                        <a:rPr sz="1300" b="0">
+                          <a:solidFill>
+                            <a:srgbClr val="1B1F24"/>
+                          </a:solidFill>
+                          <a:latin typeface="Yu Gothic"/>
+                        </a:rPr>
+                        <a:t>病名が別の病名に化ける</a:t>
+                      </a:r>
+                    </a:p>
+                  </a:txBody>
+                  <a:tcPr marT="38100" marB="38100">
+                    <a:solidFill>
+                      <a:srgbClr val="F2F5F9"/>
+                    </a:solidFill>
+                  </a:tcPr>
+                </a:tc>
+                <a:tc>
+                  <a:txBody>
+                    <a:bodyPr/>
+                    <a:lstStyle/>
+                    <a:p>
+                      <a:r>
+                        <a:rPr sz="1300" b="0">
+                          <a:solidFill>
+                            <a:srgbClr val="1B1F24"/>
+                          </a:solidFill>
+                          <a:latin typeface="Yu Gothic"/>
+                        </a:rPr>
+                        <a:t>『糖尿病』→『糖尿病性腎症』を確信度100%で採用</a:t>
+                      </a:r>
+                    </a:p>
+                  </a:txBody>
+                  <a:tcPr marT="38100" marB="38100">
+                    <a:solidFill>
+                      <a:srgbClr val="F2F5F9"/>
+                    </a:solidFill>
+                  </a:tcPr>
+                </a:tc>
+              </a:tr>
+              <a:tr h="392360">
+                <a:tc>
+                  <a:txBody>
+                    <a:bodyPr/>
+                    <a:lstStyle/>
+                    <a:p>
+                      <a:r>
+                        <a:rPr sz="1300" b="0">
+                          <a:solidFill>
+                            <a:srgbClr val="1B1F24"/>
+                          </a:solidFill>
+                          <a:latin typeface="Yu Gothic"/>
+                        </a:rPr>
+                        <a:t>数字の切り詰め</a:t>
                       </a:r>
                     </a:p>
                   </a:txBody>
@@ -4770,21 +4502,43 @@
                     </a:solidFill>
                   </a:tcPr>
                 </a:tc>
+                <a:tc>
+                  <a:txBody>
+                    <a:bodyPr/>
+                    <a:lstStyle/>
+                    <a:p>
+                      <a:r>
+                        <a:rPr sz="1300" b="0">
+                          <a:solidFill>
+                            <a:srgbClr val="1B1F24"/>
+                          </a:solidFill>
+                          <a:latin typeface="Yu Gothic"/>
+                        </a:rPr>
+                        <a:t>『2024年』→『20年』→ 西暦2038年</a:t>
+                      </a:r>
+                    </a:p>
+                  </a:txBody>
+                  <a:tcPr marT="38100" marB="38100">
+                    <a:solidFill>
+                      <a:srgbClr val="FFFFFF"/>
+                    </a:solidFill>
+                  </a:tcPr>
+                </a:tc>
               </a:tr>
-              <a:tr h="402336">
-                <a:tc>
-                  <a:txBody>
-                    <a:bodyPr/>
-                    <a:lstStyle/>
-                    <a:p>
-                      <a:r>
-                        <a:rPr sz="1400" b="0">
-                          <a:solidFill>
-                            <a:srgbClr val="1B1F24"/>
-                          </a:solidFill>
-                          <a:latin typeface="Yu Gothic"/>
-                        </a:rPr>
-                        <a:t>Python版（pip）</a:t>
+              <a:tr h="392360">
+                <a:tc>
+                  <a:txBody>
+                    <a:bodyPr/>
+                    <a:lstStyle/>
+                    <a:p>
+                      <a:r>
+                        <a:rPr sz="1300" b="0">
+                          <a:solidFill>
+                            <a:srgbClr val="1B1F24"/>
+                          </a:solidFill>
+                          <a:latin typeface="Yu Gothic"/>
+                        </a:rPr>
+                        <a:t>記入が無い欄の拾い読みが素通り</a:t>
                       </a:r>
                     </a:p>
                   </a:txBody>
@@ -4800,13 +4554,13 @@
                     <a:lstStyle/>
                     <a:p>
                       <a:r>
-                        <a:rPr sz="1400" b="0">
-                          <a:solidFill>
-                            <a:srgbClr val="1B1F24"/>
-                          </a:solidFill>
-                          <a:latin typeface="Yu Gothic"/>
-                        </a:rPr>
-                        <a:t>Rocky / Ubuntu / macOS</a:t>
+                        <a:rPr sz="1300" b="0">
+                          <a:solidFill>
+                            <a:srgbClr val="1B1F24"/>
+                          </a:solidFill>
+                          <a:latin typeface="Yu Gothic"/>
+                        </a:rPr>
+                        <a:t>『摂食の留意事項＝い』が確信度0.816（緑）</a:t>
                       </a:r>
                     </a:p>
                   </a:txBody>
@@ -4816,19 +4570,67 @@
                     </a:solidFill>
                   </a:tcPr>
                 </a:tc>
-                <a:tc>
-                  <a:txBody>
-                    <a:bodyPr/>
-                    <a:lstStyle/>
-                    <a:p>
-                      <a:r>
-                        <a:rPr sz="1400" b="0">
-                          <a:solidFill>
-                            <a:srgbClr val="1B1F24"/>
-                          </a:solidFill>
-                          <a:latin typeface="Yu Gothic"/>
-                        </a:rPr>
-                        <a:t>大量処理・自動化に向く</a:t>
+              </a:tr>
+              <a:tr h="392360">
+                <a:tc>
+                  <a:txBody>
+                    <a:bodyPr/>
+                    <a:lstStyle/>
+                    <a:p>
+                      <a:r>
+                        <a:rPr sz="1300" b="0">
+                          <a:solidFill>
+                            <a:srgbClr val="1B1F24"/>
+                          </a:solidFill>
+                          <a:latin typeface="Yu Gothic"/>
+                        </a:rPr>
+                        <a:t>操作ログに個人情報</a:t>
+                      </a:r>
+                    </a:p>
+                  </a:txBody>
+                  <a:tcPr marT="38100" marB="38100">
+                    <a:solidFill>
+                      <a:srgbClr val="FFFFFF"/>
+                    </a:solidFill>
+                  </a:tcPr>
+                </a:tc>
+                <a:tc>
+                  <a:txBody>
+                    <a:bodyPr/>
+                    <a:lstStyle/>
+                    <a:p>
+                      <a:r>
+                        <a:rPr sz="1300" b="0">
+                          <a:solidFill>
+                            <a:srgbClr val="1B1F24"/>
+                          </a:solidFill>
+                          <a:latin typeface="Yu Gothic"/>
+                        </a:rPr>
+                        <a:t>ファイル名（氏名を含む）と医療機関名が生で残る</a:t>
+                      </a:r>
+                    </a:p>
+                  </a:txBody>
+                  <a:tcPr marT="38100" marB="38100">
+                    <a:solidFill>
+                      <a:srgbClr val="FFFFFF"/>
+                    </a:solidFill>
+                  </a:tcPr>
+                </a:tc>
+              </a:tr>
+              <a:tr h="392360">
+                <a:tc>
+                  <a:txBody>
+                    <a:bodyPr/>
+                    <a:lstStyle/>
+                    <a:p>
+                      <a:r>
+                        <a:rPr sz="1300" b="0">
+                          <a:solidFill>
+                            <a:srgbClr val="1B1F24"/>
+                          </a:solidFill>
+                          <a:latin typeface="Yu Gothic"/>
+                        </a:rPr>
+                        <a:t>編集ログが別の意見書と混ざる</a:t>
                       </a:r>
                     </a:p>
                   </a:txBody>
@@ -4838,21 +4640,43 @@
                     </a:solidFill>
                   </a:tcPr>
                 </a:tc>
+                <a:tc>
+                  <a:txBody>
+                    <a:bodyPr/>
+                    <a:lstStyle/>
+                    <a:p>
+                      <a:r>
+                        <a:rPr sz="1300" b="0">
+                          <a:solidFill>
+                            <a:srgbClr val="1B1F24"/>
+                          </a:solidFill>
+                          <a:latin typeface="Yu Gothic"/>
+                        </a:rPr>
+                        <a:t>存在しない訂正が記録される</a:t>
+                      </a:r>
+                    </a:p>
+                  </a:txBody>
+                  <a:tcPr marT="38100" marB="38100">
+                    <a:solidFill>
+                      <a:srgbClr val="F2F5F9"/>
+                    </a:solidFill>
+                  </a:tcPr>
+                </a:tc>
               </a:tr>
-              <a:tr h="402336">
-                <a:tc>
-                  <a:txBody>
-                    <a:bodyPr/>
-                    <a:lstStyle/>
-                    <a:p>
-                      <a:r>
-                        <a:rPr sz="1400" b="0">
-                          <a:solidFill>
-                            <a:srgbClr val="1B1F24"/>
-                          </a:solidFill>
-                          <a:latin typeface="Yu Gothic"/>
-                        </a:rPr>
-                        <a:t>Docker</a:t>
+              <a:tr h="392360">
+                <a:tc>
+                  <a:txBody>
+                    <a:bodyPr/>
+                    <a:lstStyle/>
+                    <a:p>
+                      <a:r>
+                        <a:rPr sz="1300" b="0">
+                          <a:solidFill>
+                            <a:srgbClr val="1B1F24"/>
+                          </a:solidFill>
+                          <a:latin typeface="Yu Gothic"/>
+                        </a:rPr>
+                        <a:t>欄が画像の端に掛かると落ちる</a:t>
                       </a:r>
                     </a:p>
                   </a:txBody>
@@ -4868,13 +4692,13 @@
                     <a:lstStyle/>
                     <a:p>
                       <a:r>
-                        <a:rPr sz="1400" b="0">
-                          <a:solidFill>
-                            <a:srgbClr val="1B1F24"/>
-                          </a:solidFill>
-                          <a:latin typeface="Yu Gothic"/>
-                        </a:rPr>
-                        <a:t>Windows など</a:t>
+                        <a:rPr sz="1300" b="0">
+                          <a:solidFill>
+                            <a:srgbClr val="1B1F24"/>
+                          </a:solidFill>
+                          <a:latin typeface="Yu Gothic"/>
+                        </a:rPr>
+                        <a:t>1件まるごと失われる</a:t>
                       </a:r>
                     </a:p>
                   </a:txBody>
@@ -4884,19 +4708,67 @@
                     </a:solidFill>
                   </a:tcPr>
                 </a:tc>
-                <a:tc>
-                  <a:txBody>
-                    <a:bodyPr/>
-                    <a:lstStyle/>
-                    <a:p>
-                      <a:r>
-                        <a:rPr sz="1400" b="0">
-                          <a:solidFill>
-                            <a:srgbClr val="1B1F24"/>
-                          </a:solidFill>
-                          <a:latin typeface="Yu Gothic"/>
-                        </a:rPr>
-                        <a:t>OS を問わず同じ環境で動く</a:t>
+              </a:tr>
+              <a:tr h="392360">
+                <a:tc>
+                  <a:txBody>
+                    <a:bodyPr/>
+                    <a:lstStyle/>
+                    <a:p>
+                      <a:r>
+                        <a:rPr sz="1300" b="0">
+                          <a:solidFill>
+                            <a:srgbClr val="1B1F24"/>
+                          </a:solidFill>
+                          <a:latin typeface="Yu Gothic"/>
+                        </a:rPr>
+                        <a:t>ふりがな欄が必ず空になる</a:t>
+                      </a:r>
+                    </a:p>
+                  </a:txBody>
+                  <a:tcPr marT="38100" marB="38100">
+                    <a:solidFill>
+                      <a:srgbClr val="F2F5F9"/>
+                    </a:solidFill>
+                  </a:tcPr>
+                </a:tc>
+                <a:tc>
+                  <a:txBody>
+                    <a:bodyPr/>
+                    <a:lstStyle/>
+                    <a:p>
+                      <a:r>
+                        <a:rPr sz="1300" b="0">
+                          <a:solidFill>
+                            <a:srgbClr val="1B1F24"/>
+                          </a:solidFill>
+                          <a:latin typeface="Yu Gothic"/>
+                        </a:rPr>
+                        <a:t>読めていたのに、文字種の指定で全部捨てていた（0.00%）</a:t>
+                      </a:r>
+                    </a:p>
+                  </a:txBody>
+                  <a:tcPr marT="38100" marB="38100">
+                    <a:solidFill>
+                      <a:srgbClr val="F2F5F9"/>
+                    </a:solidFill>
+                  </a:tcPr>
+                </a:tc>
+              </a:tr>
+              <a:tr h="392360">
+                <a:tc>
+                  <a:txBody>
+                    <a:bodyPr/>
+                    <a:lstStyle/>
+                    <a:p>
+                      <a:r>
+                        <a:rPr sz="1300" b="0">
+                          <a:solidFill>
+                            <a:srgbClr val="1B1F24"/>
+                          </a:solidFill>
+                          <a:latin typeface="Yu Gothic"/>
+                        </a:rPr>
+                        <a:t>診断名が粗い分類に化ける</a:t>
                       </a:r>
                     </a:p>
                   </a:txBody>
@@ -4906,21 +4778,43 @@
                     </a:solidFill>
                   </a:tcPr>
                 </a:tc>
+                <a:tc>
+                  <a:txBody>
+                    <a:bodyPr/>
+                    <a:lstStyle/>
+                    <a:p>
+                      <a:r>
+                        <a:rPr sz="1300" b="0">
+                          <a:solidFill>
+                            <a:srgbClr val="1B1F24"/>
+                          </a:solidFill>
+                          <a:latin typeface="Yu Gothic"/>
+                        </a:rPr>
+                        <a:t>『右大腿骨頸部骨折術後』→『大腿骨頸部骨折』（右・術後が消える）</a:t>
+                      </a:r>
+                    </a:p>
+                  </a:txBody>
+                  <a:tcPr marT="38100" marB="38100">
+                    <a:solidFill>
+                      <a:srgbClr val="FFFFFF"/>
+                    </a:solidFill>
+                  </a:tcPr>
+                </a:tc>
               </a:tr>
-              <a:tr h="402336">
-                <a:tc>
-                  <a:txBody>
-                    <a:bodyPr/>
-                    <a:lstStyle/>
-                    <a:p>
-                      <a:r>
-                        <a:rPr sz="1400" b="0">
-                          <a:solidFill>
-                            <a:srgbClr val="1B1F24"/>
-                          </a:solidFill>
-                          <a:latin typeface="Yu Gothic"/>
-                        </a:rPr>
-                        <a:t>単一HTMLファイル</a:t>
+              <a:tr h="392368">
+                <a:tc>
+                  <a:txBody>
+                    <a:bodyPr/>
+                    <a:lstStyle/>
+                    <a:p>
+                      <a:r>
+                        <a:rPr sz="1300" b="0">
+                          <a:solidFill>
+                            <a:srgbClr val="1B1F24"/>
+                          </a:solidFill>
+                          <a:latin typeface="Yu Gothic"/>
+                        </a:rPr>
+                        <a:t>同時に2件来るとサーバごと落ちる</a:t>
                       </a:r>
                     </a:p>
                   </a:txBody>
@@ -4936,35 +4830,13 @@
                     <a:lstStyle/>
                     <a:p>
                       <a:r>
-                        <a:rPr sz="1400" b="0">
-                          <a:solidFill>
-                            <a:srgbClr val="1B1F24"/>
-                          </a:solidFill>
-                          <a:latin typeface="Yu Gothic"/>
-                        </a:rPr>
-                        <a:t>持ち運び</a:t>
-                      </a:r>
-                    </a:p>
-                  </a:txBody>
-                  <a:tcPr marT="38100" marB="38100">
-                    <a:solidFill>
-                      <a:srgbClr val="F2F5F9"/>
-                    </a:solidFill>
-                  </a:tcPr>
-                </a:tc>
-                <a:tc>
-                  <a:txBody>
-                    <a:bodyPr/>
-                    <a:lstStyle/>
-                    <a:p>
-                      <a:r>
-                        <a:rPr sz="1400" b="0">
-                          <a:solidFill>
-                            <a:srgbClr val="1B1F24"/>
-                          </a:solidFill>
-                          <a:latin typeface="Yu Gothic"/>
-                        </a:rPr>
-                        <a:t>チェック欄のみ（ブラウザの制約でOCRは動かない）</a:t>
+                        <a:rPr sz="1300" b="0">
+                          <a:solidFill>
+                            <a:srgbClr val="1B1F24"/>
+                          </a:solidFill>
+                          <a:latin typeface="Yu Gothic"/>
+                        </a:rPr>
+                        <a:t>処理中の全部が巻き添え。小型LLMを共有していた</a:t>
                       </a:r>
                     </a:p>
                   </a:txBody>
@@ -4987,8 +4859,8 @@
         </p:nvSpPr>
         <p:spPr>
           <a:xfrm>
-            <a:off x="685800" y="4572000"/>
-            <a:ext cx="10881360" cy="4572000"/>
+            <a:off x="685800" y="5715000"/>
+            <a:ext cx="10881360" cy="548640"/>
           </a:xfrm>
           <a:prstGeom prst="rect">
             <a:avLst/>
@@ -5003,33 +4875,17 @@
           <a:p>
             <a:pPr algn="l">
               <a:spcBef>
-                <a:spcPts val="1000"/>
-              </a:spcBef>
-            </a:pPr>
-            <a:r>
-              <a:rPr sz="1500" b="1">
-                <a:solidFill>
-                  <a:srgbClr val="1B1F24"/>
-                </a:solidFill>
-                <a:latin typeface="Yu Gothic"/>
-              </a:rPr>
-              <a:t>・辞書・テンプレート・様式定義はデータとして分離</a:t>
-            </a:r>
-          </a:p>
-          <a:p>
-            <a:pPr algn="l">
-              <a:spcBef>
-                <a:spcPts val="200"/>
-              </a:spcBef>
-            </a:pPr>
-            <a:r>
-              <a:rPr sz="1200" b="0">
+                <a:spcPts val="0"/>
+              </a:spcBef>
+            </a:pPr>
+            <a:r>
+              <a:rPr sz="1300" b="0">
                 <a:solidFill>
                   <a:srgbClr val="5B636E"/>
                 </a:solidFill>
                 <a:latin typeface="Yu Gothic"/>
               </a:rPr>
-              <a:t>　　新しい様式は管理画面から追加できる</a:t>
+              <a:t>同じ判定を Python とブラウザの両方に持つため、同じ入力で値が一致するかを必ず突き合わせる。</a:t>
             </a:r>
           </a:p>
         </p:txBody>
@@ -5121,7 +4977,23 @@
                 </a:solidFill>
                 <a:latin typeface="Yu Gothic"/>
               </a:rPr>
-              <a:t>開発の記録</a:t>
+              <a:t>不具合の見つけ方</a:t>
+            </a:r>
+          </a:p>
+          <a:p>
+            <a:pPr algn="l">
+              <a:spcBef>
+                <a:spcPts val="400"/>
+              </a:spcBef>
+            </a:pPr>
+            <a:r>
+              <a:rPr sz="1400" b="0">
+                <a:solidFill>
+                  <a:srgbClr val="5B636E"/>
+                </a:solidFill>
+                <a:latin typeface="Yu Gothic"/>
+              </a:rPr>
+              <a:t>見る人を変えると、出てくるものが変わる</a:t>
             </a:r>
           </a:p>
         </p:txBody>
@@ -5170,15 +5042,246 @@
           </a:p>
         </p:txBody>
       </p:sp>
-      <p:sp>
-        <p:nvSpPr>
-          <p:cNvPr id="4" name="TextBox 3"/>
+      <p:graphicFrame>
+        <p:nvGraphicFramePr>
+          <p:cNvPr id="4" name="Table 3"/>
+          <p:cNvGraphicFramePr>
+            <a:graphicFrameLocks noGrp="1"/>
+          </p:cNvGraphicFramePr>
+          <p:nvPr/>
+        </p:nvGraphicFramePr>
+        <p:xfrm>
+          <a:off x="685800" y="1828800"/>
+          <a:ext cx="10789920" cy="1243584"/>
+        </p:xfrm>
+        <a:graphic>
+          <a:graphicData uri="http://schemas.openxmlformats.org/drawingml/2006/table">
+            <a:tbl>
+              <a:tblPr firstRow="1" bandRow="1">
+                <a:tableStyleId>{5C22544A-7EE6-4342-B048-85BDC9FD1C3A}</a:tableStyleId>
+              </a:tblPr>
+              <a:tblGrid>
+                <a:gridCol w="2926080"/>
+                <a:gridCol w="6035040"/>
+                <a:gridCol w="1828800"/>
+              </a:tblGrid>
+              <a:tr h="414528">
+                <a:tc>
+                  <a:txBody>
+                    <a:bodyPr/>
+                    <a:lstStyle/>
+                    <a:p>
+                      <a:r>
+                        <a:rPr sz="1300" b="1">
+                          <a:solidFill>
+                            <a:srgbClr val="FFFFFF"/>
+                          </a:solidFill>
+                          <a:latin typeface="Yu Gothic"/>
+                        </a:rPr>
+                        <a:t>やり方</a:t>
+                      </a:r>
+                    </a:p>
+                  </a:txBody>
+                  <a:tcPr marT="38100" marB="38100">
+                    <a:solidFill>
+                      <a:srgbClr val="1E5AA8"/>
+                    </a:solidFill>
+                  </a:tcPr>
+                </a:tc>
+                <a:tc>
+                  <a:txBody>
+                    <a:bodyPr/>
+                    <a:lstStyle/>
+                    <a:p>
+                      <a:r>
+                        <a:rPr sz="1300" b="1">
+                          <a:solidFill>
+                            <a:srgbClr val="FFFFFF"/>
+                          </a:solidFill>
+                          <a:latin typeface="Yu Gothic"/>
+                        </a:rPr>
+                        <a:t>見つかったもの</a:t>
+                      </a:r>
+                    </a:p>
+                  </a:txBody>
+                  <a:tcPr marT="38100" marB="38100">
+                    <a:solidFill>
+                      <a:srgbClr val="1E5AA8"/>
+                    </a:solidFill>
+                  </a:tcPr>
+                </a:tc>
+                <a:tc>
+                  <a:txBody>
+                    <a:bodyPr/>
+                    <a:lstStyle/>
+                    <a:p>
+                      <a:r>
+                        <a:rPr sz="1300" b="1">
+                          <a:solidFill>
+                            <a:srgbClr val="FFFFFF"/>
+                          </a:solidFill>
+                          <a:latin typeface="Yu Gothic"/>
+                        </a:rPr>
+                        <a:t>重なり</a:t>
+                      </a:r>
+                    </a:p>
+                  </a:txBody>
+                  <a:tcPr marT="38100" marB="38100">
+                    <a:solidFill>
+                      <a:srgbClr val="1E5AA8"/>
+                    </a:solidFill>
+                  </a:tcPr>
+                </a:tc>
+              </a:tr>
+              <a:tr h="414528">
+                <a:tc>
+                  <a:txBody>
+                    <a:bodyPr/>
+                    <a:lstStyle/>
+                    <a:p>
+                      <a:r>
+                        <a:rPr sz="1300" b="0">
+                          <a:solidFill>
+                            <a:srgbClr val="1B1F24"/>
+                          </a:solidFill>
+                          <a:latin typeface="Yu Gothic"/>
+                        </a:rPr>
+                        <a:t>コードを読むレビュー</a:t>
+                      </a:r>
+                    </a:p>
+                  </a:txBody>
+                  <a:tcPr marT="38100" marB="38100">
+                    <a:solidFill>
+                      <a:srgbClr val="FFFFFF"/>
+                    </a:solidFill>
+                  </a:tcPr>
+                </a:tc>
+                <a:tc>
+                  <a:txBody>
+                    <a:bodyPr/>
+                    <a:lstStyle/>
+                    <a:p>
+                      <a:r>
+                        <a:rPr sz="1300" b="0">
+                          <a:solidFill>
+                            <a:srgbClr val="1B1F24"/>
+                          </a:solidFill>
+                          <a:latin typeface="Yu Gothic"/>
+                        </a:rPr>
+                        <a:t>8件（無効になっていた分岐、両版のずれ、境界の1文字違い）</a:t>
+                      </a:r>
+                    </a:p>
+                  </a:txBody>
+                  <a:tcPr marT="38100" marB="38100">
+                    <a:solidFill>
+                      <a:srgbClr val="FFFFFF"/>
+                    </a:solidFill>
+                  </a:tcPr>
+                </a:tc>
+                <a:tc>
+                  <a:txBody>
+                    <a:bodyPr/>
+                    <a:lstStyle/>
+                    <a:p>
+                      <a:r>
+                        <a:rPr sz="1300" b="0">
+                          <a:solidFill>
+                            <a:srgbClr val="1B1F24"/>
+                          </a:solidFill>
+                          <a:latin typeface="Yu Gothic"/>
+                        </a:rPr>
+                        <a:t>—</a:t>
+                      </a:r>
+                    </a:p>
+                  </a:txBody>
+                  <a:tcPr marT="38100" marB="38100">
+                    <a:solidFill>
+                      <a:srgbClr val="FFFFFF"/>
+                    </a:solidFill>
+                  </a:tcPr>
+                </a:tc>
+              </a:tr>
+              <a:tr h="414528">
+                <a:tc>
+                  <a:txBody>
+                    <a:bodyPr/>
+                    <a:lstStyle/>
+                    <a:p>
+                      <a:r>
+                        <a:rPr sz="1300" b="0">
+                          <a:solidFill>
+                            <a:srgbClr val="1B1F24"/>
+                          </a:solidFill>
+                          <a:latin typeface="Yu Gothic"/>
+                        </a:rPr>
+                        <a:t>説明書だけを頼りに触る確認</a:t>
+                      </a:r>
+                    </a:p>
+                  </a:txBody>
+                  <a:tcPr marT="38100" marB="38100">
+                    <a:solidFill>
+                      <a:srgbClr val="F2F5F9"/>
+                    </a:solidFill>
+                  </a:tcPr>
+                </a:tc>
+                <a:tc>
+                  <a:txBody>
+                    <a:bodyPr/>
+                    <a:lstStyle/>
+                    <a:p>
+                      <a:r>
+                        <a:rPr sz="1300" b="0">
+                          <a:solidFill>
+                            <a:srgbClr val="1B1F24"/>
+                          </a:solidFill>
+                          <a:latin typeface="Yu Gothic"/>
+                        </a:rPr>
+                        <a:t>9件（同時実行で落ちる、仕様との食い違い、エラーが利用者に届かない、説明書が無い）</a:t>
+                      </a:r>
+                    </a:p>
+                  </a:txBody>
+                  <a:tcPr marT="38100" marB="38100">
+                    <a:solidFill>
+                      <a:srgbClr val="F2F5F9"/>
+                    </a:solidFill>
+                  </a:tcPr>
+                </a:tc>
+                <a:tc>
+                  <a:txBody>
+                    <a:bodyPr/>
+                    <a:lstStyle/>
+                    <a:p>
+                      <a:r>
+                        <a:rPr sz="1300" b="0">
+                          <a:solidFill>
+                            <a:srgbClr val="1B1F24"/>
+                          </a:solidFill>
+                          <a:latin typeface="Yu Gothic"/>
+                        </a:rPr>
+                        <a:t>0件</a:t>
+                      </a:r>
+                    </a:p>
+                  </a:txBody>
+                  <a:tcPr marT="38100" marB="38100">
+                    <a:solidFill>
+                      <a:srgbClr val="F2F5F9"/>
+                    </a:solidFill>
+                  </a:tcPr>
+                </a:tc>
+              </a:tr>
+            </a:tbl>
+          </a:graphicData>
+        </a:graphic>
+      </p:graphicFrame>
+      <p:sp>
+        <p:nvSpPr>
+          <p:cNvPr id="5" name="TextBox 4"/>
           <p:cNvSpPr txBox="1"/>
           <p:nvPr/>
         </p:nvSpPr>
         <p:spPr>
           <a:xfrm>
-            <a:off x="685800" y="1691640"/>
+            <a:off x="685800" y="3931920"/>
             <a:ext cx="10881360" cy="4572000"/>
           </a:xfrm>
           <a:prstGeom prst="rect">
@@ -5198,13 +5301,13 @@
               </a:spcBef>
             </a:pPr>
             <a:r>
-              <a:rPr sz="1600" b="1">
+              <a:rPr sz="1500" b="1">
                 <a:solidFill>
                   <a:srgbClr val="1B1F24"/>
                 </a:solidFill>
                 <a:latin typeface="Yu Gothic"/>
               </a:rPr>
-              <a:t>・GitHub の Issue に問題を残している（全 47 件 / 未対応 1 件）</a:t>
+              <a:t>・9件中1件も重ならなかった</a:t>
             </a:r>
           </a:p>
           <a:p>
@@ -5214,13 +5317,13 @@
               </a:spcBef>
             </a:pPr>
             <a:r>
-              <a:rPr sz="1300" b="0">
+              <a:rPr sz="1200" b="0">
                 <a:solidFill>
                   <a:srgbClr val="5B636E"/>
                 </a:solidFill>
                 <a:latin typeface="Yu Gothic"/>
               </a:rPr>
-              <a:t>　　症状・原因・直し方・確認方法をそれぞれに書いている</a:t>
+              <a:t>　　性質がまったく違う。両方やる必要がある</a:t>
             </a:r>
           </a:p>
           <a:p>
@@ -5230,13 +5333,13 @@
               </a:spcBef>
             </a:pPr>
             <a:r>
-              <a:rPr sz="1600" b="1">
+              <a:rPr sz="1500" b="1">
                 <a:solidFill>
                   <a:srgbClr val="1B1F24"/>
                 </a:solidFill>
                 <a:latin typeface="Yu Gothic"/>
               </a:rPr>
-              <a:t>・WORKLOG.md（作業ログ）</a:t>
+              <a:t>・利用者目線でいちばん重かった指摘は「説明書が1文字も無い」</a:t>
             </a:r>
           </a:p>
           <a:p>
@@ -5246,13 +5349,13 @@
               </a:spcBef>
             </a:pPr>
             <a:r>
-              <a:rPr sz="1300" b="0">
+              <a:rPr sz="1200" b="0">
                 <a:solidFill>
                   <a:srgbClr val="5B636E"/>
                 </a:solidFill>
                 <a:latin typeface="Yu Gothic"/>
               </a:rPr>
-              <a:t>　　どのコミットでどのファイルを何行いじったか、指示への対応状況の対照表</a:t>
+              <a:t>　　--help だけが手がかりで、何から始めればよいか分からない状態だった</a:t>
             </a:r>
           </a:p>
           <a:p>
@@ -5262,13 +5365,13 @@
               </a:spcBef>
             </a:pPr>
             <a:r>
-              <a:rPr sz="1600" b="1">
+              <a:rPr sz="1500" b="1">
                 <a:solidFill>
                   <a:srgbClr val="1B1F24"/>
                 </a:solidFill>
                 <a:latin typeface="Yu Gothic"/>
               </a:rPr>
-              <a:t>・DEVNOTES.md（開発メモ）</a:t>
+              <a:t>・測って自分の判断が4回覆った</a:t>
             </a:r>
           </a:p>
           <a:p>
@@ -5278,52 +5381,20 @@
               </a:spcBef>
             </a:pPr>
             <a:r>
-              <a:rPr sz="1300" b="0">
+              <a:rPr sz="1200" b="0">
                 <a:solidFill>
                   <a:srgbClr val="5B636E"/>
                 </a:solidFill>
                 <a:latin typeface="Yu Gothic"/>
               </a:rPr>
-              <a:t>　　設計の経緯、試して駄目だった方法、既知の限界</a:t>
-            </a:r>
-          </a:p>
-          <a:p>
-            <a:pPr algn="l">
-              <a:spcBef>
-                <a:spcPts val="1000"/>
-              </a:spcBef>
-            </a:pPr>
-            <a:r>
-              <a:rPr sz="1600" b="1">
-                <a:solidFill>
-                  <a:srgbClr val="1B1F24"/>
-                </a:solidFill>
-                <a:latin typeface="Yu Gothic"/>
-              </a:rPr>
-              <a:t>・docs/DEVELOPER.md（技術者向け）</a:t>
-            </a:r>
-          </a:p>
-          <a:p>
-            <a:pPr algn="l">
-              <a:spcBef>
-                <a:spcPts val="200"/>
-              </a:spcBef>
-            </a:pPr>
-            <a:r>
-              <a:rPr sz="1300" b="0">
-                <a:solidFill>
-                  <a:srgbClr val="5B636E"/>
-                </a:solidFill>
-                <a:latin typeface="Yu Gothic"/>
-              </a:rPr>
-              <a:t>　　構成、全コマンド、新しい様式の追加手順</a:t>
-            </a:r>
-          </a:p>
-        </p:txBody>
-      </p:sp>
-      <p:sp>
-        <p:nvSpPr>
-          <p:cNvPr id="5" name="TextBox 4"/>
+              <a:t>　　輪郭立て＝害 / 切り抜き側の低解像度対応＝効果0 / Lanczosの境目＝変化なし / Lanczos自体＝差なし</a:t>
+            </a:r>
+          </a:p>
+        </p:txBody>
+      </p:sp>
+      <p:sp>
+        <p:nvSpPr>
+          <p:cNvPr id="6" name="TextBox 5"/>
           <p:cNvSpPr txBox="1"/>
           <p:nvPr/>
         </p:nvSpPr>
@@ -5408,7 +5479,23 @@
                 </a:solidFill>
                 <a:latin typeface="Yu Gothic"/>
               </a:rPr>
-              <a:t>これから</a:t>
+              <a:t>解像度の低い入力への対応</a:t>
+            </a:r>
+          </a:p>
+          <a:p>
+            <a:pPr algn="l">
+              <a:spcBef>
+                <a:spcPts val="400"/>
+              </a:spcBef>
+            </a:pPr>
+            <a:r>
+              <a:rPr sz="1400" b="0">
+                <a:solidFill>
+                  <a:srgbClr val="5B636E"/>
+                </a:solidFill>
+                <a:latin typeface="Yu Gothic"/>
+              </a:rPr>
+              <a:t>人が読める程度に写っていても、機械が読めないことがある</a:t>
             </a:r>
           </a:p>
         </p:txBody>
@@ -5457,15 +5544,493 @@
           </a:p>
         </p:txBody>
       </p:sp>
-      <p:sp>
-        <p:nvSpPr>
-          <p:cNvPr id="4" name="TextBox 3"/>
+      <p:graphicFrame>
+        <p:nvGraphicFramePr>
+          <p:cNvPr id="4" name="Table 3"/>
+          <p:cNvGraphicFramePr>
+            <a:graphicFrameLocks noGrp="1"/>
+          </p:cNvGraphicFramePr>
+          <p:nvPr/>
+        </p:nvGraphicFramePr>
+        <p:xfrm>
+          <a:off x="685800" y="1783080"/>
+          <a:ext cx="8778240" cy="2011680"/>
+        </p:xfrm>
+        <a:graphic>
+          <a:graphicData uri="http://schemas.openxmlformats.org/drawingml/2006/table">
+            <a:tbl>
+              <a:tblPr firstRow="1" bandRow="1">
+                <a:tableStyleId>{5C22544A-7EE6-4342-B048-85BDC9FD1C3A}</a:tableStyleId>
+              </a:tblPr>
+              <a:tblGrid>
+                <a:gridCol w="3291840"/>
+                <a:gridCol w="1828800"/>
+                <a:gridCol w="1828800"/>
+                <a:gridCol w="1828800"/>
+              </a:tblGrid>
+              <a:tr h="402336">
+                <a:tc>
+                  <a:txBody>
+                    <a:bodyPr/>
+                    <a:lstStyle/>
+                    <a:p>
+                      <a:r>
+                        <a:rPr sz="1400" b="1">
+                          <a:solidFill>
+                            <a:srgbClr val="FFFFFF"/>
+                          </a:solidFill>
+                          <a:latin typeface="Yu Gothic"/>
+                        </a:rPr>
+                        <a:t>入力</a:t>
+                      </a:r>
+                    </a:p>
+                  </a:txBody>
+                  <a:tcPr marT="38100" marB="38100">
+                    <a:solidFill>
+                      <a:srgbClr val="1E5AA8"/>
+                    </a:solidFill>
+                  </a:tcPr>
+                </a:tc>
+                <a:tc>
+                  <a:txBody>
+                    <a:bodyPr/>
+                    <a:lstStyle/>
+                    <a:p>
+                      <a:r>
+                        <a:rPr sz="1400" b="1">
+                          <a:solidFill>
+                            <a:srgbClr val="FFFFFF"/>
+                          </a:solidFill>
+                          <a:latin typeface="Yu Gothic"/>
+                        </a:rPr>
+                        <a:t>引き伸ばし</a:t>
+                      </a:r>
+                    </a:p>
+                  </a:txBody>
+                  <a:tcPr marT="38100" marB="38100">
+                    <a:solidFill>
+                      <a:srgbClr val="1E5AA8"/>
+                    </a:solidFill>
+                  </a:tcPr>
+                </a:tc>
+                <a:tc>
+                  <a:txBody>
+                    <a:bodyPr/>
+                    <a:lstStyle/>
+                    <a:p>
+                      <a:r>
+                        <a:rPr sz="1400" b="1">
+                          <a:solidFill>
+                            <a:srgbClr val="FFFFFF"/>
+                          </a:solidFill>
+                          <a:latin typeface="Yu Gothic"/>
+                        </a:rPr>
+                        <a:t>対応後</a:t>
+                      </a:r>
+                    </a:p>
+                  </a:txBody>
+                  <a:tcPr marT="38100" marB="38100">
+                    <a:solidFill>
+                      <a:srgbClr val="1E5AA8"/>
+                    </a:solidFill>
+                  </a:tcPr>
+                </a:tc>
+                <a:tc>
+                  <a:txBody>
+                    <a:bodyPr/>
+                    <a:lstStyle/>
+                    <a:p>
+                      <a:r>
+                        <a:rPr sz="1400" b="1">
+                          <a:solidFill>
+                            <a:srgbClr val="FFFFFF"/>
+                          </a:solidFill>
+                          <a:latin typeface="Yu Gothic"/>
+                        </a:rPr>
+                        <a:t>対応前</a:t>
+                      </a:r>
+                    </a:p>
+                  </a:txBody>
+                  <a:tcPr marT="38100" marB="38100">
+                    <a:solidFill>
+                      <a:srgbClr val="1E5AA8"/>
+                    </a:solidFill>
+                  </a:tcPr>
+                </a:tc>
+              </a:tr>
+              <a:tr h="402336">
+                <a:tc>
+                  <a:txBody>
+                    <a:bodyPr/>
+                    <a:lstStyle/>
+                    <a:p>
+                      <a:r>
+                        <a:rPr sz="1400" b="0">
+                          <a:solidFill>
+                            <a:srgbClr val="1B1F24"/>
+                          </a:solidFill>
+                          <a:latin typeface="Yu Gothic"/>
+                        </a:rPr>
+                        <a:t>200dpi（想定）</a:t>
+                      </a:r>
+                    </a:p>
+                  </a:txBody>
+                  <a:tcPr marT="38100" marB="38100">
+                    <a:solidFill>
+                      <a:srgbClr val="FFFFFF"/>
+                    </a:solidFill>
+                  </a:tcPr>
+                </a:tc>
+                <a:tc>
+                  <a:txBody>
+                    <a:bodyPr/>
+                    <a:lstStyle/>
+                    <a:p>
+                      <a:r>
+                        <a:rPr sz="1400" b="0">
+                          <a:solidFill>
+                            <a:srgbClr val="1B1F24"/>
+                          </a:solidFill>
+                          <a:latin typeface="Yu Gothic"/>
+                        </a:rPr>
+                        <a:t>1.0 倍</a:t>
+                      </a:r>
+                    </a:p>
+                  </a:txBody>
+                  <a:tcPr marT="38100" marB="38100">
+                    <a:solidFill>
+                      <a:srgbClr val="FFFFFF"/>
+                    </a:solidFill>
+                  </a:tcPr>
+                </a:tc>
+                <a:tc>
+                  <a:txBody>
+                    <a:bodyPr/>
+                    <a:lstStyle/>
+                    <a:p>
+                      <a:r>
+                        <a:rPr sz="1400" b="0">
+                          <a:solidFill>
+                            <a:srgbClr val="1B1F24"/>
+                          </a:solidFill>
+                          <a:latin typeface="Yu Gothic"/>
+                        </a:rPr>
+                        <a:t>255</a:t>
+                      </a:r>
+                    </a:p>
+                  </a:txBody>
+                  <a:tcPr marT="38100" marB="38100">
+                    <a:solidFill>
+                      <a:srgbClr val="FFFFFF"/>
+                    </a:solidFill>
+                  </a:tcPr>
+                </a:tc>
+                <a:tc>
+                  <a:txBody>
+                    <a:bodyPr/>
+                    <a:lstStyle/>
+                    <a:p>
+                      <a:r>
+                        <a:rPr sz="1400" b="0">
+                          <a:solidFill>
+                            <a:srgbClr val="1B1F24"/>
+                          </a:solidFill>
+                          <a:latin typeface="Yu Gothic"/>
+                        </a:rPr>
+                        <a:t>255（同じ）</a:t>
+                      </a:r>
+                    </a:p>
+                  </a:txBody>
+                  <a:tcPr marT="38100" marB="38100">
+                    <a:solidFill>
+                      <a:srgbClr val="FFFFFF"/>
+                    </a:solidFill>
+                  </a:tcPr>
+                </a:tc>
+              </a:tr>
+              <a:tr h="402336">
+                <a:tc>
+                  <a:txBody>
+                    <a:bodyPr/>
+                    <a:lstStyle/>
+                    <a:p>
+                      <a:r>
+                        <a:rPr sz="1400" b="0">
+                          <a:solidFill>
+                            <a:srgbClr val="1B1F24"/>
+                          </a:solidFill>
+                          <a:latin typeface="Yu Gothic"/>
+                        </a:rPr>
+                        <a:t>150dpi</a:t>
+                      </a:r>
+                    </a:p>
+                  </a:txBody>
+                  <a:tcPr marT="38100" marB="38100">
+                    <a:solidFill>
+                      <a:srgbClr val="F2F5F9"/>
+                    </a:solidFill>
+                  </a:tcPr>
+                </a:tc>
+                <a:tc>
+                  <a:txBody>
+                    <a:bodyPr/>
+                    <a:lstStyle/>
+                    <a:p>
+                      <a:r>
+                        <a:rPr sz="1400" b="0">
+                          <a:solidFill>
+                            <a:srgbClr val="1B1F24"/>
+                          </a:solidFill>
+                          <a:latin typeface="Yu Gothic"/>
+                        </a:rPr>
+                        <a:t>1.33 倍</a:t>
+                      </a:r>
+                    </a:p>
+                  </a:txBody>
+                  <a:tcPr marT="38100" marB="38100">
+                    <a:solidFill>
+                      <a:srgbClr val="F2F5F9"/>
+                    </a:solidFill>
+                  </a:tcPr>
+                </a:tc>
+                <a:tc>
+                  <a:txBody>
+                    <a:bodyPr/>
+                    <a:lstStyle/>
+                    <a:p>
+                      <a:r>
+                        <a:rPr sz="1400" b="0">
+                          <a:solidFill>
+                            <a:srgbClr val="1B1F24"/>
+                          </a:solidFill>
+                          <a:latin typeface="Yu Gothic"/>
+                        </a:rPr>
+                        <a:t>260</a:t>
+                      </a:r>
+                    </a:p>
+                  </a:txBody>
+                  <a:tcPr marT="38100" marB="38100">
+                    <a:solidFill>
+                      <a:srgbClr val="F2F5F9"/>
+                    </a:solidFill>
+                  </a:tcPr>
+                </a:tc>
+                <a:tc>
+                  <a:txBody>
+                    <a:bodyPr/>
+                    <a:lstStyle/>
+                    <a:p>
+                      <a:r>
+                        <a:rPr sz="1400" b="0">
+                          <a:solidFill>
+                            <a:srgbClr val="1B1F24"/>
+                          </a:solidFill>
+                          <a:latin typeface="Yu Gothic"/>
+                        </a:rPr>
+                        <a:t>256</a:t>
+                      </a:r>
+                    </a:p>
+                  </a:txBody>
+                  <a:tcPr marT="38100" marB="38100">
+                    <a:solidFill>
+                      <a:srgbClr val="F2F5F9"/>
+                    </a:solidFill>
+                  </a:tcPr>
+                </a:tc>
+              </a:tr>
+              <a:tr h="402336">
+                <a:tc>
+                  <a:txBody>
+                    <a:bodyPr/>
+                    <a:lstStyle/>
+                    <a:p>
+                      <a:r>
+                        <a:rPr sz="1400" b="0">
+                          <a:solidFill>
+                            <a:srgbClr val="1B1F24"/>
+                          </a:solidFill>
+                          <a:latin typeface="Yu Gothic"/>
+                        </a:rPr>
+                        <a:t>100dpi</a:t>
+                      </a:r>
+                    </a:p>
+                  </a:txBody>
+                  <a:tcPr marT="38100" marB="38100">
+                    <a:solidFill>
+                      <a:srgbClr val="FFFFFF"/>
+                    </a:solidFill>
+                  </a:tcPr>
+                </a:tc>
+                <a:tc>
+                  <a:txBody>
+                    <a:bodyPr/>
+                    <a:lstStyle/>
+                    <a:p>
+                      <a:r>
+                        <a:rPr sz="1400" b="0">
+                          <a:solidFill>
+                            <a:srgbClr val="1B1F24"/>
+                          </a:solidFill>
+                          <a:latin typeface="Yu Gothic"/>
+                        </a:rPr>
+                        <a:t>2.0 倍</a:t>
+                      </a:r>
+                    </a:p>
+                  </a:txBody>
+                  <a:tcPr marT="38100" marB="38100">
+                    <a:solidFill>
+                      <a:srgbClr val="FFFFFF"/>
+                    </a:solidFill>
+                  </a:tcPr>
+                </a:tc>
+                <a:tc>
+                  <a:txBody>
+                    <a:bodyPr/>
+                    <a:lstStyle/>
+                    <a:p>
+                      <a:r>
+                        <a:rPr sz="1400" b="0">
+                          <a:solidFill>
+                            <a:srgbClr val="1B1F24"/>
+                          </a:solidFill>
+                          <a:latin typeface="Yu Gothic"/>
+                        </a:rPr>
+                        <a:t>244</a:t>
+                      </a:r>
+                    </a:p>
+                  </a:txBody>
+                  <a:tcPr marT="38100" marB="38100">
+                    <a:solidFill>
+                      <a:srgbClr val="FFFFFF"/>
+                    </a:solidFill>
+                  </a:tcPr>
+                </a:tc>
+                <a:tc>
+                  <a:txBody>
+                    <a:bodyPr/>
+                    <a:lstStyle/>
+                    <a:p>
+                      <a:r>
+                        <a:rPr sz="1400" b="0">
+                          <a:solidFill>
+                            <a:srgbClr val="1B1F24"/>
+                          </a:solidFill>
+                          <a:latin typeface="Yu Gothic"/>
+                        </a:rPr>
+                        <a:t>249</a:t>
+                      </a:r>
+                    </a:p>
+                  </a:txBody>
+                  <a:tcPr marT="38100" marB="38100">
+                    <a:solidFill>
+                      <a:srgbClr val="FFFFFF"/>
+                    </a:solidFill>
+                  </a:tcPr>
+                </a:tc>
+              </a:tr>
+              <a:tr h="402336">
+                <a:tc>
+                  <a:txBody>
+                    <a:bodyPr/>
+                    <a:lstStyle/>
+                    <a:p>
+                      <a:r>
+                        <a:rPr sz="1400" b="0">
+                          <a:solidFill>
+                            <a:srgbClr val="1B1F24"/>
+                          </a:solidFill>
+                          <a:latin typeface="Yu Gothic"/>
+                        </a:rPr>
+                        <a:t>75dpi（A4が横600画素）</a:t>
+                      </a:r>
+                    </a:p>
+                  </a:txBody>
+                  <a:tcPr marT="38100" marB="38100">
+                    <a:solidFill>
+                      <a:srgbClr val="F2F5F9"/>
+                    </a:solidFill>
+                  </a:tcPr>
+                </a:tc>
+                <a:tc>
+                  <a:txBody>
+                    <a:bodyPr/>
+                    <a:lstStyle/>
+                    <a:p>
+                      <a:r>
+                        <a:rPr sz="1400" b="0">
+                          <a:solidFill>
+                            <a:srgbClr val="1B1F24"/>
+                          </a:solidFill>
+                          <a:latin typeface="Yu Gothic"/>
+                        </a:rPr>
+                        <a:t>2.66 倍</a:t>
+                      </a:r>
+                    </a:p>
+                  </a:txBody>
+                  <a:tcPr marT="38100" marB="38100">
+                    <a:solidFill>
+                      <a:srgbClr val="F2F5F9"/>
+                    </a:solidFill>
+                  </a:tcPr>
+                </a:tc>
+                <a:tc>
+                  <a:txBody>
+                    <a:bodyPr/>
+                    <a:lstStyle/>
+                    <a:p>
+                      <a:r>
+                        <a:rPr sz="1400" b="0">
+                          <a:solidFill>
+                            <a:srgbClr val="1A7F4B"/>
+                          </a:solidFill>
+                          <a:latin typeface="Yu Gothic"/>
+                        </a:rPr>
+                        <a:t>241</a:t>
+                      </a:r>
+                    </a:p>
+                  </a:txBody>
+                  <a:tcPr marT="38100" marB="38100">
+                    <a:solidFill>
+                      <a:srgbClr val="F2F5F9"/>
+                    </a:solidFill>
+                  </a:tcPr>
+                </a:tc>
+                <a:tc>
+                  <a:txBody>
+                    <a:bodyPr/>
+                    <a:lstStyle/>
+                    <a:p>
+                      <a:r>
+                        <a:rPr sz="1400" b="0">
+                          <a:solidFill>
+                            <a:srgbClr val="1B1F24"/>
+                          </a:solidFill>
+                          <a:latin typeface="Yu Gothic"/>
+                        </a:rPr>
+                        <a:t>225</a:t>
+                      </a:r>
+                    </a:p>
+                  </a:txBody>
+                  <a:tcPr marT="38100" marB="38100">
+                    <a:solidFill>
+                      <a:srgbClr val="F2F5F9"/>
+                    </a:solidFill>
+                  </a:tcPr>
+                </a:tc>
+              </a:tr>
+            </a:tbl>
+          </a:graphicData>
+        </a:graphic>
+      </p:graphicFrame>
+      <p:sp>
+        <p:nvSpPr>
+          <p:cNvPr id="5" name="TextBox 4"/>
           <p:cNvSpPr txBox="1"/>
           <p:nvPr/>
         </p:nvSpPr>
         <p:spPr>
           <a:xfrm>
-            <a:off x="685800" y="1691640"/>
+            <a:off x="685800" y="4023360"/>
             <a:ext cx="10881360" cy="4572000"/>
           </a:xfrm>
           <a:prstGeom prst="rect">
@@ -5485,13 +6050,13 @@
               </a:spcBef>
             </a:pPr>
             <a:r>
-              <a:rPr sz="1700" b="1">
+              <a:rPr sz="1500" b="1">
                 <a:solidFill>
                   <a:srgbClr val="1B1F24"/>
                 </a:solidFill>
                 <a:latin typeface="Yu Gothic"/>
               </a:rPr>
-              <a:t>・単一HTMLファイル版でのテキストOCR</a:t>
+              <a:t>・要は「位置合わせの1行」だった</a:t>
             </a:r>
           </a:p>
           <a:p>
@@ -5501,13 +6066,13 @@
               </a:spcBef>
             </a:pPr>
             <a:r>
-              <a:rPr sz="1400" b="0">
+              <a:rPr sz="1200" b="0">
                 <a:solidFill>
                   <a:srgbClr val="5B636E"/>
                 </a:solidFill>
                 <a:latin typeface="Yu Gothic"/>
               </a:rPr>
-              <a:t>　　ブラウザの制約があり、方法を検討中</a:t>
+              <a:t>　　テンプレートの大きさに合わせる所で線形補間を使っていた。にじんで細い線が消え、あとでいくら拡大しても戻らない</a:t>
             </a:r>
           </a:p>
           <a:p>
@@ -5517,13 +6082,13 @@
               </a:spcBef>
             </a:pPr>
             <a:r>
-              <a:rPr sz="1700" b="1">
+              <a:rPr sz="1500" b="1">
                 <a:solidFill>
                   <a:srgbClr val="1B1F24"/>
                 </a:solidFill>
                 <a:latin typeface="Yu Gothic"/>
               </a:rPr>
-              <a:t>・読み取り精度の継続的な検証</a:t>
+              <a:t>・切り抜き側をいじっても効果は0だった</a:t>
             </a:r>
           </a:p>
           <a:p>
@@ -5533,13 +6098,13 @@
               </a:spcBef>
             </a:pPr>
             <a:r>
-              <a:rPr sz="1400" b="0">
+              <a:rPr sz="1200" b="0">
                 <a:solidFill>
                   <a:srgbClr val="5B636E"/>
                 </a:solidFill>
                 <a:latin typeface="Yu Gothic"/>
               </a:rPr>
-              <a:t>　　操作ログの「どこをどれだけ直したか」を精度の指標に使う</a:t>
+              <a:t>　　位置合わせで既に引き伸ばされているため、分岐に一度も入っていなかった。測って初めて分かった</a:t>
             </a:r>
           </a:p>
           <a:p>
@@ -5549,13 +6114,13 @@
               </a:spcBef>
             </a:pPr>
             <a:r>
-              <a:rPr sz="1700" b="1">
+              <a:rPr sz="1500" b="1">
                 <a:solidFill>
                   <a:srgbClr val="1B1F24"/>
                 </a:solidFill>
                 <a:latin typeface="Yu Gothic"/>
               </a:rPr>
-              <a:t>・様式が変わったときの追従</a:t>
+              <a:t>・輪郭を立てる処理は悪化したので入れていない</a:t>
             </a:r>
           </a:p>
           <a:p>
@@ -5565,58 +6130,26 @@
               </a:spcBef>
             </a:pPr>
             <a:r>
-              <a:rPr sz="1400" b="0">
+              <a:rPr sz="1200" b="0">
                 <a:solidFill>
                   <a:srgbClr val="5B636E"/>
                 </a:solidFill>
                 <a:latin typeface="Yu Gothic"/>
               </a:rPr>
-              <a:t>　　テンプレートは管理画面から差し替えられる</a:t>
-            </a:r>
-          </a:p>
-          <a:p>
-            <a:pPr algn="l">
-              <a:spcBef>
-                <a:spcPts val="1000"/>
-              </a:spcBef>
-            </a:pPr>
-            <a:r>
-              <a:rPr sz="1700" b="1">
-                <a:solidFill>
-                  <a:srgbClr val="1B1F24"/>
-                </a:solidFill>
-                <a:latin typeface="Yu Gothic"/>
-              </a:rPr>
-              <a:t>・対応済み：医療機関一覧を全国分そろえ、管理画面から更新できるようにした</a:t>
-            </a:r>
-          </a:p>
-          <a:p>
-            <a:pPr algn="l">
-              <a:spcBef>
-                <a:spcPts val="200"/>
-              </a:spcBef>
-            </a:pPr>
-            <a:r>
-              <a:rPr sz="1400" b="0">
-                <a:solidFill>
-                  <a:srgbClr val="5B636E"/>
-                </a:solidFill>
-                <a:latin typeface="Yu Gothic"/>
-              </a:rPr>
-              <a:t>　　厚生局ごとに公開の形が違うため、中身を見て判定する方式に作り替えた</a:t>
-            </a:r>
-          </a:p>
-        </p:txBody>
-      </p:sp>
-      <p:sp>
-        <p:nvSpPr>
-          <p:cNvPr id="5" name="TextBox 4"/>
+              <a:t>　　100dpi で 年74.0% → 70.2%</a:t>
+            </a:r>
+          </a:p>
+        </p:txBody>
+      </p:sp>
+      <p:sp>
+        <p:nvSpPr>
+          <p:cNvPr id="6" name="TextBox 5"/>
           <p:cNvSpPr txBox="1"/>
           <p:nvPr/>
         </p:nvSpPr>
         <p:spPr>
           <a:xfrm>
-            <a:off x="685800" y="5760720"/>
+            <a:off x="685800" y="5943600"/>
             <a:ext cx="10881360" cy="548640"/>
           </a:xfrm>
           <a:prstGeom prst="rect">
@@ -5636,20 +6169,20 @@
               </a:spcBef>
             </a:pPr>
             <a:r>
-              <a:rPr sz="1200" b="0">
+              <a:rPr sz="1300" b="0">
                 <a:solidFill>
                   <a:srgbClr val="5B636E"/>
                 </a:solidFill>
                 <a:latin typeface="Yu Gothic"/>
               </a:rPr>
-              <a:t>Masaru Sanuki, University of Tsukuba &amp; Department of Biomedical Informatics, University of Tsukuba Hospital</a:t>
-            </a:r>
-          </a:p>
-        </p:txBody>
-      </p:sp>
-      <p:sp>
-        <p:nvSpPr>
-          <p:cNvPr id="6" name="TextBox 5"/>
+              <a:t>表の数字は20通・日付284件の正解数。低い解像度ほど効きが大きい。</a:t>
+            </a:r>
+          </a:p>
+        </p:txBody>
+      </p:sp>
+      <p:sp>
+        <p:nvSpPr>
+          <p:cNvPr id="7" name="TextBox 6"/>
           <p:cNvSpPr txBox="1"/>
           <p:nvPr/>
         </p:nvSpPr>
@@ -5690,7 +6223,7 @@
 </p:sld>
 </file>
 
-<file path=ppt/slides/slide2.xml><?xml version="1.0" encoding="utf-8"?>
+<file path=ppt/slides/slide16.xml><?xml version="1.0" encoding="utf-8"?>
 <p:sld xmlns:a="http://schemas.openxmlformats.org/drawingml/2006/main" xmlns:p="http://schemas.openxmlformats.org/presentationml/2006/main" xmlns:r="http://schemas.openxmlformats.org/officeDocument/2006/relationships">
   <p:cSld>
     <p:spTree>
@@ -5734,7 +6267,7 @@
                 </a:solidFill>
                 <a:latin typeface="Yu Gothic"/>
               </a:rPr>
-              <a:t>できること</a:t>
+              <a:t>デジタル庁「源内」への接続（受け口だけ用意・既定は閉）</a:t>
             </a:r>
           </a:p>
           <a:p>
@@ -5750,7 +6283,7 @@
                 </a:solidFill>
                 <a:latin typeface="Yu Gothic"/>
               </a:rPr>
-              <a:t>読み取り → 確認・編集 → 保存</a:t>
+              <a:t>組み込みの可否を検討した結果</a:t>
             </a:r>
           </a:p>
         </p:txBody>
@@ -5799,6 +6332,997 @@
           </a:p>
         </p:txBody>
       </p:sp>
+      <p:graphicFrame>
+        <p:nvGraphicFramePr>
+          <p:cNvPr id="4" name="Table 3"/>
+          <p:cNvGraphicFramePr>
+            <a:graphicFrameLocks noGrp="1"/>
+          </p:cNvGraphicFramePr>
+          <p:nvPr/>
+        </p:nvGraphicFramePr>
+        <p:xfrm>
+          <a:off x="685800" y="1783080"/>
+          <a:ext cx="10789920" cy="1627632"/>
+        </p:xfrm>
+        <a:graphic>
+          <a:graphicData uri="http://schemas.openxmlformats.org/drawingml/2006/table">
+            <a:tbl>
+              <a:tblPr firstRow="1" bandRow="1">
+                <a:tableStyleId>{5C22544A-7EE6-4342-B048-85BDC9FD1C3A}</a:tableStyleId>
+              </a:tblPr>
+              <a:tblGrid>
+                <a:gridCol w="4023360"/>
+                <a:gridCol w="6766560"/>
+              </a:tblGrid>
+              <a:tr h="406908">
+                <a:tc>
+                  <a:txBody>
+                    <a:bodyPr/>
+                    <a:lstStyle/>
+                    <a:p>
+                      <a:r>
+                        <a:rPr sz="1300" b="1">
+                          <a:solidFill>
+                            <a:srgbClr val="FFFFFF"/>
+                          </a:solidFill>
+                          <a:latin typeface="Yu Gothic"/>
+                        </a:rPr>
+                        <a:t>検討したこと</a:t>
+                      </a:r>
+                    </a:p>
+                  </a:txBody>
+                  <a:tcPr marT="38100" marB="38100">
+                    <a:solidFill>
+                      <a:srgbClr val="1E5AA8"/>
+                    </a:solidFill>
+                  </a:tcPr>
+                </a:tc>
+                <a:tc>
+                  <a:txBody>
+                    <a:bodyPr/>
+                    <a:lstStyle/>
+                    <a:p>
+                      <a:r>
+                        <a:rPr sz="1300" b="1">
+                          <a:solidFill>
+                            <a:srgbClr val="FFFFFF"/>
+                          </a:solidFill>
+                          <a:latin typeface="Yu Gothic"/>
+                        </a:rPr>
+                        <a:t>結論</a:t>
+                      </a:r>
+                    </a:p>
+                  </a:txBody>
+                  <a:tcPr marT="38100" marB="38100">
+                    <a:solidFill>
+                      <a:srgbClr val="1E5AA8"/>
+                    </a:solidFill>
+                  </a:tcPr>
+                </a:tc>
+              </a:tr>
+              <a:tr h="406908">
+                <a:tc>
+                  <a:txBody>
+                    <a:bodyPr/>
+                    <a:lstStyle/>
+                    <a:p>
+                      <a:r>
+                        <a:rPr sz="1300" b="0">
+                          <a:solidFill>
+                            <a:srgbClr val="1B1F24"/>
+                          </a:solidFill>
+                          <a:latin typeface="Yu Gothic"/>
+                        </a:rPr>
+                        <a:t>genai-web / genai-ai-api のコードを取り込む</a:t>
+                      </a:r>
+                    </a:p>
+                  </a:txBody>
+                  <a:tcPr marT="38100" marB="38100">
+                    <a:solidFill>
+                      <a:srgbClr val="FFFFFF"/>
+                    </a:solidFill>
+                  </a:tcPr>
+                </a:tc>
+                <a:tc>
+                  <a:txBody>
+                    <a:bodyPr/>
+                    <a:lstStyle/>
+                    <a:p>
+                      <a:r>
+                        <a:rPr sz="1300" b="0">
+                          <a:solidFill>
+                            <a:srgbClr val="1B1F24"/>
+                          </a:solidFill>
+                          <a:latin typeface="Yu Gothic"/>
+                        </a:rPr>
+                        <a:t>しない。前者はAWS CDKの基盤本体、後者はクラウド別のRAG/LLMテンプレート。帳票の読み取りは含まれない</a:t>
+                      </a:r>
+                    </a:p>
+                  </a:txBody>
+                  <a:tcPr marT="38100" marB="38100">
+                    <a:solidFill>
+                      <a:srgbClr val="FFFFFF"/>
+                    </a:solidFill>
+                  </a:tcPr>
+                </a:tc>
+              </a:tr>
+              <a:tr h="406908">
+                <a:tc>
+                  <a:txBody>
+                    <a:bodyPr/>
+                    <a:lstStyle/>
+                    <a:p>
+                      <a:r>
+                        <a:rPr sz="1300" b="0">
+                          <a:solidFill>
+                            <a:srgbClr val="1B1F24"/>
+                          </a:solidFill>
+                          <a:latin typeface="Yu Gothic"/>
+                        </a:rPr>
+                        <a:t>源内のAIアプリとして登録できるようにする</a:t>
+                      </a:r>
+                    </a:p>
+                  </a:txBody>
+                  <a:tcPr marT="38100" marB="38100">
+                    <a:solidFill>
+                      <a:srgbClr val="F2F5F9"/>
+                    </a:solidFill>
+                  </a:tcPr>
+                </a:tc>
+                <a:tc>
+                  <a:txBody>
+                    <a:bodyPr/>
+                    <a:lstStyle/>
+                    <a:p>
+                      <a:r>
+                        <a:rPr sz="1300" b="0">
+                          <a:solidFill>
+                            <a:srgbClr val="1B1F24"/>
+                          </a:solidFill>
+                          <a:latin typeface="Yu Gothic"/>
+                        </a:rPr>
+                        <a:t>受け口を用意した。取り決めは薄いREST（ファイルをbase64で受け、Markdownを返す）</a:t>
+                      </a:r>
+                    </a:p>
+                  </a:txBody>
+                  <a:tcPr marT="38100" marB="38100">
+                    <a:solidFill>
+                      <a:srgbClr val="F2F5F9"/>
+                    </a:solidFill>
+                  </a:tcPr>
+                </a:tc>
+              </a:tr>
+              <a:tr h="406908">
+                <a:tc>
+                  <a:txBody>
+                    <a:bodyPr/>
+                    <a:lstStyle/>
+                    <a:p>
+                      <a:r>
+                        <a:rPr sz="1300" b="0">
+                          <a:solidFill>
+                            <a:srgbClr val="1B1F24"/>
+                          </a:solidFill>
+                          <a:latin typeface="Yu Gothic"/>
+                        </a:rPr>
+                        <a:t>ライセンス</a:t>
+                      </a:r>
+                    </a:p>
+                  </a:txBody>
+                  <a:tcPr marT="38100" marB="38100">
+                    <a:solidFill>
+                      <a:srgbClr val="FFFFFF"/>
+                    </a:solidFill>
+                  </a:tcPr>
+                </a:tc>
+                <a:tc>
+                  <a:txBody>
+                    <a:bodyPr/>
+                    <a:lstStyle/>
+                    <a:p>
+                      <a:r>
+                        <a:rPr sz="1300" b="0">
+                          <a:solidFill>
+                            <a:srgbClr val="1B1F24"/>
+                          </a:solidFill>
+                          <a:latin typeface="Yu Gothic"/>
+                        </a:rPr>
+                        <a:t>両方とも MIT。障害にならない</a:t>
+                      </a:r>
+                    </a:p>
+                  </a:txBody>
+                  <a:tcPr marT="38100" marB="38100">
+                    <a:solidFill>
+                      <a:srgbClr val="FFFFFF"/>
+                    </a:solidFill>
+                  </a:tcPr>
+                </a:tc>
+              </a:tr>
+            </a:tbl>
+          </a:graphicData>
+        </a:graphic>
+      </p:graphicFrame>
+      <p:sp>
+        <p:nvSpPr>
+          <p:cNvPr id="5" name="TextBox 4"/>
+          <p:cNvSpPr txBox="1"/>
+          <p:nvPr/>
+        </p:nvSpPr>
+        <p:spPr>
+          <a:xfrm>
+            <a:off x="685800" y="4114800"/>
+            <a:ext cx="10881360" cy="4572000"/>
+          </a:xfrm>
+          <a:prstGeom prst="rect">
+            <a:avLst/>
+          </a:prstGeom>
+          <a:noFill/>
+        </p:spPr>
+        <p:txBody>
+          <a:bodyPr wrap="square">
+            <a:spAutoFit/>
+          </a:bodyPr>
+          <a:lstStyle/>
+          <a:p>
+            <a:pPr algn="l">
+              <a:spcBef>
+                <a:spcPts val="1000"/>
+              </a:spcBef>
+            </a:pPr>
+            <a:r>
+              <a:rPr sz="1500" b="1">
+                <a:solidFill>
+                  <a:srgbClr val="1B1F24"/>
+                </a:solidFill>
+                <a:latin typeface="Yu Gothic"/>
+              </a:rPr>
+              <a:t>・既定では閉じている（404）。ikensho serve --gennai と明示したときだけ開く</a:t>
+            </a:r>
+          </a:p>
+          <a:p>
+            <a:pPr algn="l">
+              <a:spcBef>
+                <a:spcPts val="1000"/>
+              </a:spcBef>
+            </a:pPr>
+            <a:r>
+              <a:rPr sz="1500" b="1">
+                <a:solidFill>
+                  <a:srgbClr val="1B1F24"/>
+                </a:solidFill>
+                <a:latin typeface="Yu Gothic"/>
+              </a:rPr>
+              <a:t>・開くと「患者情報は端末から出ない」という前提が変わる</a:t>
+            </a:r>
+          </a:p>
+          <a:p>
+            <a:pPr algn="l">
+              <a:spcBef>
+                <a:spcPts val="200"/>
+              </a:spcBef>
+            </a:pPr>
+            <a:r>
+              <a:rPr sz="1200" b="0">
+                <a:solidFill>
+                  <a:srgbClr val="5B636E"/>
+                </a:solidFill>
+                <a:latin typeface="Yu Gothic"/>
+              </a:rPr>
+              <a:t>　　読み取り結果（氏名・生年月日・住所を含む）が源内側に渡り、履歴に残る。運用の取り決めを作ってから開くこと</a:t>
+            </a:r>
+          </a:p>
+          <a:p>
+            <a:pPr algn="l">
+              <a:spcBef>
+                <a:spcPts val="1000"/>
+              </a:spcBef>
+            </a:pPr>
+            <a:r>
+              <a:rPr sz="1500" b="1">
+                <a:solidFill>
+                  <a:srgbClr val="1B1F24"/>
+                </a:solidFill>
+                <a:latin typeface="Yu Gothic"/>
+              </a:rPr>
+              <a:t>・登録するかどうかは利用側の判断。技術的な準備だけ済ませてある</a:t>
+            </a:r>
+          </a:p>
+        </p:txBody>
+      </p:sp>
+      <p:sp>
+        <p:nvSpPr>
+          <p:cNvPr id="6" name="TextBox 5"/>
+          <p:cNvSpPr txBox="1"/>
+          <p:nvPr/>
+        </p:nvSpPr>
+        <p:spPr>
+          <a:xfrm>
+            <a:off x="548640" y="6355080"/>
+            <a:ext cx="11064240" cy="365760"/>
+          </a:xfrm>
+          <a:prstGeom prst="rect">
+            <a:avLst/>
+          </a:prstGeom>
+          <a:noFill/>
+        </p:spPr>
+        <p:txBody>
+          <a:bodyPr wrap="none">
+            <a:spAutoFit/>
+          </a:bodyPr>
+          <a:lstStyle/>
+          <a:p>
+            <a:pPr algn="r"/>
+            <a:r>
+              <a:rPr sz="1000">
+                <a:solidFill>
+                  <a:srgbClr val="5B636E"/>
+                </a:solidFill>
+                <a:latin typeface="Yu Gothic"/>
+              </a:rPr>
+              <a:t>主治医意見書 読み取り　|　16</a:t>
+            </a:r>
+          </a:p>
+        </p:txBody>
+      </p:sp>
+    </p:spTree>
+  </p:cSld>
+  <p:clrMapOvr>
+    <a:masterClrMapping/>
+  </p:clrMapOvr>
+</p:sld>
+</file>
+
+<file path=ppt/slides/slide17.xml><?xml version="1.0" encoding="utf-8"?>
+<p:sld xmlns:a="http://schemas.openxmlformats.org/drawingml/2006/main" xmlns:p="http://schemas.openxmlformats.org/presentationml/2006/main" xmlns:r="http://schemas.openxmlformats.org/officeDocument/2006/relationships">
+  <p:cSld>
+    <p:spTree>
+      <p:nvGrpSpPr>
+        <p:cNvPr id="1" name=""/>
+        <p:cNvGrpSpPr/>
+        <p:nvPr/>
+      </p:nvGrpSpPr>
+      <p:grpSpPr/>
+      <p:sp>
+        <p:nvSpPr>
+          <p:cNvPr id="2" name="TextBox 1"/>
+          <p:cNvSpPr txBox="1"/>
+          <p:nvPr/>
+        </p:nvSpPr>
+        <p:spPr>
+          <a:xfrm>
+            <a:off x="548640" y="384048"/>
+            <a:ext cx="11064240" cy="914400"/>
+          </a:xfrm>
+          <a:prstGeom prst="rect">
+            <a:avLst/>
+          </a:prstGeom>
+          <a:noFill/>
+        </p:spPr>
+        <p:txBody>
+          <a:bodyPr wrap="square">
+            <a:spAutoFit/>
+          </a:bodyPr>
+          <a:lstStyle/>
+          <a:p>
+            <a:pPr algn="l">
+              <a:spcBef>
+                <a:spcPts val="0"/>
+              </a:spcBef>
+            </a:pPr>
+            <a:r>
+              <a:rPr sz="3000" b="1">
+                <a:solidFill>
+                  <a:srgbClr val="1B1F24"/>
+                </a:solidFill>
+                <a:latin typeface="Yu Gothic"/>
+              </a:rPr>
+              <a:t>配布のしかた</a:t>
+            </a:r>
+          </a:p>
+        </p:txBody>
+      </p:sp>
+      <p:sp>
+        <p:nvSpPr>
+          <p:cNvPr id="3" name="Rectangle 2"/>
+          <p:cNvSpPr/>
+          <p:nvPr/>
+        </p:nvSpPr>
+        <p:spPr>
+          <a:xfrm>
+            <a:off x="548640" y="1389888"/>
+            <a:ext cx="11064240" cy="11430"/>
+          </a:xfrm>
+          <a:prstGeom prst="rect">
+            <a:avLst/>
+          </a:prstGeom>
+          <a:solidFill>
+            <a:srgbClr val="1E5AA8"/>
+          </a:solidFill>
+          <a:ln>
+            <a:noFill/>
+          </a:ln>
+          <a:effectLst/>
+        </p:spPr>
+        <p:style>
+          <a:lnRef idx="1">
+            <a:schemeClr val="accent1"/>
+          </a:lnRef>
+          <a:fillRef idx="3">
+            <a:schemeClr val="accent1"/>
+          </a:fillRef>
+          <a:effectRef idx="2">
+            <a:schemeClr val="accent1"/>
+          </a:effectRef>
+          <a:fontRef idx="minor">
+            <a:schemeClr val="lt1"/>
+          </a:fontRef>
+        </p:style>
+        <p:txBody>
+          <a:bodyPr rtlCol="0" anchor="ctr"/>
+          <a:lstStyle/>
+          <a:p>
+            <a:pPr algn="ctr"/>
+          </a:p>
+        </p:txBody>
+      </p:sp>
+      <p:graphicFrame>
+        <p:nvGraphicFramePr>
+          <p:cNvPr id="4" name="Table 3"/>
+          <p:cNvGraphicFramePr>
+            <a:graphicFrameLocks noGrp="1"/>
+          </p:cNvGraphicFramePr>
+          <p:nvPr/>
+        </p:nvGraphicFramePr>
+        <p:xfrm>
+          <a:off x="685800" y="1828800"/>
+          <a:ext cx="10789920" cy="2011680"/>
+        </p:xfrm>
+        <a:graphic>
+          <a:graphicData uri="http://schemas.openxmlformats.org/drawingml/2006/table">
+            <a:tbl>
+              <a:tblPr firstRow="1" bandRow="1">
+                <a:tableStyleId>{5C22544A-7EE6-4342-B048-85BDC9FD1C3A}</a:tableStyleId>
+              </a:tblPr>
+              <a:tblGrid>
+                <a:gridCol w="2877312"/>
+                <a:gridCol w="3057144"/>
+                <a:gridCol w="4855464"/>
+              </a:tblGrid>
+              <a:tr h="402336">
+                <a:tc>
+                  <a:txBody>
+                    <a:bodyPr/>
+                    <a:lstStyle/>
+                    <a:p>
+                      <a:r>
+                        <a:rPr sz="1400" b="1">
+                          <a:solidFill>
+                            <a:srgbClr val="FFFFFF"/>
+                          </a:solidFill>
+                          <a:latin typeface="Yu Gothic"/>
+                        </a:rPr>
+                        <a:t>方法</a:t>
+                      </a:r>
+                    </a:p>
+                  </a:txBody>
+                  <a:tcPr marT="38100" marB="38100">
+                    <a:solidFill>
+                      <a:srgbClr val="1E5AA8"/>
+                    </a:solidFill>
+                  </a:tcPr>
+                </a:tc>
+                <a:tc>
+                  <a:txBody>
+                    <a:bodyPr/>
+                    <a:lstStyle/>
+                    <a:p>
+                      <a:r>
+                        <a:rPr sz="1400" b="1">
+                          <a:solidFill>
+                            <a:srgbClr val="FFFFFF"/>
+                          </a:solidFill>
+                          <a:latin typeface="Yu Gothic"/>
+                        </a:rPr>
+                        <a:t>対象</a:t>
+                      </a:r>
+                    </a:p>
+                  </a:txBody>
+                  <a:tcPr marT="38100" marB="38100">
+                    <a:solidFill>
+                      <a:srgbClr val="1E5AA8"/>
+                    </a:solidFill>
+                  </a:tcPr>
+                </a:tc>
+                <a:tc>
+                  <a:txBody>
+                    <a:bodyPr/>
+                    <a:lstStyle/>
+                    <a:p>
+                      <a:r>
+                        <a:rPr sz="1400" b="1">
+                          <a:solidFill>
+                            <a:srgbClr val="FFFFFF"/>
+                          </a:solidFill>
+                          <a:latin typeface="Yu Gothic"/>
+                        </a:rPr>
+                        <a:t>特徴</a:t>
+                      </a:r>
+                    </a:p>
+                  </a:txBody>
+                  <a:tcPr marT="38100" marB="38100">
+                    <a:solidFill>
+                      <a:srgbClr val="1E5AA8"/>
+                    </a:solidFill>
+                  </a:tcPr>
+                </a:tc>
+              </a:tr>
+              <a:tr h="402336">
+                <a:tc>
+                  <a:txBody>
+                    <a:bodyPr/>
+                    <a:lstStyle/>
+                    <a:p>
+                      <a:r>
+                        <a:rPr sz="1400" b="0">
+                          <a:solidFill>
+                            <a:srgbClr val="1B1F24"/>
+                          </a:solidFill>
+                          <a:latin typeface="Yu Gothic"/>
+                        </a:rPr>
+                        <a:t>Web版（サーバに設置）</a:t>
+                      </a:r>
+                    </a:p>
+                  </a:txBody>
+                  <a:tcPr marT="38100" marB="38100">
+                    <a:solidFill>
+                      <a:srgbClr val="FFFFFF"/>
+                    </a:solidFill>
+                  </a:tcPr>
+                </a:tc>
+                <a:tc>
+                  <a:txBody>
+                    <a:bodyPr/>
+                    <a:lstStyle/>
+                    <a:p>
+                      <a:r>
+                        <a:rPr sz="1400" b="0">
+                          <a:solidFill>
+                            <a:srgbClr val="1B1F24"/>
+                          </a:solidFill>
+                          <a:latin typeface="Yu Gothic"/>
+                        </a:rPr>
+                        <a:t>組織で使う</a:t>
+                      </a:r>
+                    </a:p>
+                  </a:txBody>
+                  <a:tcPr marT="38100" marB="38100">
+                    <a:solidFill>
+                      <a:srgbClr val="FFFFFF"/>
+                    </a:solidFill>
+                  </a:tcPr>
+                </a:tc>
+                <a:tc>
+                  <a:txBody>
+                    <a:bodyPr/>
+                    <a:lstStyle/>
+                    <a:p>
+                      <a:r>
+                        <a:rPr sz="1400" b="0">
+                          <a:solidFill>
+                            <a:srgbClr val="1B1F24"/>
+                          </a:solidFill>
+                          <a:latin typeface="Yu Gothic"/>
+                        </a:rPr>
+                        <a:t>全機能。Basic認証で保護</a:t>
+                      </a:r>
+                    </a:p>
+                  </a:txBody>
+                  <a:tcPr marT="38100" marB="38100">
+                    <a:solidFill>
+                      <a:srgbClr val="FFFFFF"/>
+                    </a:solidFill>
+                  </a:tcPr>
+                </a:tc>
+              </a:tr>
+              <a:tr h="402336">
+                <a:tc>
+                  <a:txBody>
+                    <a:bodyPr/>
+                    <a:lstStyle/>
+                    <a:p>
+                      <a:r>
+                        <a:rPr sz="1400" b="0">
+                          <a:solidFill>
+                            <a:srgbClr val="1B1F24"/>
+                          </a:solidFill>
+                          <a:latin typeface="Yu Gothic"/>
+                        </a:rPr>
+                        <a:t>Python版（pip）</a:t>
+                      </a:r>
+                    </a:p>
+                  </a:txBody>
+                  <a:tcPr marT="38100" marB="38100">
+                    <a:solidFill>
+                      <a:srgbClr val="F2F5F9"/>
+                    </a:solidFill>
+                  </a:tcPr>
+                </a:tc>
+                <a:tc>
+                  <a:txBody>
+                    <a:bodyPr/>
+                    <a:lstStyle/>
+                    <a:p>
+                      <a:r>
+                        <a:rPr sz="1400" b="0">
+                          <a:solidFill>
+                            <a:srgbClr val="1B1F24"/>
+                          </a:solidFill>
+                          <a:latin typeface="Yu Gothic"/>
+                        </a:rPr>
+                        <a:t>Rocky / Ubuntu / macOS</a:t>
+                      </a:r>
+                    </a:p>
+                  </a:txBody>
+                  <a:tcPr marT="38100" marB="38100">
+                    <a:solidFill>
+                      <a:srgbClr val="F2F5F9"/>
+                    </a:solidFill>
+                  </a:tcPr>
+                </a:tc>
+                <a:tc>
+                  <a:txBody>
+                    <a:bodyPr/>
+                    <a:lstStyle/>
+                    <a:p>
+                      <a:r>
+                        <a:rPr sz="1400" b="0">
+                          <a:solidFill>
+                            <a:srgbClr val="1B1F24"/>
+                          </a:solidFill>
+                          <a:latin typeface="Yu Gothic"/>
+                        </a:rPr>
+                        <a:t>大量処理・自動化に向く</a:t>
+                      </a:r>
+                    </a:p>
+                  </a:txBody>
+                  <a:tcPr marT="38100" marB="38100">
+                    <a:solidFill>
+                      <a:srgbClr val="F2F5F9"/>
+                    </a:solidFill>
+                  </a:tcPr>
+                </a:tc>
+              </a:tr>
+              <a:tr h="402336">
+                <a:tc>
+                  <a:txBody>
+                    <a:bodyPr/>
+                    <a:lstStyle/>
+                    <a:p>
+                      <a:r>
+                        <a:rPr sz="1400" b="0">
+                          <a:solidFill>
+                            <a:srgbClr val="1B1F24"/>
+                          </a:solidFill>
+                          <a:latin typeface="Yu Gothic"/>
+                        </a:rPr>
+                        <a:t>Docker</a:t>
+                      </a:r>
+                    </a:p>
+                  </a:txBody>
+                  <a:tcPr marT="38100" marB="38100">
+                    <a:solidFill>
+                      <a:srgbClr val="FFFFFF"/>
+                    </a:solidFill>
+                  </a:tcPr>
+                </a:tc>
+                <a:tc>
+                  <a:txBody>
+                    <a:bodyPr/>
+                    <a:lstStyle/>
+                    <a:p>
+                      <a:r>
+                        <a:rPr sz="1400" b="0">
+                          <a:solidFill>
+                            <a:srgbClr val="1B1F24"/>
+                          </a:solidFill>
+                          <a:latin typeface="Yu Gothic"/>
+                        </a:rPr>
+                        <a:t>Windows など</a:t>
+                      </a:r>
+                    </a:p>
+                  </a:txBody>
+                  <a:tcPr marT="38100" marB="38100">
+                    <a:solidFill>
+                      <a:srgbClr val="FFFFFF"/>
+                    </a:solidFill>
+                  </a:tcPr>
+                </a:tc>
+                <a:tc>
+                  <a:txBody>
+                    <a:bodyPr/>
+                    <a:lstStyle/>
+                    <a:p>
+                      <a:r>
+                        <a:rPr sz="1400" b="0">
+                          <a:solidFill>
+                            <a:srgbClr val="1B1F24"/>
+                          </a:solidFill>
+                          <a:latin typeface="Yu Gothic"/>
+                        </a:rPr>
+                        <a:t>OS を問わず同じ環境で動く</a:t>
+                      </a:r>
+                    </a:p>
+                  </a:txBody>
+                  <a:tcPr marT="38100" marB="38100">
+                    <a:solidFill>
+                      <a:srgbClr val="FFFFFF"/>
+                    </a:solidFill>
+                  </a:tcPr>
+                </a:tc>
+              </a:tr>
+              <a:tr h="402336">
+                <a:tc>
+                  <a:txBody>
+                    <a:bodyPr/>
+                    <a:lstStyle/>
+                    <a:p>
+                      <a:r>
+                        <a:rPr sz="1400" b="0">
+                          <a:solidFill>
+                            <a:srgbClr val="1B1F24"/>
+                          </a:solidFill>
+                          <a:latin typeface="Yu Gothic"/>
+                        </a:rPr>
+                        <a:t>単一HTMLファイル</a:t>
+                      </a:r>
+                    </a:p>
+                  </a:txBody>
+                  <a:tcPr marT="38100" marB="38100">
+                    <a:solidFill>
+                      <a:srgbClr val="F2F5F9"/>
+                    </a:solidFill>
+                  </a:tcPr>
+                </a:tc>
+                <a:tc>
+                  <a:txBody>
+                    <a:bodyPr/>
+                    <a:lstStyle/>
+                    <a:p>
+                      <a:r>
+                        <a:rPr sz="1400" b="0">
+                          <a:solidFill>
+                            <a:srgbClr val="1B1F24"/>
+                          </a:solidFill>
+                          <a:latin typeface="Yu Gothic"/>
+                        </a:rPr>
+                        <a:t>持ち運び</a:t>
+                      </a:r>
+                    </a:p>
+                  </a:txBody>
+                  <a:tcPr marT="38100" marB="38100">
+                    <a:solidFill>
+                      <a:srgbClr val="F2F5F9"/>
+                    </a:solidFill>
+                  </a:tcPr>
+                </a:tc>
+                <a:tc>
+                  <a:txBody>
+                    <a:bodyPr/>
+                    <a:lstStyle/>
+                    <a:p>
+                      <a:r>
+                        <a:rPr sz="1400" b="0">
+                          <a:solidFill>
+                            <a:srgbClr val="1B1F24"/>
+                          </a:solidFill>
+                          <a:latin typeface="Yu Gothic"/>
+                        </a:rPr>
+                        <a:t>チェック欄のみ（ブラウザの制約でOCRは動かない）</a:t>
+                      </a:r>
+                    </a:p>
+                  </a:txBody>
+                  <a:tcPr marT="38100" marB="38100">
+                    <a:solidFill>
+                      <a:srgbClr val="F2F5F9"/>
+                    </a:solidFill>
+                  </a:tcPr>
+                </a:tc>
+              </a:tr>
+            </a:tbl>
+          </a:graphicData>
+        </a:graphic>
+      </p:graphicFrame>
+      <p:sp>
+        <p:nvSpPr>
+          <p:cNvPr id="5" name="TextBox 4"/>
+          <p:cNvSpPr txBox="1"/>
+          <p:nvPr/>
+        </p:nvSpPr>
+        <p:spPr>
+          <a:xfrm>
+            <a:off x="685800" y="4572000"/>
+            <a:ext cx="10881360" cy="4572000"/>
+          </a:xfrm>
+          <a:prstGeom prst="rect">
+            <a:avLst/>
+          </a:prstGeom>
+          <a:noFill/>
+        </p:spPr>
+        <p:txBody>
+          <a:bodyPr wrap="square">
+            <a:spAutoFit/>
+          </a:bodyPr>
+          <a:lstStyle/>
+          <a:p>
+            <a:pPr algn="l">
+              <a:spcBef>
+                <a:spcPts val="1000"/>
+              </a:spcBef>
+            </a:pPr>
+            <a:r>
+              <a:rPr sz="1500" b="1">
+                <a:solidFill>
+                  <a:srgbClr val="1B1F24"/>
+                </a:solidFill>
+                <a:latin typeface="Yu Gothic"/>
+              </a:rPr>
+              <a:t>・辞書・テンプレート・様式定義はデータとして分離</a:t>
+            </a:r>
+          </a:p>
+          <a:p>
+            <a:pPr algn="l">
+              <a:spcBef>
+                <a:spcPts val="200"/>
+              </a:spcBef>
+            </a:pPr>
+            <a:r>
+              <a:rPr sz="1200" b="0">
+                <a:solidFill>
+                  <a:srgbClr val="5B636E"/>
+                </a:solidFill>
+                <a:latin typeface="Yu Gothic"/>
+              </a:rPr>
+              <a:t>　　新しい様式は管理画面から追加できる</a:t>
+            </a:r>
+          </a:p>
+        </p:txBody>
+      </p:sp>
+      <p:sp>
+        <p:nvSpPr>
+          <p:cNvPr id="6" name="TextBox 5"/>
+          <p:cNvSpPr txBox="1"/>
+          <p:nvPr/>
+        </p:nvSpPr>
+        <p:spPr>
+          <a:xfrm>
+            <a:off x="548640" y="6355080"/>
+            <a:ext cx="11064240" cy="365760"/>
+          </a:xfrm>
+          <a:prstGeom prst="rect">
+            <a:avLst/>
+          </a:prstGeom>
+          <a:noFill/>
+        </p:spPr>
+        <p:txBody>
+          <a:bodyPr wrap="none">
+            <a:spAutoFit/>
+          </a:bodyPr>
+          <a:lstStyle/>
+          <a:p>
+            <a:pPr algn="r"/>
+            <a:r>
+              <a:rPr sz="1000">
+                <a:solidFill>
+                  <a:srgbClr val="5B636E"/>
+                </a:solidFill>
+                <a:latin typeface="Yu Gothic"/>
+              </a:rPr>
+              <a:t>主治医意見書 読み取り　|　17</a:t>
+            </a:r>
+          </a:p>
+        </p:txBody>
+      </p:sp>
+    </p:spTree>
+  </p:cSld>
+  <p:clrMapOvr>
+    <a:masterClrMapping/>
+  </p:clrMapOvr>
+</p:sld>
+</file>
+
+<file path=ppt/slides/slide18.xml><?xml version="1.0" encoding="utf-8"?>
+<p:sld xmlns:a="http://schemas.openxmlformats.org/drawingml/2006/main" xmlns:p="http://schemas.openxmlformats.org/presentationml/2006/main" xmlns:r="http://schemas.openxmlformats.org/officeDocument/2006/relationships">
+  <p:cSld>
+    <p:spTree>
+      <p:nvGrpSpPr>
+        <p:cNvPr id="1" name=""/>
+        <p:cNvGrpSpPr/>
+        <p:nvPr/>
+      </p:nvGrpSpPr>
+      <p:grpSpPr/>
+      <p:sp>
+        <p:nvSpPr>
+          <p:cNvPr id="2" name="TextBox 1"/>
+          <p:cNvSpPr txBox="1"/>
+          <p:nvPr/>
+        </p:nvSpPr>
+        <p:spPr>
+          <a:xfrm>
+            <a:off x="548640" y="384048"/>
+            <a:ext cx="11064240" cy="914400"/>
+          </a:xfrm>
+          <a:prstGeom prst="rect">
+            <a:avLst/>
+          </a:prstGeom>
+          <a:noFill/>
+        </p:spPr>
+        <p:txBody>
+          <a:bodyPr wrap="square">
+            <a:spAutoFit/>
+          </a:bodyPr>
+          <a:lstStyle/>
+          <a:p>
+            <a:pPr algn="l">
+              <a:spcBef>
+                <a:spcPts val="0"/>
+              </a:spcBef>
+            </a:pPr>
+            <a:r>
+              <a:rPr sz="3000" b="1">
+                <a:solidFill>
+                  <a:srgbClr val="1B1F24"/>
+                </a:solidFill>
+                <a:latin typeface="Yu Gothic"/>
+              </a:rPr>
+              <a:t>開発の記録</a:t>
+            </a:r>
+          </a:p>
+        </p:txBody>
+      </p:sp>
+      <p:sp>
+        <p:nvSpPr>
+          <p:cNvPr id="3" name="Rectangle 2"/>
+          <p:cNvSpPr/>
+          <p:nvPr/>
+        </p:nvSpPr>
+        <p:spPr>
+          <a:xfrm>
+            <a:off x="548640" y="1389888"/>
+            <a:ext cx="11064240" cy="11430"/>
+          </a:xfrm>
+          <a:prstGeom prst="rect">
+            <a:avLst/>
+          </a:prstGeom>
+          <a:solidFill>
+            <a:srgbClr val="1E5AA8"/>
+          </a:solidFill>
+          <a:ln>
+            <a:noFill/>
+          </a:ln>
+          <a:effectLst/>
+        </p:spPr>
+        <p:style>
+          <a:lnRef idx="1">
+            <a:schemeClr val="accent1"/>
+          </a:lnRef>
+          <a:fillRef idx="3">
+            <a:schemeClr val="accent1"/>
+          </a:fillRef>
+          <a:effectRef idx="2">
+            <a:schemeClr val="accent1"/>
+          </a:effectRef>
+          <a:fontRef idx="minor">
+            <a:schemeClr val="lt1"/>
+          </a:fontRef>
+        </p:style>
+        <p:txBody>
+          <a:bodyPr rtlCol="0" anchor="ctr"/>
+          <a:lstStyle/>
+          <a:p>
+            <a:pPr algn="ctr"/>
+          </a:p>
+        </p:txBody>
+      </p:sp>
       <p:sp>
         <p:nvSpPr>
           <p:cNvPr id="4" name="TextBox 3"/>
@@ -5827,13 +7351,13 @@
               </a:spcBef>
             </a:pPr>
             <a:r>
-              <a:rPr sz="1700" b="1">
+              <a:rPr sz="1600" b="1">
                 <a:solidFill>
                   <a:srgbClr val="1B1F24"/>
                 </a:solidFill>
                 <a:latin typeface="Yu Gothic"/>
               </a:rPr>
-              <a:t>・2ページのPDF・画像を、1件でも複数件でも読み取る</a:t>
+              <a:t>・GitHub の Issue に問題を残している（全 61 件 / 未対応 4 件）</a:t>
             </a:r>
           </a:p>
           <a:p>
@@ -5843,13 +7367,13 @@
               </a:spcBef>
             </a:pPr>
             <a:r>
-              <a:rPr sz="1400" b="0">
+              <a:rPr sz="1300" b="0">
                 <a:solidFill>
                   <a:srgbClr val="5B636E"/>
                 </a:solidFill>
                 <a:latin typeface="Yu Gothic"/>
               </a:rPr>
-              <a:t>　　スマートフォンやタブレットで1ページずつ撮った写真にも対応（ページの並びを自動で判定）</a:t>
+              <a:t>　　症状・原因・直し方・確認方法をそれぞれに書いている</a:t>
             </a:r>
           </a:p>
           <a:p>
@@ -5859,13 +7383,13 @@
               </a:spcBef>
             </a:pPr>
             <a:r>
-              <a:rPr sz="1700" b="1">
+              <a:rPr sz="1600" b="1">
                 <a:solidFill>
                   <a:srgbClr val="1B1F24"/>
                 </a:solidFill>
                 <a:latin typeface="Yu Gothic"/>
               </a:rPr>
-              <a:t>・チェック欄 186 箇所は OCR を使わずに判定する</a:t>
+              <a:t>・WORKLOG.md（作業ログ）</a:t>
             </a:r>
           </a:p>
           <a:p>
@@ -5875,13 +7399,13 @@
               </a:spcBef>
             </a:pPr>
             <a:r>
-              <a:rPr sz="1400" b="0">
+              <a:rPr sz="1300" b="0">
                 <a:solidFill>
                   <a:srgbClr val="5B636E"/>
                 </a:solidFill>
                 <a:latin typeface="Yu Gothic"/>
               </a:rPr>
-              <a:t>　　白紙様式との差分で見るため、手書き・印刷・スキャンのいずれでも安定する</a:t>
+              <a:t>　　どのコミットでどのファイルを何行いじったか、指示への対応状況の対照表</a:t>
             </a:r>
           </a:p>
           <a:p>
@@ -5891,13 +7415,13 @@
               </a:spcBef>
             </a:pPr>
             <a:r>
-              <a:rPr sz="1700" b="1">
+              <a:rPr sz="1600" b="1">
                 <a:solidFill>
                   <a:srgbClr val="1B1F24"/>
                 </a:solidFill>
                 <a:latin typeface="Yu Gothic"/>
               </a:rPr>
-              <a:t>・読み違いを前提に、確信度を色で示して確認・編集できる</a:t>
+              <a:t>・DEVNOTES.md（開発メモ）</a:t>
             </a:r>
           </a:p>
           <a:p>
@@ -5907,13 +7431,13 @@
               </a:spcBef>
             </a:pPr>
             <a:r>
-              <a:rPr sz="1400" b="0">
+              <a:rPr sz="1300" b="0">
                 <a:solidFill>
                   <a:srgbClr val="5B636E"/>
                 </a:solidFill>
                 <a:latin typeface="Yu Gothic"/>
               </a:rPr>
-              <a:t>　　要確認だけを表示、元画像の該当箇所を拡大、クリックで対応する項目へ移動</a:t>
+              <a:t>　　設計の経緯、試して駄目だった方法、既知の限界</a:t>
             </a:r>
           </a:p>
           <a:p>
@@ -5923,13 +7447,13 @@
               </a:spcBef>
             </a:pPr>
             <a:r>
-              <a:rPr sz="1700" b="1">
+              <a:rPr sz="1600" b="1">
                 <a:solidFill>
                   <a:srgbClr val="1B1F24"/>
                 </a:solidFill>
                 <a:latin typeface="Yu Gothic"/>
               </a:rPr>
-              <a:t>・JSON と CSV で保存する</a:t>
+              <a:t>・docs/DEVELOPER.md（技術者向け）</a:t>
             </a:r>
           </a:p>
           <a:p>
@@ -5939,45 +7463,13 @@
               </a:spcBef>
             </a:pPr>
             <a:r>
-              <a:rPr sz="1400" b="0">
+              <a:rPr sz="1300" b="0">
                 <a:solidFill>
                   <a:srgbClr val="5B636E"/>
                 </a:solidFill>
                 <a:latin typeface="Yu Gothic"/>
               </a:rPr>
-              <a:t>　　西暦に直した日付など、機械学習で使いやすい形も別に出力する</a:t>
-            </a:r>
-          </a:p>
-          <a:p>
-            <a:pPr algn="l">
-              <a:spcBef>
-                <a:spcPts val="1000"/>
-              </a:spcBef>
-            </a:pPr>
-            <a:r>
-              <a:rPr sz="1700" b="1">
-                <a:solidFill>
-                  <a:srgbClr val="1B1F24"/>
-                </a:solidFill>
-                <a:latin typeface="Yu Gothic"/>
-              </a:rPr>
-              <a:t>・研究用の匿名化に対応する</a:t>
-            </a:r>
-          </a:p>
-          <a:p>
-            <a:pPr algn="l">
-              <a:spcBef>
-                <a:spcPts val="200"/>
-              </a:spcBef>
-            </a:pPr>
-            <a:r>
-              <a:rPr sz="1400" b="0">
-                <a:solidFill>
-                  <a:srgbClr val="5B636E"/>
-                </a:solidFill>
-                <a:latin typeface="Yu Gothic"/>
-              </a:rPr>
-              <a:t>　　氏名が白抜きなら「匿名化済み」、指定すれば住所・連絡先も「マスク済み」にする</a:t>
+              <a:t>　　構成、全コマンド、新しい様式の追加手順</a:t>
             </a:r>
           </a:p>
         </p:txBody>
@@ -6012,7 +7504,1394 @@
                 </a:solidFill>
                 <a:latin typeface="Yu Gothic"/>
               </a:rPr>
+              <a:t>主治医意見書 読み取り　|　18</a:t>
+            </a:r>
+          </a:p>
+        </p:txBody>
+      </p:sp>
+    </p:spTree>
+  </p:cSld>
+  <p:clrMapOvr>
+    <a:masterClrMapping/>
+  </p:clrMapOvr>
+</p:sld>
+</file>
+
+<file path=ppt/slides/slide19.xml><?xml version="1.0" encoding="utf-8"?>
+<p:sld xmlns:a="http://schemas.openxmlformats.org/drawingml/2006/main" xmlns:p="http://schemas.openxmlformats.org/presentationml/2006/main" xmlns:r="http://schemas.openxmlformats.org/officeDocument/2006/relationships">
+  <p:cSld>
+    <p:spTree>
+      <p:nvGrpSpPr>
+        <p:cNvPr id="1" name=""/>
+        <p:cNvGrpSpPr/>
+        <p:nvPr/>
+      </p:nvGrpSpPr>
+      <p:grpSpPr/>
+      <p:sp>
+        <p:nvSpPr>
+          <p:cNvPr id="2" name="TextBox 1"/>
+          <p:cNvSpPr txBox="1"/>
+          <p:nvPr/>
+        </p:nvSpPr>
+        <p:spPr>
+          <a:xfrm>
+            <a:off x="548640" y="384048"/>
+            <a:ext cx="11064240" cy="914400"/>
+          </a:xfrm>
+          <a:prstGeom prst="rect">
+            <a:avLst/>
+          </a:prstGeom>
+          <a:noFill/>
+        </p:spPr>
+        <p:txBody>
+          <a:bodyPr wrap="square">
+            <a:spAutoFit/>
+          </a:bodyPr>
+          <a:lstStyle/>
+          <a:p>
+            <a:pPr algn="l">
+              <a:spcBef>
+                <a:spcPts val="0"/>
+              </a:spcBef>
+            </a:pPr>
+            <a:r>
+              <a:rPr sz="3000" b="1">
+                <a:solidFill>
+                  <a:srgbClr val="1B1F24"/>
+                </a:solidFill>
+                <a:latin typeface="Yu Gothic"/>
+              </a:rPr>
+              <a:t>懸念事項（今わかっている弱点）</a:t>
+            </a:r>
+          </a:p>
+          <a:p>
+            <a:pPr algn="l">
+              <a:spcBef>
+                <a:spcPts val="400"/>
+              </a:spcBef>
+            </a:pPr>
+            <a:r>
+              <a:rPr sz="1400" b="0">
+                <a:solidFill>
+                  <a:srgbClr val="5B636E"/>
+                </a:solidFill>
+                <a:latin typeface="Yu Gothic"/>
+              </a:rPr>
+              <a:t>使う前に知っておいてほしいこと</a:t>
+            </a:r>
+          </a:p>
+        </p:txBody>
+      </p:sp>
+      <p:sp>
+        <p:nvSpPr>
+          <p:cNvPr id="3" name="Rectangle 2"/>
+          <p:cNvSpPr/>
+          <p:nvPr/>
+        </p:nvSpPr>
+        <p:spPr>
+          <a:xfrm>
+            <a:off x="548640" y="1389888"/>
+            <a:ext cx="11064240" cy="11430"/>
+          </a:xfrm>
+          <a:prstGeom prst="rect">
+            <a:avLst/>
+          </a:prstGeom>
+          <a:solidFill>
+            <a:srgbClr val="1E5AA8"/>
+          </a:solidFill>
+          <a:ln>
+            <a:noFill/>
+          </a:ln>
+          <a:effectLst/>
+        </p:spPr>
+        <p:style>
+          <a:lnRef idx="1">
+            <a:schemeClr val="accent1"/>
+          </a:lnRef>
+          <a:fillRef idx="3">
+            <a:schemeClr val="accent1"/>
+          </a:fillRef>
+          <a:effectRef idx="2">
+            <a:schemeClr val="accent1"/>
+          </a:effectRef>
+          <a:fontRef idx="minor">
+            <a:schemeClr val="lt1"/>
+          </a:fontRef>
+        </p:style>
+        <p:txBody>
+          <a:bodyPr rtlCol="0" anchor="ctr"/>
+          <a:lstStyle/>
+          <a:p>
+            <a:pPr algn="ctr"/>
+          </a:p>
+        </p:txBody>
+      </p:sp>
+      <p:graphicFrame>
+        <p:nvGraphicFramePr>
+          <p:cNvPr id="4" name="Table 3"/>
+          <p:cNvGraphicFramePr>
+            <a:graphicFrameLocks noGrp="1"/>
+          </p:cNvGraphicFramePr>
+          <p:nvPr/>
+        </p:nvGraphicFramePr>
+        <p:xfrm>
+          <a:off x="685800" y="1737360"/>
+          <a:ext cx="10789919" cy="2779776"/>
+        </p:xfrm>
+        <a:graphic>
+          <a:graphicData uri="http://schemas.openxmlformats.org/drawingml/2006/table">
+            <a:tbl>
+              <a:tblPr firstRow="1" bandRow="1">
+                <a:tableStyleId>{5C22544A-7EE6-4342-B048-85BDC9FD1C3A}</a:tableStyleId>
+              </a:tblPr>
+              <a:tblGrid>
+                <a:gridCol w="2560319"/>
+                <a:gridCol w="4389120"/>
+                <a:gridCol w="3840480"/>
+              </a:tblGrid>
+              <a:tr h="397110">
+                <a:tc>
+                  <a:txBody>
+                    <a:bodyPr/>
+                    <a:lstStyle/>
+                    <a:p>
+                      <a:r>
+                        <a:rPr sz="1200" b="1">
+                          <a:solidFill>
+                            <a:srgbClr val="FFFFFF"/>
+                          </a:solidFill>
+                          <a:latin typeface="Yu Gothic"/>
+                        </a:rPr>
+                        <a:t>懸念</a:t>
+                      </a:r>
+                    </a:p>
+                  </a:txBody>
+                  <a:tcPr marT="38100" marB="38100">
+                    <a:solidFill>
+                      <a:srgbClr val="1E5AA8"/>
+                    </a:solidFill>
+                  </a:tcPr>
+                </a:tc>
+                <a:tc>
+                  <a:txBody>
+                    <a:bodyPr/>
+                    <a:lstStyle/>
+                    <a:p>
+                      <a:r>
+                        <a:rPr sz="1200" b="1">
+                          <a:solidFill>
+                            <a:srgbClr val="FFFFFF"/>
+                          </a:solidFill>
+                          <a:latin typeface="Yu Gothic"/>
+                        </a:rPr>
+                        <a:t>中身</a:t>
+                      </a:r>
+                    </a:p>
+                  </a:txBody>
+                  <a:tcPr marT="38100" marB="38100">
+                    <a:solidFill>
+                      <a:srgbClr val="1E5AA8"/>
+                    </a:solidFill>
+                  </a:tcPr>
+                </a:tc>
+                <a:tc>
+                  <a:txBody>
+                    <a:bodyPr/>
+                    <a:lstStyle/>
+                    <a:p>
+                      <a:r>
+                        <a:rPr sz="1200" b="1">
+                          <a:solidFill>
+                            <a:srgbClr val="FFFFFF"/>
+                          </a:solidFill>
+                          <a:latin typeface="Yu Gothic"/>
+                        </a:rPr>
+                        <a:t>いま言えること</a:t>
+                      </a:r>
+                    </a:p>
+                  </a:txBody>
+                  <a:tcPr marT="38100" marB="38100">
+                    <a:solidFill>
+                      <a:srgbClr val="1E5AA8"/>
+                    </a:solidFill>
+                  </a:tcPr>
+                </a:tc>
+              </a:tr>
+              <a:tr h="397110">
+                <a:tc>
+                  <a:txBody>
+                    <a:bodyPr/>
+                    <a:lstStyle/>
+                    <a:p>
+                      <a:r>
+                        <a:rPr sz="1200" b="0">
+                          <a:solidFill>
+                            <a:srgbClr val="1B1F24"/>
+                          </a:solidFill>
+                          <a:latin typeface="Yu Gothic"/>
+                        </a:rPr>
+                        <a:t>読み取りは完全ではない</a:t>
+                      </a:r>
+                    </a:p>
+                  </a:txBody>
+                  <a:tcPr marT="38100" marB="38100">
+                    <a:solidFill>
+                      <a:srgbClr val="FFFFFF"/>
+                    </a:solidFill>
+                  </a:tcPr>
+                </a:tc>
+                <a:tc>
+                  <a:txBody>
+                    <a:bodyPr/>
+                    <a:lstStyle/>
+                    <a:p>
+                      <a:r>
+                        <a:rPr sz="1200" b="0">
+                          <a:solidFill>
+                            <a:srgbClr val="1B1F24"/>
+                          </a:solidFill>
+                          <a:latin typeface="Yu Gothic"/>
+                        </a:rPr>
+                        <a:t>チェック 99.08%（18,600枠中171件の誤り）、文字 88.4%</a:t>
+                      </a:r>
+                    </a:p>
+                  </a:txBody>
+                  <a:tcPr marT="38100" marB="38100">
+                    <a:solidFill>
+                      <a:srgbClr val="FFFFFF"/>
+                    </a:solidFill>
+                  </a:tcPr>
+                </a:tc>
+                <a:tc>
+                  <a:txBody>
+                    <a:bodyPr/>
+                    <a:lstStyle/>
+                    <a:p>
+                      <a:r>
+                        <a:rPr sz="1200" b="0">
+                          <a:solidFill>
+                            <a:srgbClr val="1B1F24"/>
+                          </a:solidFill>
+                          <a:latin typeface="Yu Gothic"/>
+                        </a:rPr>
+                        <a:t>必ず原本と照らして確認する運用が前提</a:t>
+                      </a:r>
+                    </a:p>
+                  </a:txBody>
+                  <a:tcPr marT="38100" marB="38100">
+                    <a:solidFill>
+                      <a:srgbClr val="FFFFFF"/>
+                    </a:solidFill>
+                  </a:tcPr>
+                </a:tc>
+              </a:tr>
+              <a:tr h="397110">
+                <a:tc>
+                  <a:txBody>
+                    <a:bodyPr/>
+                    <a:lstStyle/>
+                    <a:p>
+                      <a:r>
+                        <a:rPr sz="1200" b="0">
+                          <a:solidFill>
+                            <a:srgbClr val="1B1F24"/>
+                          </a:solidFill>
+                          <a:latin typeface="Yu Gothic"/>
+                        </a:rPr>
+                        <a:t>枠外にはみ出した印</a:t>
+                      </a:r>
+                    </a:p>
+                  </a:txBody>
+                  <a:tcPr marT="38100" marB="38100">
+                    <a:solidFill>
+                      <a:srgbClr val="F2F5F9"/>
+                    </a:solidFill>
+                  </a:tcPr>
+                </a:tc>
+                <a:tc>
+                  <a:txBody>
+                    <a:bodyPr/>
+                    <a:lstStyle/>
+                    <a:p>
+                      <a:r>
+                        <a:rPr sz="1200" b="0">
+                          <a:solidFill>
+                            <a:srgbClr val="1B1F24"/>
+                          </a:solidFill>
+                          <a:latin typeface="Yu Gothic"/>
+                        </a:rPr>
+                        <a:t>正解率45.6%。隣の手書きと見分けが付かない</a:t>
+                      </a:r>
+                    </a:p>
+                  </a:txBody>
+                  <a:tcPr marT="38100" marB="38100">
+                    <a:solidFill>
+                      <a:srgbClr val="F2F5F9"/>
+                    </a:solidFill>
+                  </a:tcPr>
+                </a:tc>
+                <a:tc>
+                  <a:txBody>
+                    <a:bodyPr/>
+                    <a:lstStyle/>
+                    <a:p>
+                      <a:r>
+                        <a:rPr sz="1200" b="0">
+                          <a:solidFill>
+                            <a:srgbClr val="1B1F24"/>
+                          </a:solidFill>
+                          <a:latin typeface="Yu Gothic"/>
+                        </a:rPr>
+                        <a:t>確認画面で人が直す</a:t>
+                      </a:r>
+                    </a:p>
+                  </a:txBody>
+                  <a:tcPr marT="38100" marB="38100">
+                    <a:solidFill>
+                      <a:srgbClr val="F2F5F9"/>
+                    </a:solidFill>
+                  </a:tcPr>
+                </a:tc>
+              </a:tr>
+              <a:tr h="397110">
+                <a:tc>
+                  <a:txBody>
+                    <a:bodyPr/>
+                    <a:lstStyle/>
+                    <a:p>
+                      <a:r>
+                        <a:rPr sz="1200" b="0">
+                          <a:solidFill>
+                            <a:srgbClr val="1B1F24"/>
+                          </a:solidFill>
+                          <a:latin typeface="Yu Gothic"/>
+                        </a:rPr>
+                        <a:t>汚れの多いスキャン</a:t>
+                      </a:r>
+                    </a:p>
+                  </a:txBody>
+                  <a:tcPr marT="38100" marB="38100">
+                    <a:solidFill>
+                      <a:srgbClr val="FFFFFF"/>
+                    </a:solidFill>
+                  </a:tcPr>
+                </a:tc>
+                <a:tc>
+                  <a:txBody>
+                    <a:bodyPr/>
+                    <a:lstStyle/>
+                    <a:p>
+                      <a:r>
+                        <a:rPr sz="1200" b="0">
+                          <a:solidFill>
+                            <a:srgbClr val="1B1F24"/>
+                          </a:solidFill>
+                          <a:latin typeface="Yu Gothic"/>
+                        </a:rPr>
+                        <a:t>誤検出117件のうち79件が3通に集中</a:t>
+                      </a:r>
+                    </a:p>
+                  </a:txBody>
+                  <a:tcPr marT="38100" marB="38100">
+                    <a:solidFill>
+                      <a:srgbClr val="FFFFFF"/>
+                    </a:solidFill>
+                  </a:tcPr>
+                </a:tc>
+                <a:tc>
+                  <a:txBody>
+                    <a:bodyPr/>
+                    <a:lstStyle/>
+                    <a:p>
+                      <a:r>
+                        <a:rPr sz="1200" b="0">
+                          <a:solidFill>
+                            <a:srgbClr val="1B1F24"/>
+                          </a:solidFill>
+                          <a:latin typeface="Yu Gothic"/>
+                        </a:rPr>
+                        <a:t>1通単位で見分ける仕組みが要る（未着手）</a:t>
+                      </a:r>
+                    </a:p>
+                  </a:txBody>
+                  <a:tcPr marT="38100" marB="38100">
+                    <a:solidFill>
+                      <a:srgbClr val="FFFFFF"/>
+                    </a:solidFill>
+                  </a:tcPr>
+                </a:tc>
+              </a:tr>
+              <a:tr h="397110">
+                <a:tc>
+                  <a:txBody>
+                    <a:bodyPr/>
+                    <a:lstStyle/>
+                    <a:p>
+                      <a:r>
+                        <a:rPr sz="1200" b="0">
+                          <a:solidFill>
+                            <a:srgbClr val="1B1F24"/>
+                          </a:solidFill>
+                          <a:latin typeface="Yu Gothic"/>
+                        </a:rPr>
+                        <a:t>解像度の低い入力</a:t>
+                      </a:r>
+                    </a:p>
+                  </a:txBody>
+                  <a:tcPr marT="38100" marB="38100">
+                    <a:solidFill>
+                      <a:srgbClr val="F2F5F9"/>
+                    </a:solidFill>
+                  </a:tcPr>
+                </a:tc>
+                <a:tc>
+                  <a:txBody>
+                    <a:bodyPr/>
+                    <a:lstStyle/>
+                    <a:p>
+                      <a:r>
+                        <a:rPr sz="1200" b="0">
+                          <a:solidFill>
+                            <a:srgbClr val="1B1F24"/>
+                          </a:solidFill>
+                          <a:latin typeface="Yu Gothic"/>
+                        </a:rPr>
+                        <a:t>75dpi 相当でも読めるが、年の精度は落ちる</a:t>
+                      </a:r>
+                    </a:p>
+                  </a:txBody>
+                  <a:tcPr marT="38100" marB="38100">
+                    <a:solidFill>
+                      <a:srgbClr val="F2F5F9"/>
+                    </a:solidFill>
+                  </a:tcPr>
+                </a:tc>
+                <a:tc>
+                  <a:txBody>
+                    <a:bodyPr/>
+                    <a:lstStyle/>
+                    <a:p>
+                      <a:r>
+                        <a:rPr sz="1200" b="0">
+                          <a:solidFill>
+                            <a:srgbClr val="1B1F24"/>
+                          </a:solidFill>
+                          <a:latin typeface="Yu Gothic"/>
+                        </a:rPr>
+                        <a:t>200dpi以上での取り込みを勧める</a:t>
+                      </a:r>
+                    </a:p>
+                  </a:txBody>
+                  <a:tcPr marT="38100" marB="38100">
+                    <a:solidFill>
+                      <a:srgbClr val="F2F5F9"/>
+                    </a:solidFill>
+                  </a:tcPr>
+                </a:tc>
+              </a:tr>
+              <a:tr h="397110">
+                <a:tc>
+                  <a:txBody>
+                    <a:bodyPr/>
+                    <a:lstStyle/>
+                    <a:p>
+                      <a:r>
+                        <a:rPr sz="1200" b="0">
+                          <a:solidFill>
+                            <a:srgbClr val="1B1F24"/>
+                          </a:solidFill>
+                          <a:latin typeface="Yu Gothic"/>
+                        </a:rPr>
+                        <a:t>正解データが1種類</a:t>
+                      </a:r>
+                    </a:p>
+                  </a:txBody>
+                  <a:tcPr marT="38100" marB="38100">
+                    <a:solidFill>
+                      <a:srgbClr val="FFFFFF"/>
+                    </a:solidFill>
+                  </a:tcPr>
+                </a:tc>
+                <a:tc>
+                  <a:txBody>
+                    <a:bodyPr/>
+                    <a:lstStyle/>
+                    <a:p>
+                      <a:r>
+                        <a:rPr sz="1200" b="0">
+                          <a:solidFill>
+                            <a:srgbClr val="1B1F24"/>
+                          </a:solidFill>
+                          <a:latin typeface="Yu Gothic"/>
+                        </a:rPr>
+                        <a:t>100通すべて同じ生成条件。実際の紙とは傾向が違う可能性</a:t>
+                      </a:r>
+                    </a:p>
+                  </a:txBody>
+                  <a:tcPr marT="38100" marB="38100">
+                    <a:solidFill>
+                      <a:srgbClr val="FFFFFF"/>
+                    </a:solidFill>
+                  </a:tcPr>
+                </a:tc>
+                <a:tc>
+                  <a:txBody>
+                    <a:bodyPr/>
+                    <a:lstStyle/>
+                    <a:p>
+                      <a:r>
+                        <a:rPr sz="1200" b="0">
+                          <a:solidFill>
+                            <a:srgbClr val="1B1F24"/>
+                          </a:solidFill>
+                          <a:latin typeface="Yu Gothic"/>
+                        </a:rPr>
+                        <a:t>実データでの検証が要る</a:t>
+                      </a:r>
+                    </a:p>
+                  </a:txBody>
+                  <a:tcPr marT="38100" marB="38100">
+                    <a:solidFill>
+                      <a:srgbClr val="FFFFFF"/>
+                    </a:solidFill>
+                  </a:tcPr>
+                </a:tc>
+              </a:tr>
+              <a:tr h="397116">
+                <a:tc>
+                  <a:txBody>
+                    <a:bodyPr/>
+                    <a:lstStyle/>
+                    <a:p>
+                      <a:r>
+                        <a:rPr sz="1200" b="0">
+                          <a:solidFill>
+                            <a:srgbClr val="1B1F24"/>
+                          </a:solidFill>
+                          <a:latin typeface="Yu Gothic"/>
+                        </a:rPr>
+                        <a:t>源内につなぐと前提が変わる</a:t>
+                      </a:r>
+                    </a:p>
+                  </a:txBody>
+                  <a:tcPr marT="38100" marB="38100">
+                    <a:solidFill>
+                      <a:srgbClr val="F2F5F9"/>
+                    </a:solidFill>
+                  </a:tcPr>
+                </a:tc>
+                <a:tc>
+                  <a:txBody>
+                    <a:bodyPr/>
+                    <a:lstStyle/>
+                    <a:p>
+                      <a:r>
+                        <a:rPr sz="1200" b="0">
+                          <a:solidFill>
+                            <a:srgbClr val="1B1F24"/>
+                          </a:solidFill>
+                          <a:latin typeface="Yu Gothic"/>
+                        </a:rPr>
+                        <a:t>患者情報が端末の外に出る</a:t>
+                      </a:r>
+                    </a:p>
+                  </a:txBody>
+                  <a:tcPr marT="38100" marB="38100">
+                    <a:solidFill>
+                      <a:srgbClr val="F2F5F9"/>
+                    </a:solidFill>
+                  </a:tcPr>
+                </a:tc>
+                <a:tc>
+                  <a:txBody>
+                    <a:bodyPr/>
+                    <a:lstStyle/>
+                    <a:p>
+                      <a:r>
+                        <a:rPr sz="1200" b="0">
+                          <a:solidFill>
+                            <a:srgbClr val="1B1F24"/>
+                          </a:solidFill>
+                          <a:latin typeface="Yu Gothic"/>
+                        </a:rPr>
+                        <a:t>既定は閉。運用の取り決めが先</a:t>
+                      </a:r>
+                    </a:p>
+                  </a:txBody>
+                  <a:tcPr marT="38100" marB="38100">
+                    <a:solidFill>
+                      <a:srgbClr val="F2F5F9"/>
+                    </a:solidFill>
+                  </a:tcPr>
+                </a:tc>
+              </a:tr>
+            </a:tbl>
+          </a:graphicData>
+        </a:graphic>
+      </p:graphicFrame>
+      <p:sp>
+        <p:nvSpPr>
+          <p:cNvPr id="5" name="TextBox 4"/>
+          <p:cNvSpPr txBox="1"/>
+          <p:nvPr/>
+        </p:nvSpPr>
+        <p:spPr>
+          <a:xfrm>
+            <a:off x="685800" y="5989320"/>
+            <a:ext cx="10881360" cy="548640"/>
+          </a:xfrm>
+          <a:prstGeom prst="rect">
+            <a:avLst/>
+          </a:prstGeom>
+          <a:noFill/>
+        </p:spPr>
+        <p:txBody>
+          <a:bodyPr wrap="square">
+            <a:spAutoFit/>
+          </a:bodyPr>
+          <a:lstStyle/>
+          <a:p>
+            <a:pPr algn="l">
+              <a:spcBef>
+                <a:spcPts val="0"/>
+              </a:spcBef>
+            </a:pPr>
+            <a:r>
+              <a:rPr sz="1200" b="0">
+                <a:solidFill>
+                  <a:srgbClr val="5B636E"/>
+                </a:solidFill>
+                <a:latin typeface="Yu Gothic"/>
+              </a:rPr>
+              <a:t>Masaru Sanuki, University of Tsukuba &amp; Department of Biomedical Informatics, University of Tsukuba Hospital</a:t>
+            </a:r>
+          </a:p>
+        </p:txBody>
+      </p:sp>
+      <p:sp>
+        <p:nvSpPr>
+          <p:cNvPr id="6" name="TextBox 5"/>
+          <p:cNvSpPr txBox="1"/>
+          <p:nvPr/>
+        </p:nvSpPr>
+        <p:spPr>
+          <a:xfrm>
+            <a:off x="548640" y="6355080"/>
+            <a:ext cx="11064240" cy="365760"/>
+          </a:xfrm>
+          <a:prstGeom prst="rect">
+            <a:avLst/>
+          </a:prstGeom>
+          <a:noFill/>
+        </p:spPr>
+        <p:txBody>
+          <a:bodyPr wrap="none">
+            <a:spAutoFit/>
+          </a:bodyPr>
+          <a:lstStyle/>
+          <a:p>
+            <a:pPr algn="r"/>
+            <a:r>
+              <a:rPr sz="1000">
+                <a:solidFill>
+                  <a:srgbClr val="5B636E"/>
+                </a:solidFill>
+                <a:latin typeface="Yu Gothic"/>
+              </a:rPr>
+              <a:t>主治医意見書 読み取り　|　19</a:t>
+            </a:r>
+          </a:p>
+        </p:txBody>
+      </p:sp>
+    </p:spTree>
+  </p:cSld>
+  <p:clrMapOvr>
+    <a:masterClrMapping/>
+  </p:clrMapOvr>
+</p:sld>
+</file>
+
+<file path=ppt/slides/slide2.xml><?xml version="1.0" encoding="utf-8"?>
+<p:sld xmlns:a="http://schemas.openxmlformats.org/drawingml/2006/main" xmlns:p="http://schemas.openxmlformats.org/presentationml/2006/main" xmlns:r="http://schemas.openxmlformats.org/officeDocument/2006/relationships">
+  <p:cSld>
+    <p:spTree>
+      <p:nvGrpSpPr>
+        <p:cNvPr id="1" name=""/>
+        <p:cNvGrpSpPr/>
+        <p:nvPr/>
+      </p:nvGrpSpPr>
+      <p:grpSpPr/>
+      <p:sp>
+        <p:nvSpPr>
+          <p:cNvPr id="2" name="TextBox 1"/>
+          <p:cNvSpPr txBox="1"/>
+          <p:nvPr/>
+        </p:nvSpPr>
+        <p:spPr>
+          <a:xfrm>
+            <a:off x="548640" y="384048"/>
+            <a:ext cx="11064240" cy="914400"/>
+          </a:xfrm>
+          <a:prstGeom prst="rect">
+            <a:avLst/>
+          </a:prstGeom>
+          <a:noFill/>
+        </p:spPr>
+        <p:txBody>
+          <a:bodyPr wrap="square">
+            <a:spAutoFit/>
+          </a:bodyPr>
+          <a:lstStyle/>
+          <a:p>
+            <a:pPr algn="l">
+              <a:spcBef>
+                <a:spcPts val="0"/>
+              </a:spcBef>
+            </a:pPr>
+            <a:r>
+              <a:rPr sz="3000" b="1">
+                <a:solidFill>
+                  <a:srgbClr val="1B1F24"/>
+                </a:solidFill>
+                <a:latin typeface="Yu Gothic"/>
+              </a:rPr>
+              <a:t>できること</a:t>
+            </a:r>
+          </a:p>
+          <a:p>
+            <a:pPr algn="l">
+              <a:spcBef>
+                <a:spcPts val="400"/>
+              </a:spcBef>
+            </a:pPr>
+            <a:r>
+              <a:rPr sz="1400" b="0">
+                <a:solidFill>
+                  <a:srgbClr val="5B636E"/>
+                </a:solidFill>
+                <a:latin typeface="Yu Gothic"/>
+              </a:rPr>
+              <a:t>読み取り → 確認・編集 → 保存</a:t>
+            </a:r>
+          </a:p>
+        </p:txBody>
+      </p:sp>
+      <p:sp>
+        <p:nvSpPr>
+          <p:cNvPr id="3" name="Rectangle 2"/>
+          <p:cNvSpPr/>
+          <p:nvPr/>
+        </p:nvSpPr>
+        <p:spPr>
+          <a:xfrm>
+            <a:off x="548640" y="1389888"/>
+            <a:ext cx="11064240" cy="11430"/>
+          </a:xfrm>
+          <a:prstGeom prst="rect">
+            <a:avLst/>
+          </a:prstGeom>
+          <a:solidFill>
+            <a:srgbClr val="1E5AA8"/>
+          </a:solidFill>
+          <a:ln>
+            <a:noFill/>
+          </a:ln>
+          <a:effectLst/>
+        </p:spPr>
+        <p:style>
+          <a:lnRef idx="1">
+            <a:schemeClr val="accent1"/>
+          </a:lnRef>
+          <a:fillRef idx="3">
+            <a:schemeClr val="accent1"/>
+          </a:fillRef>
+          <a:effectRef idx="2">
+            <a:schemeClr val="accent1"/>
+          </a:effectRef>
+          <a:fontRef idx="minor">
+            <a:schemeClr val="lt1"/>
+          </a:fontRef>
+        </p:style>
+        <p:txBody>
+          <a:bodyPr rtlCol="0" anchor="ctr"/>
+          <a:lstStyle/>
+          <a:p>
+            <a:pPr algn="ctr"/>
+          </a:p>
+        </p:txBody>
+      </p:sp>
+      <p:sp>
+        <p:nvSpPr>
+          <p:cNvPr id="4" name="TextBox 3"/>
+          <p:cNvSpPr txBox="1"/>
+          <p:nvPr/>
+        </p:nvSpPr>
+        <p:spPr>
+          <a:xfrm>
+            <a:off x="685800" y="1691640"/>
+            <a:ext cx="10881360" cy="4572000"/>
+          </a:xfrm>
+          <a:prstGeom prst="rect">
+            <a:avLst/>
+          </a:prstGeom>
+          <a:noFill/>
+        </p:spPr>
+        <p:txBody>
+          <a:bodyPr wrap="square">
+            <a:spAutoFit/>
+          </a:bodyPr>
+          <a:lstStyle/>
+          <a:p>
+            <a:pPr algn="l">
+              <a:spcBef>
+                <a:spcPts val="1000"/>
+              </a:spcBef>
+            </a:pPr>
+            <a:r>
+              <a:rPr sz="1700" b="1">
+                <a:solidFill>
+                  <a:srgbClr val="1B1F24"/>
+                </a:solidFill>
+                <a:latin typeface="Yu Gothic"/>
+              </a:rPr>
+              <a:t>・2ページのPDF・画像を、1件でも複数件でも読み取る</a:t>
+            </a:r>
+          </a:p>
+          <a:p>
+            <a:pPr algn="l">
+              <a:spcBef>
+                <a:spcPts val="200"/>
+              </a:spcBef>
+            </a:pPr>
+            <a:r>
+              <a:rPr sz="1400" b="0">
+                <a:solidFill>
+                  <a:srgbClr val="5B636E"/>
+                </a:solidFill>
+                <a:latin typeface="Yu Gothic"/>
+              </a:rPr>
+              <a:t>　　スマートフォンやタブレットで1ページずつ撮った写真にも対応（ページの並びを自動で判定）</a:t>
+            </a:r>
+          </a:p>
+          <a:p>
+            <a:pPr algn="l">
+              <a:spcBef>
+                <a:spcPts val="1000"/>
+              </a:spcBef>
+            </a:pPr>
+            <a:r>
+              <a:rPr sz="1700" b="1">
+                <a:solidFill>
+                  <a:srgbClr val="1B1F24"/>
+                </a:solidFill>
+                <a:latin typeface="Yu Gothic"/>
+              </a:rPr>
+              <a:t>・チェック欄 186 箇所は OCR を使わずに判定する</a:t>
+            </a:r>
+          </a:p>
+          <a:p>
+            <a:pPr algn="l">
+              <a:spcBef>
+                <a:spcPts val="200"/>
+              </a:spcBef>
+            </a:pPr>
+            <a:r>
+              <a:rPr sz="1400" b="0">
+                <a:solidFill>
+                  <a:srgbClr val="5B636E"/>
+                </a:solidFill>
+                <a:latin typeface="Yu Gothic"/>
+              </a:rPr>
+              <a:t>　　白紙様式との差分で見るため、手書き・印刷・スキャンのいずれでも安定する</a:t>
+            </a:r>
+          </a:p>
+          <a:p>
+            <a:pPr algn="l">
+              <a:spcBef>
+                <a:spcPts val="1000"/>
+              </a:spcBef>
+            </a:pPr>
+            <a:r>
+              <a:rPr sz="1700" b="1">
+                <a:solidFill>
+                  <a:srgbClr val="1B1F24"/>
+                </a:solidFill>
+                <a:latin typeface="Yu Gothic"/>
+              </a:rPr>
+              <a:t>・読み違いを前提に、確信度を色で示して確認・編集できる</a:t>
+            </a:r>
+          </a:p>
+          <a:p>
+            <a:pPr algn="l">
+              <a:spcBef>
+                <a:spcPts val="200"/>
+              </a:spcBef>
+            </a:pPr>
+            <a:r>
+              <a:rPr sz="1400" b="0">
+                <a:solidFill>
+                  <a:srgbClr val="5B636E"/>
+                </a:solidFill>
+                <a:latin typeface="Yu Gothic"/>
+              </a:rPr>
+              <a:t>　　要確認だけを表示、元画像の該当箇所を拡大、クリックで対応する項目へ移動</a:t>
+            </a:r>
+          </a:p>
+          <a:p>
+            <a:pPr algn="l">
+              <a:spcBef>
+                <a:spcPts val="1000"/>
+              </a:spcBef>
+            </a:pPr>
+            <a:r>
+              <a:rPr sz="1700" b="1">
+                <a:solidFill>
+                  <a:srgbClr val="1B1F24"/>
+                </a:solidFill>
+                <a:latin typeface="Yu Gothic"/>
+              </a:rPr>
+              <a:t>・JSON と CSV で保存する</a:t>
+            </a:r>
+          </a:p>
+          <a:p>
+            <a:pPr algn="l">
+              <a:spcBef>
+                <a:spcPts val="200"/>
+              </a:spcBef>
+            </a:pPr>
+            <a:r>
+              <a:rPr sz="1400" b="0">
+                <a:solidFill>
+                  <a:srgbClr val="5B636E"/>
+                </a:solidFill>
+                <a:latin typeface="Yu Gothic"/>
+              </a:rPr>
+              <a:t>　　西暦に直した日付など、機械学習で使いやすい形も別に出力する</a:t>
+            </a:r>
+          </a:p>
+          <a:p>
+            <a:pPr algn="l">
+              <a:spcBef>
+                <a:spcPts val="1000"/>
+              </a:spcBef>
+            </a:pPr>
+            <a:r>
+              <a:rPr sz="1700" b="1">
+                <a:solidFill>
+                  <a:srgbClr val="1B1F24"/>
+                </a:solidFill>
+                <a:latin typeface="Yu Gothic"/>
+              </a:rPr>
+              <a:t>・研究用の匿名化に対応する</a:t>
+            </a:r>
+          </a:p>
+          <a:p>
+            <a:pPr algn="l">
+              <a:spcBef>
+                <a:spcPts val="200"/>
+              </a:spcBef>
+            </a:pPr>
+            <a:r>
+              <a:rPr sz="1400" b="0">
+                <a:solidFill>
+                  <a:srgbClr val="5B636E"/>
+                </a:solidFill>
+                <a:latin typeface="Yu Gothic"/>
+              </a:rPr>
+              <a:t>　　氏名が白抜きなら「匿名化済み」、指定すれば住所・連絡先も「マスク済み」にする</a:t>
+            </a:r>
+          </a:p>
+        </p:txBody>
+      </p:sp>
+      <p:sp>
+        <p:nvSpPr>
+          <p:cNvPr id="5" name="TextBox 4"/>
+          <p:cNvSpPr txBox="1"/>
+          <p:nvPr/>
+        </p:nvSpPr>
+        <p:spPr>
+          <a:xfrm>
+            <a:off x="548640" y="6355080"/>
+            <a:ext cx="11064240" cy="365760"/>
+          </a:xfrm>
+          <a:prstGeom prst="rect">
+            <a:avLst/>
+          </a:prstGeom>
+          <a:noFill/>
+        </p:spPr>
+        <p:txBody>
+          <a:bodyPr wrap="none">
+            <a:spAutoFit/>
+          </a:bodyPr>
+          <a:lstStyle/>
+          <a:p>
+            <a:pPr algn="r"/>
+            <a:r>
+              <a:rPr sz="1000">
+                <a:solidFill>
+                  <a:srgbClr val="5B636E"/>
+                </a:solidFill>
+                <a:latin typeface="Yu Gothic"/>
+              </a:rPr>
               <a:t>主治医意見書 読み取り　|　2</a:t>
+            </a:r>
+          </a:p>
+        </p:txBody>
+      </p:sp>
+    </p:spTree>
+  </p:cSld>
+  <p:clrMapOvr>
+    <a:masterClrMapping/>
+  </p:clrMapOvr>
+</p:sld>
+</file>
+
+<file path=ppt/slides/slide20.xml><?xml version="1.0" encoding="utf-8"?>
+<p:sld xmlns:a="http://schemas.openxmlformats.org/drawingml/2006/main" xmlns:p="http://schemas.openxmlformats.org/presentationml/2006/main" xmlns:r="http://schemas.openxmlformats.org/officeDocument/2006/relationships">
+  <p:cSld>
+    <p:spTree>
+      <p:nvGrpSpPr>
+        <p:cNvPr id="1" name=""/>
+        <p:cNvGrpSpPr/>
+        <p:nvPr/>
+      </p:nvGrpSpPr>
+      <p:grpSpPr/>
+      <p:sp>
+        <p:nvSpPr>
+          <p:cNvPr id="2" name="TextBox 1"/>
+          <p:cNvSpPr txBox="1"/>
+          <p:nvPr/>
+        </p:nvSpPr>
+        <p:spPr>
+          <a:xfrm>
+            <a:off x="548640" y="384048"/>
+            <a:ext cx="11064240" cy="914400"/>
+          </a:xfrm>
+          <a:prstGeom prst="rect">
+            <a:avLst/>
+          </a:prstGeom>
+          <a:noFill/>
+        </p:spPr>
+        <p:txBody>
+          <a:bodyPr wrap="square">
+            <a:spAutoFit/>
+          </a:bodyPr>
+          <a:lstStyle/>
+          <a:p>
+            <a:pPr algn="l">
+              <a:spcBef>
+                <a:spcPts val="0"/>
+              </a:spcBef>
+            </a:pPr>
+            <a:r>
+              <a:rPr sz="3000" b="1">
+                <a:solidFill>
+                  <a:srgbClr val="1B1F24"/>
+                </a:solidFill>
+                <a:latin typeface="Yu Gothic"/>
+              </a:rPr>
+              <a:t>これから</a:t>
+            </a:r>
+          </a:p>
+        </p:txBody>
+      </p:sp>
+      <p:sp>
+        <p:nvSpPr>
+          <p:cNvPr id="3" name="Rectangle 2"/>
+          <p:cNvSpPr/>
+          <p:nvPr/>
+        </p:nvSpPr>
+        <p:spPr>
+          <a:xfrm>
+            <a:off x="548640" y="1389888"/>
+            <a:ext cx="11064240" cy="11430"/>
+          </a:xfrm>
+          <a:prstGeom prst="rect">
+            <a:avLst/>
+          </a:prstGeom>
+          <a:solidFill>
+            <a:srgbClr val="1E5AA8"/>
+          </a:solidFill>
+          <a:ln>
+            <a:noFill/>
+          </a:ln>
+          <a:effectLst/>
+        </p:spPr>
+        <p:style>
+          <a:lnRef idx="1">
+            <a:schemeClr val="accent1"/>
+          </a:lnRef>
+          <a:fillRef idx="3">
+            <a:schemeClr val="accent1"/>
+          </a:fillRef>
+          <a:effectRef idx="2">
+            <a:schemeClr val="accent1"/>
+          </a:effectRef>
+          <a:fontRef idx="minor">
+            <a:schemeClr val="lt1"/>
+          </a:fontRef>
+        </p:style>
+        <p:txBody>
+          <a:bodyPr rtlCol="0" anchor="ctr"/>
+          <a:lstStyle/>
+          <a:p>
+            <a:pPr algn="ctr"/>
+          </a:p>
+        </p:txBody>
+      </p:sp>
+      <p:sp>
+        <p:nvSpPr>
+          <p:cNvPr id="4" name="TextBox 3"/>
+          <p:cNvSpPr txBox="1"/>
+          <p:nvPr/>
+        </p:nvSpPr>
+        <p:spPr>
+          <a:xfrm>
+            <a:off x="685800" y="1691640"/>
+            <a:ext cx="10881360" cy="4572000"/>
+          </a:xfrm>
+          <a:prstGeom prst="rect">
+            <a:avLst/>
+          </a:prstGeom>
+          <a:noFill/>
+        </p:spPr>
+        <p:txBody>
+          <a:bodyPr wrap="square">
+            <a:spAutoFit/>
+          </a:bodyPr>
+          <a:lstStyle/>
+          <a:p>
+            <a:pPr algn="l">
+              <a:spcBef>
+                <a:spcPts val="1000"/>
+              </a:spcBef>
+            </a:pPr>
+            <a:r>
+              <a:rPr sz="1600" b="1">
+                <a:solidFill>
+                  <a:srgbClr val="1B1F24"/>
+                </a:solidFill>
+                <a:latin typeface="Yu Gothic"/>
+              </a:rPr>
+              <a:t>・汚れの多い紙を1通単位で見分けて、しきい値を上げる</a:t>
+            </a:r>
+          </a:p>
+          <a:p>
+            <a:pPr algn="l">
+              <a:spcBef>
+                <a:spcPts val="200"/>
+              </a:spcBef>
+            </a:pPr>
+            <a:r>
+              <a:rPr sz="1300" b="0">
+                <a:solidFill>
+                  <a:srgbClr val="5B636E"/>
+                </a:solidFill>
+                <a:latin typeface="Yu Gothic"/>
+              </a:rPr>
+              <a:t>　　誤検出の3分の2がここに集中している</a:t>
+            </a:r>
+          </a:p>
+          <a:p>
+            <a:pPr algn="l">
+              <a:spcBef>
+                <a:spcPts val="1000"/>
+              </a:spcBef>
+            </a:pPr>
+            <a:r>
+              <a:rPr sz="1600" b="1">
+                <a:solidFill>
+                  <a:srgbClr val="1B1F24"/>
+                </a:solidFill>
+                <a:latin typeface="Yu Gothic"/>
+              </a:rPr>
+              <a:t>・枠外にはみ出した印を拾う</a:t>
+            </a:r>
+          </a:p>
+          <a:p>
+            <a:pPr algn="l">
+              <a:spcBef>
+                <a:spcPts val="200"/>
+              </a:spcBef>
+            </a:pPr>
+            <a:r>
+              <a:rPr sz="1300" b="0">
+                <a:solidFill>
+                  <a:srgbClr val="5B636E"/>
+                </a:solidFill>
+                <a:latin typeface="Yu Gothic"/>
+              </a:rPr>
+              <a:t>　　いまは45.6%</a:t>
+            </a:r>
+          </a:p>
+          <a:p>
+            <a:pPr algn="l">
+              <a:spcBef>
+                <a:spcPts val="1000"/>
+              </a:spcBef>
+            </a:pPr>
+            <a:r>
+              <a:rPr sz="1600" b="1">
+                <a:solidFill>
+                  <a:srgbClr val="1B1F24"/>
+                </a:solidFill>
+                <a:latin typeface="Yu Gothic"/>
+              </a:rPr>
+              <a:t>・実データでの検証</a:t>
+            </a:r>
+          </a:p>
+          <a:p>
+            <a:pPr algn="l">
+              <a:spcBef>
+                <a:spcPts val="200"/>
+              </a:spcBef>
+            </a:pPr>
+            <a:r>
+              <a:rPr sz="1300" b="0">
+                <a:solidFill>
+                  <a:srgbClr val="5B636E"/>
+                </a:solidFill>
+                <a:latin typeface="Yu Gothic"/>
+              </a:rPr>
+              <a:t>　　正解データは生成物なので、実際の紙で確かめる必要がある</a:t>
+            </a:r>
+          </a:p>
+          <a:p>
+            <a:pPr algn="l">
+              <a:spcBef>
+                <a:spcPts val="1000"/>
+              </a:spcBef>
+            </a:pPr>
+            <a:r>
+              <a:rPr sz="1600" b="1">
+                <a:solidFill>
+                  <a:srgbClr val="1B1F24"/>
+                </a:solidFill>
+                <a:latin typeface="Yu Gothic"/>
+              </a:rPr>
+              <a:t>・単一HTMLファイル版でのテキストOCR</a:t>
+            </a:r>
+          </a:p>
+          <a:p>
+            <a:pPr algn="l">
+              <a:spcBef>
+                <a:spcPts val="200"/>
+              </a:spcBef>
+            </a:pPr>
+            <a:r>
+              <a:rPr sz="1300" b="0">
+                <a:solidFill>
+                  <a:srgbClr val="5B636E"/>
+                </a:solidFill>
+                <a:latin typeface="Yu Gothic"/>
+              </a:rPr>
+              <a:t>　　ブラウザの制約があり、方法を検討中</a:t>
+            </a:r>
+          </a:p>
+          <a:p>
+            <a:pPr algn="l">
+              <a:spcBef>
+                <a:spcPts val="1000"/>
+              </a:spcBef>
+            </a:pPr>
+            <a:r>
+              <a:rPr sz="1600" b="1">
+                <a:solidFill>
+                  <a:srgbClr val="1B1F24"/>
+                </a:solidFill>
+                <a:latin typeface="Yu Gothic"/>
+              </a:rPr>
+              <a:t>・様式が変わったときの追従</a:t>
+            </a:r>
+          </a:p>
+          <a:p>
+            <a:pPr algn="l">
+              <a:spcBef>
+                <a:spcPts val="200"/>
+              </a:spcBef>
+            </a:pPr>
+            <a:r>
+              <a:rPr sz="1300" b="0">
+                <a:solidFill>
+                  <a:srgbClr val="5B636E"/>
+                </a:solidFill>
+                <a:latin typeface="Yu Gothic"/>
+              </a:rPr>
+              <a:t>　　テンプレートも、チェック欄の言葉も管理画面から直せる</a:t>
+            </a:r>
+          </a:p>
+        </p:txBody>
+      </p:sp>
+      <p:sp>
+        <p:nvSpPr>
+          <p:cNvPr id="5" name="TextBox 4"/>
+          <p:cNvSpPr txBox="1"/>
+          <p:nvPr/>
+        </p:nvSpPr>
+        <p:spPr>
+          <a:xfrm>
+            <a:off x="685800" y="5760720"/>
+            <a:ext cx="10881360" cy="548640"/>
+          </a:xfrm>
+          <a:prstGeom prst="rect">
+            <a:avLst/>
+          </a:prstGeom>
+          <a:noFill/>
+        </p:spPr>
+        <p:txBody>
+          <a:bodyPr wrap="square">
+            <a:spAutoFit/>
+          </a:bodyPr>
+          <a:lstStyle/>
+          <a:p>
+            <a:pPr algn="l">
+              <a:spcBef>
+                <a:spcPts val="0"/>
+              </a:spcBef>
+            </a:pPr>
+            <a:r>
+              <a:rPr sz="1200" b="0">
+                <a:solidFill>
+                  <a:srgbClr val="5B636E"/>
+                </a:solidFill>
+                <a:latin typeface="Yu Gothic"/>
+              </a:rPr>
+              <a:t>Masaru Sanuki, University of Tsukuba &amp; Department of Biomedical Informatics, University of Tsukuba Hospital</a:t>
+            </a:r>
+          </a:p>
+        </p:txBody>
+      </p:sp>
+      <p:sp>
+        <p:nvSpPr>
+          <p:cNvPr id="6" name="TextBox 5"/>
+          <p:cNvSpPr txBox="1"/>
+          <p:nvPr/>
+        </p:nvSpPr>
+        <p:spPr>
+          <a:xfrm>
+            <a:off x="548640" y="6355080"/>
+            <a:ext cx="11064240" cy="365760"/>
+          </a:xfrm>
+          <a:prstGeom prst="rect">
+            <a:avLst/>
+          </a:prstGeom>
+          <a:noFill/>
+        </p:spPr>
+        <p:txBody>
+          <a:bodyPr wrap="none">
+            <a:spAutoFit/>
+          </a:bodyPr>
+          <a:lstStyle/>
+          <a:p>
+            <a:pPr algn="r"/>
+            <a:r>
+              <a:rPr sz="1000">
+                <a:solidFill>
+                  <a:srgbClr val="5B636E"/>
+                </a:solidFill>
+                <a:latin typeface="Yu Gothic"/>
+              </a:rPr>
+              <a:t>主治医意見書 読み取り　|　20</a:t>
             </a:r>
           </a:p>
         </p:txBody>
@@ -6852,7 +9731,7 @@
                 </a:solidFill>
                 <a:latin typeface="Yu Gothic"/>
               </a:rPr>
-              <a:t>ベンチマーク① チェック欄の判定（250検体）</a:t>
+              <a:t>ベンチマーク① チェック欄の判定（正解データ100通・18,600枠）</a:t>
             </a:r>
           </a:p>
           <a:p>
@@ -6868,7 +9747,7 @@
                 </a:solidFill>
                 <a:latin typeface="Yu Gothic"/>
               </a:rPr>
-              <a:t>必ず記入される単一選択18項目で測定。OCR は使わない</a:t>
+              <a:t>頂いた正解データで測定。印の種類13通り＋二重線で訂正47件を含む</a:t>
             </a:r>
           </a:p>
         </p:txBody>
@@ -6927,7 +9806,7 @@
         </p:nvGraphicFramePr>
         <p:xfrm>
           <a:off x="685800" y="1874519"/>
-          <a:ext cx="8595360" cy="1243584"/>
+          <a:ext cx="9692640" cy="1243584"/>
         </p:xfrm>
         <a:graphic>
           <a:graphicData uri="http://schemas.openxmlformats.org/drawingml/2006/table">
@@ -6936,10 +9815,11 @@
                 <a:tableStyleId>{5C22544A-7EE6-4342-B048-85BDC9FD1C3A}</a:tableStyleId>
               </a:tblPr>
               <a:tblGrid>
-                <a:gridCol w="3438144"/>
-                <a:gridCol w="1719072"/>
-                <a:gridCol w="1719072"/>
-                <a:gridCol w="1719072"/>
+                <a:gridCol w="2377440"/>
+                <a:gridCol w="1828800"/>
+                <a:gridCol w="1828800"/>
+                <a:gridCol w="1828800"/>
+                <a:gridCol w="1828800"/>
               </a:tblGrid>
               <a:tr h="414528">
                 <a:tc>
@@ -6954,7 +9834,7 @@
                           </a:solidFill>
                           <a:latin typeface="Yu Gothic"/>
                         </a:rPr>
-                        <a:t>様式</a:t>
+                        <a:t/>
                       </a:r>
                     </a:p>
                   </a:txBody>
@@ -6976,7 +9856,7 @@
                           </a:solidFill>
                           <a:latin typeface="Yu Gothic"/>
                         </a:rPr>
-                        <a:t>件数</a:t>
+                        <a:t>正解率</a:t>
                       </a:r>
                     </a:p>
                   </a:txBody>
@@ -6998,7 +9878,7 @@
                           </a:solidFill>
                           <a:latin typeface="Yu Gothic"/>
                         </a:rPr>
-                        <a:t>検出率</a:t>
+                        <a:t>見落とし</a:t>
                       </a:r>
                     </a:p>
                   </a:txBody>
@@ -7020,7 +9900,29 @@
                           </a:solidFill>
                           <a:latin typeface="Yu Gothic"/>
                         </a:rPr>
-                        <a:t>確信度「高」</a:t>
+                        <a:t>誤検出</a:t>
+                      </a:r>
+                    </a:p>
+                  </a:txBody>
+                  <a:tcPr marT="38100" marB="38100">
+                    <a:solidFill>
+                      <a:srgbClr val="1E5AA8"/>
+                    </a:solidFill>
+                  </a:tcPr>
+                </a:tc>
+                <a:tc>
+                  <a:txBody>
+                    <a:bodyPr/>
+                    <a:lstStyle/>
+                    <a:p>
+                      <a:r>
+                        <a:rPr sz="1600" b="1">
+                          <a:solidFill>
+                            <a:srgbClr val="FFFFFF"/>
+                          </a:solidFill>
+                          <a:latin typeface="Yu Gothic"/>
+                        </a:rPr>
+                        <a:t>二重線を消せた</a:t>
                       </a:r>
                     </a:p>
                   </a:txBody>
@@ -7044,7 +9946,7 @@
                           </a:solidFill>
                           <a:latin typeface="Yu Gothic"/>
                         </a:rPr>
-                        <a:t>official_v1（公式様式）</a:t>
+                        <a:t>作り直す前</a:t>
                       </a:r>
                     </a:p>
                   </a:txBody>
@@ -7066,7 +9968,7 @@
                           </a:solidFill>
                           <a:latin typeface="Yu Gothic"/>
                         </a:rPr>
-                        <a:t>106</a:t>
+                        <a:t>95.47 %</a:t>
                       </a:r>
                     </a:p>
                   </a:txBody>
@@ -7084,11 +9986,11 @@
                       <a:r>
                         <a:rPr sz="1600" b="0">
                           <a:solidFill>
-                            <a:srgbClr val="1A7F4B"/>
-                          </a:solidFill>
-                          <a:latin typeface="Yu Gothic"/>
-                        </a:rPr>
-                        <a:t>99.6 %</a:t>
+                            <a:srgbClr val="1B1F24"/>
+                          </a:solidFill>
+                          <a:latin typeface="Yu Gothic"/>
+                        </a:rPr>
+                        <a:t>11</a:t>
                       </a:r>
                     </a:p>
                   </a:txBody>
@@ -7106,11 +10008,33 @@
                       <a:r>
                         <a:rPr sz="1600" b="0">
                           <a:solidFill>
-                            <a:srgbClr val="1A7F4B"/>
-                          </a:solidFill>
-                          <a:latin typeface="Yu Gothic"/>
-                        </a:rPr>
-                        <a:t>91.7 %</a:t>
+                            <a:srgbClr val="1B1F24"/>
+                          </a:solidFill>
+                          <a:latin typeface="Yu Gothic"/>
+                        </a:rPr>
+                        <a:t>785</a:t>
+                      </a:r>
+                    </a:p>
+                  </a:txBody>
+                  <a:tcPr marT="38100" marB="38100">
+                    <a:solidFill>
+                      <a:srgbClr val="FFFFFF"/>
+                    </a:solidFill>
+                  </a:tcPr>
+                </a:tc>
+                <a:tc>
+                  <a:txBody>
+                    <a:bodyPr/>
+                    <a:lstStyle/>
+                    <a:p>
+                      <a:r>
+                        <a:rPr sz="1600" b="0">
+                          <a:solidFill>
+                            <a:srgbClr val="1B1F24"/>
+                          </a:solidFill>
+                          <a:latin typeface="Yu Gothic"/>
+                        </a:rPr>
+                        <a:t>0 / 47</a:t>
                       </a:r>
                     </a:p>
                   </a:txBody>
@@ -7134,7 +10058,7 @@
                           </a:solidFill>
                           <a:latin typeface="Yu Gothic"/>
                         </a:rPr>
-                        <a:t>sample_v1（別レイアウト）</a:t>
+                        <a:t>いま</a:t>
                       </a:r>
                     </a:p>
                   </a:txBody>
@@ -7152,11 +10076,11 @@
                       <a:r>
                         <a:rPr sz="1600" b="0">
                           <a:solidFill>
-                            <a:srgbClr val="1B1F24"/>
-                          </a:solidFill>
-                          <a:latin typeface="Yu Gothic"/>
-                        </a:rPr>
-                        <a:t>144</a:t>
+                            <a:srgbClr val="1A7F4B"/>
+                          </a:solidFill>
+                          <a:latin typeface="Yu Gothic"/>
+                        </a:rPr>
+                        <a:t>99.08 %</a:t>
                       </a:r>
                     </a:p>
                   </a:txBody>
@@ -7178,7 +10102,7 @@
                           </a:solidFill>
                           <a:latin typeface="Yu Gothic"/>
                         </a:rPr>
-                        <a:t>99.1 %</a:t>
+                        <a:t>46</a:t>
                       </a:r>
                     </a:p>
                   </a:txBody>
@@ -7200,7 +10124,29 @@
                           </a:solidFill>
                           <a:latin typeface="Yu Gothic"/>
                         </a:rPr>
-                        <a:t>94.6 %</a:t>
+                        <a:t>117</a:t>
+                      </a:r>
+                    </a:p>
+                  </a:txBody>
+                  <a:tcPr marT="38100" marB="38100">
+                    <a:solidFill>
+                      <a:srgbClr val="F2F5F9"/>
+                    </a:solidFill>
+                  </a:tcPr>
+                </a:tc>
+                <a:tc>
+                  <a:txBody>
+                    <a:bodyPr/>
+                    <a:lstStyle/>
+                    <a:p>
+                      <a:r>
+                        <a:rPr sz="1600" b="0">
+                          <a:solidFill>
+                            <a:srgbClr val="1A7F4B"/>
+                          </a:solidFill>
+                          <a:latin typeface="Yu Gothic"/>
+                        </a:rPr>
+                        <a:t>39 / 47</a:t>
                       </a:r>
                     </a:p>
                   </a:txBody>
@@ -7243,13 +10189,29 @@
               </a:spcBef>
             </a:pPr>
             <a:r>
-              <a:rPr sz="1600" b="1">
+              <a:rPr sz="1500" b="1">
                 <a:solidFill>
                   <a:srgbClr val="1B1F24"/>
                 </a:solidFill>
                 <a:latin typeface="Yu Gothic"/>
               </a:rPr>
-              <a:t>・様式の判別失敗は 0 件</a:t>
+              <a:t>・誤検出785件は、すべて枠の中にインクが無かった</a:t>
+            </a:r>
+          </a:p>
+          <a:p>
+            <a:pPr algn="l">
+              <a:spcBef>
+                <a:spcPts val="200"/>
+              </a:spcBef>
+            </a:pPr>
+            <a:r>
+              <a:rPr sz="1200" b="0">
+                <a:solidFill>
+                  <a:srgbClr val="5B636E"/>
+                </a:solidFill>
+                <a:latin typeface="Yu Gothic"/>
+              </a:rPr>
+              <a:t>　　差分を「枠＋周囲45%」の1つの窓で測っていたため、隣の欄の手書きを拾っていた</a:t>
             </a:r>
           </a:p>
           <a:p>
@@ -7259,13 +10221,29 @@
               </a:spcBef>
             </a:pPr>
             <a:r>
-              <a:rPr sz="1600" b="1">
+              <a:rPr sz="1500" b="1">
                 <a:solidFill>
                   <a:srgbClr val="1B1F24"/>
                 </a:solidFill>
                 <a:latin typeface="Yu Gothic"/>
               </a:rPr>
-              <a:t>・チェック欄は OCR 不要のため、手書きでも精度が落ちない</a:t>
+              <a:t>・書き方ごとに見る場所を分けた</a:t>
+            </a:r>
+          </a:p>
+          <a:p>
+            <a:pPr algn="l">
+              <a:spcBef>
+                <a:spcPts val="200"/>
+              </a:spcBef>
+            </a:pPr>
+            <a:r>
+              <a:rPr sz="1200" b="0">
+                <a:solidFill>
+                  <a:srgbClr val="5B636E"/>
+                </a:solidFill>
+                <a:latin typeface="Yu Gothic"/>
+              </a:rPr>
+              <a:t>　　枠の内側 / 枠の外周（丸囲み）/ 枠の右下（はみ出し）。外周は左右の偏りで隣の字と見分ける</a:t>
             </a:r>
           </a:p>
           <a:p>
@@ -7275,13 +10253,45 @@
               </a:spcBef>
             </a:pPr>
             <a:r>
-              <a:rPr sz="1600" b="1">
+              <a:rPr sz="1500" b="1">
                 <a:solidFill>
                   <a:srgbClr val="1B1F24"/>
                 </a:solidFill>
                 <a:latin typeface="Yu Gothic"/>
               </a:rPr>
-              <a:t>・この 250 検体は、変更のたびに流して退行が無いことを確認している</a:t>
+              <a:t>・二重線で消した印は、元画像から長い横線を取り出して見つける</a:t>
+            </a:r>
+          </a:p>
+          <a:p>
+            <a:pPr algn="l">
+              <a:spcBef>
+                <a:spcPts val="200"/>
+              </a:spcBef>
+            </a:pPr>
+            <a:r>
+              <a:rPr sz="1200" b="0">
+                <a:solidFill>
+                  <a:srgbClr val="5B636E"/>
+                </a:solidFill>
+                <a:latin typeface="Yu Gothic"/>
+              </a:rPr>
+              <a:t>　　差分では線が途切れる。白紙にもある罫線を引き、枠を左右に突き抜ける線だけを数える</a:t>
+            </a:r>
+          </a:p>
+          <a:p>
+            <a:pPr algn="l">
+              <a:spcBef>
+                <a:spcPts val="1000"/>
+              </a:spcBef>
+            </a:pPr>
+            <a:r>
+              <a:rPr sz="1500" b="1">
+                <a:solidFill>
+                  <a:srgbClr val="1B1F24"/>
+                </a:solidFill>
+                <a:latin typeface="Yu Gothic"/>
+              </a:rPr>
+              <a:t>・ブラウザ版と558枠を突き合わせ、判定のずれ0を確認</a:t>
             </a:r>
           </a:p>
         </p:txBody>
@@ -8163,6 +11173,45 @@
         </p:nvSpPr>
         <p:spPr>
           <a:xfrm>
+            <a:off x="685800" y="5806440"/>
+            <a:ext cx="10881360" cy="548640"/>
+          </a:xfrm>
+          <a:prstGeom prst="rect">
+            <a:avLst/>
+          </a:prstGeom>
+          <a:noFill/>
+        </p:spPr>
+        <p:txBody>
+          <a:bodyPr wrap="square">
+            <a:spAutoFit/>
+          </a:bodyPr>
+          <a:lstStyle/>
+          <a:p>
+            <a:pPr algn="l">
+              <a:spcBef>
+                <a:spcPts val="0"/>
+              </a:spcBef>
+            </a:pPr>
+            <a:r>
+              <a:rPr sz="1300" b="0">
+                <a:solidFill>
+                  <a:srgbClr val="5B636E"/>
+                </a:solidFill>
+                <a:latin typeface="Yu Gothic"/>
+              </a:rPr>
+              <a:t>この表は2検体72項目での比較。正解データ100通での実測は次ページ。</a:t>
+            </a:r>
+          </a:p>
+        </p:txBody>
+      </p:sp>
+      <p:sp>
+        <p:nvSpPr>
+          <p:cNvPr id="7" name="TextBox 6"/>
+          <p:cNvSpPr txBox="1"/>
+          <p:nvPr/>
+        </p:nvSpPr>
+        <p:spPr>
+          <a:xfrm>
             <a:off x="548640" y="6355080"/>
             <a:ext cx="11064240" cy="365760"/>
           </a:xfrm>
@@ -8242,7 +11291,7 @@
                 </a:solidFill>
                 <a:latin typeface="Yu Gothic"/>
               </a:rPr>
-              <a:t>ベンチマーク③ LLMモデルの比較</a:t>
+              <a:t>ベンチマーク②b 正解データ100通で文字欄を測る</a:t>
             </a:r>
           </a:p>
           <a:p>
@@ -8258,7 +11307,7 @@
                 </a:solidFill>
                 <a:latin typeface="Yu Gothic"/>
               </a:rPr>
-              <a:t>16問（うち4問は「候補を出してはいけない」問題）／ CPU のみ</a:t>
+              <a:t>まとめた正解率では見えない外し方を、欄ごと・部分ごとに切り分けた</a:t>
             </a:r>
           </a:p>
         </p:txBody>
@@ -8317,7 +11366,7 @@
         </p:nvGraphicFramePr>
         <p:xfrm>
           <a:off x="685800" y="1783080"/>
-          <a:ext cx="10789918" cy="2011680"/>
+          <a:ext cx="10789920" cy="2395728"/>
         </p:xfrm>
         <a:graphic>
           <a:graphicData uri="http://schemas.openxmlformats.org/drawingml/2006/table">
@@ -8326,26 +11375,25 @@
                 <a:tableStyleId>{5C22544A-7EE6-4342-B048-85BDC9FD1C3A}</a:tableStyleId>
               </a:tblPr>
               <a:tblGrid>
-                <a:gridCol w="4068330"/>
-                <a:gridCol w="1415071"/>
-                <a:gridCol w="1415071"/>
-                <a:gridCol w="2122607"/>
-                <a:gridCol w="1768839"/>
+                <a:gridCol w="2194560"/>
+                <a:gridCol w="1371600"/>
+                <a:gridCol w="1371600"/>
+                <a:gridCol w="5852160"/>
               </a:tblGrid>
-              <a:tr h="402336">
-                <a:tc>
-                  <a:txBody>
-                    <a:bodyPr/>
-                    <a:lstStyle/>
-                    <a:p>
-                      <a:r>
-                        <a:rPr sz="1350" b="1">
+              <a:tr h="399288">
+                <a:tc>
+                  <a:txBody>
+                    <a:bodyPr/>
+                    <a:lstStyle/>
+                    <a:p>
+                      <a:r>
+                        <a:rPr sz="1300" b="1">
                           <a:solidFill>
                             <a:srgbClr val="FFFFFF"/>
                           </a:solidFill>
                           <a:latin typeface="Yu Gothic"/>
                         </a:rPr>
-                        <a:t>モデル</a:t>
+                        <a:t>欄</a:t>
                       </a:r>
                     </a:p>
                   </a:txBody>
@@ -8361,13 +11409,13 @@
                     <a:lstStyle/>
                     <a:p>
                       <a:r>
-                        <a:rPr sz="1350" b="1">
+                        <a:rPr sz="1300" b="1">
                           <a:solidFill>
                             <a:srgbClr val="FFFFFF"/>
                           </a:solidFill>
                           <a:latin typeface="Yu Gothic"/>
                         </a:rPr>
-                        <a:t>サイズ</a:t>
+                        <a:t>作業前</a:t>
                       </a:r>
                     </a:p>
                   </a:txBody>
@@ -8383,13 +11431,13 @@
                     <a:lstStyle/>
                     <a:p>
                       <a:r>
-                        <a:rPr sz="1350" b="1">
+                        <a:rPr sz="1300" b="1">
                           <a:solidFill>
                             <a:srgbClr val="FFFFFF"/>
                           </a:solidFill>
                           <a:latin typeface="Yu Gothic"/>
                         </a:rPr>
-                        <a:t>正答</a:t>
+                        <a:t>いま</a:t>
                       </a:r>
                     </a:p>
                   </a:txBody>
@@ -8405,13 +11453,13 @@
                     <a:lstStyle/>
                     <a:p>
                       <a:r>
-                        <a:rPr sz="1350" b="1">
+                        <a:rPr sz="1300" b="1">
                           <a:solidFill>
                             <a:srgbClr val="FFFFFF"/>
                           </a:solidFill>
                           <a:latin typeface="Yu Gothic"/>
                         </a:rPr>
-                        <a:t>安全（作り出さない）</a:t>
+                        <a:t>何が起きていたか</a:t>
                       </a:r>
                     </a:p>
                   </a:txBody>
@@ -8421,43 +11469,21 @@
                     </a:solidFill>
                   </a:tcPr>
                 </a:tc>
-                <a:tc>
-                  <a:txBody>
-                    <a:bodyPr/>
-                    <a:lstStyle/>
-                    <a:p>
-                      <a:r>
-                        <a:rPr sz="1350" b="1">
-                          <a:solidFill>
-                            <a:srgbClr val="FFFFFF"/>
-                          </a:solidFill>
-                          <a:latin typeface="Yu Gothic"/>
-                        </a:rPr>
-                        <a:t>1件あたり</a:t>
-                      </a:r>
-                    </a:p>
-                  </a:txBody>
-                  <a:tcPr marT="38100" marB="38100">
-                    <a:solidFill>
-                      <a:srgbClr val="1E5AA8"/>
-                    </a:solidFill>
-                  </a:tcPr>
-                </a:tc>
               </a:tr>
-              <a:tr h="402336">
-                <a:tc>
-                  <a:txBody>
-                    <a:bodyPr/>
-                    <a:lstStyle/>
-                    <a:p>
-                      <a:r>
-                        <a:rPr sz="1350" b="0">
-                          <a:solidFill>
-                            <a:srgbClr val="1B1F24"/>
-                          </a:solidFill>
-                          <a:latin typeface="Yu Gothic"/>
-                        </a:rPr>
-                        <a:t>辞書のみ（LLM不使用）</a:t>
+              <a:tr h="399288">
+                <a:tc>
+                  <a:txBody>
+                    <a:bodyPr/>
+                    <a:lstStyle/>
+                    <a:p>
+                      <a:r>
+                        <a:rPr sz="1300" b="0">
+                          <a:solidFill>
+                            <a:srgbClr val="1B1F24"/>
+                          </a:solidFill>
+                          <a:latin typeface="Yu Gothic"/>
+                        </a:rPr>
+                        <a:t>ふりがな</a:t>
                       </a:r>
                     </a:p>
                   </a:txBody>
@@ -8473,13 +11499,13 @@
                     <a:lstStyle/>
                     <a:p>
                       <a:r>
-                        <a:rPr sz="1350" b="0">
-                          <a:solidFill>
-                            <a:srgbClr val="1B1F24"/>
-                          </a:solidFill>
-                          <a:latin typeface="Yu Gothic"/>
-                        </a:rPr>
-                        <a:t>—</a:t>
+                        <a:rPr sz="1300" b="0">
+                          <a:solidFill>
+                            <a:srgbClr val="1B1F24"/>
+                          </a:solidFill>
+                          <a:latin typeface="Yu Gothic"/>
+                        </a:rPr>
+                        <a:t>0.00 %</a:t>
                       </a:r>
                     </a:p>
                   </a:txBody>
@@ -8495,13 +11521,13 @@
                     <a:lstStyle/>
                     <a:p>
                       <a:r>
-                        <a:rPr sz="1350" b="0">
-                          <a:solidFill>
-                            <a:srgbClr val="1B1F24"/>
-                          </a:solidFill>
-                          <a:latin typeface="Yu Gothic"/>
-                        </a:rPr>
-                        <a:t>9/12</a:t>
+                        <a:rPr sz="1300" b="0">
+                          <a:solidFill>
+                            <a:srgbClr val="1A7F4B"/>
+                          </a:solidFill>
+                          <a:latin typeface="Yu Gothic"/>
+                        </a:rPr>
+                        <a:t>78.1 %</a:t>
                       </a:r>
                     </a:p>
                   </a:txBody>
@@ -8517,13 +11543,13 @@
                     <a:lstStyle/>
                     <a:p>
                       <a:r>
-                        <a:rPr sz="1350" b="0">
-                          <a:solidFill>
-                            <a:srgbClr val="1B1F24"/>
-                          </a:solidFill>
-                          <a:latin typeface="Yu Gothic"/>
-                        </a:rPr>
-                        <a:t>4/4</a:t>
+                        <a:rPr sz="1300" b="0">
+                          <a:solidFill>
+                            <a:srgbClr val="1B1F24"/>
+                          </a:solidFill>
+                          <a:latin typeface="Yu Gothic"/>
+                        </a:rPr>
+                        <a:t>文字種の指定がカタカナだけで、ひらがなを全部捨てていた</a:t>
                       </a:r>
                     </a:p>
                   </a:txBody>
@@ -8533,19 +11559,111 @@
                     </a:solidFill>
                   </a:tcPr>
                 </a:tc>
-                <a:tc>
-                  <a:txBody>
-                    <a:bodyPr/>
-                    <a:lstStyle/>
-                    <a:p>
-                      <a:r>
-                        <a:rPr sz="1350" b="0">
-                          <a:solidFill>
-                            <a:srgbClr val="1B1F24"/>
-                          </a:solidFill>
-                          <a:latin typeface="Yu Gothic"/>
-                        </a:rPr>
-                        <a:t>即時</a:t>
+              </a:tr>
+              <a:tr h="399288">
+                <a:tc>
+                  <a:txBody>
+                    <a:bodyPr/>
+                    <a:lstStyle/>
+                    <a:p>
+                      <a:r>
+                        <a:rPr sz="1300" b="0">
+                          <a:solidFill>
+                            <a:srgbClr val="1B1F24"/>
+                          </a:solidFill>
+                          <a:latin typeface="Yu Gothic"/>
+                        </a:rPr>
+                        <a:t>留意事項（その他）</a:t>
+                      </a:r>
+                    </a:p>
+                  </a:txBody>
+                  <a:tcPr marT="38100" marB="38100">
+                    <a:solidFill>
+                      <a:srgbClr val="F2F5F9"/>
+                    </a:solidFill>
+                  </a:tcPr>
+                </a:tc>
+                <a:tc>
+                  <a:txBody>
+                    <a:bodyPr/>
+                    <a:lstStyle/>
+                    <a:p>
+                      <a:r>
+                        <a:rPr sz="1300" b="0">
+                          <a:solidFill>
+                            <a:srgbClr val="1B1F24"/>
+                          </a:solidFill>
+                          <a:latin typeface="Yu Gothic"/>
+                        </a:rPr>
+                        <a:t>46.4 %</a:t>
+                      </a:r>
+                    </a:p>
+                  </a:txBody>
+                  <a:tcPr marT="38100" marB="38100">
+                    <a:solidFill>
+                      <a:srgbClr val="F2F5F9"/>
+                    </a:solidFill>
+                  </a:tcPr>
+                </a:tc>
+                <a:tc>
+                  <a:txBody>
+                    <a:bodyPr/>
+                    <a:lstStyle/>
+                    <a:p>
+                      <a:r>
+                        <a:rPr sz="1300" b="0">
+                          <a:solidFill>
+                            <a:srgbClr val="1A7F4B"/>
+                          </a:solidFill>
+                          <a:latin typeface="Yu Gothic"/>
+                        </a:rPr>
+                        <a:t>88.7 %</a:t>
+                      </a:r>
+                    </a:p>
+                  </a:txBody>
+                  <a:tcPr marT="38100" marB="38100">
+                    <a:solidFill>
+                      <a:srgbClr val="F2F5F9"/>
+                    </a:solidFill>
+                  </a:tcPr>
+                </a:tc>
+                <a:tc>
+                  <a:txBody>
+                    <a:bodyPr/>
+                    <a:lstStyle/>
+                    <a:p>
+                      <a:r>
+                        <a:rPr sz="1300" b="0">
+                          <a:solidFill>
+                            <a:srgbClr val="1B1F24"/>
+                          </a:solidFill>
+                          <a:latin typeface="Yu Gothic"/>
+                        </a:rPr>
+                        <a:t>欄の文字の位置検出が落ちると何も読めていなかった</a:t>
+                      </a:r>
+                    </a:p>
+                  </a:txBody>
+                  <a:tcPr marT="38100" marB="38100">
+                    <a:solidFill>
+                      <a:srgbClr val="F2F5F9"/>
+                    </a:solidFill>
+                  </a:tcPr>
+                </a:tc>
+              </a:tr>
+              <a:tr h="399288">
+                <a:tc>
+                  <a:txBody>
+                    <a:bodyPr/>
+                    <a:lstStyle/>
+                    <a:p>
+                      <a:r>
+                        <a:rPr sz="1300" b="0">
+                          <a:solidFill>
+                            <a:srgbClr val="1B1F24"/>
+                          </a:solidFill>
+                          <a:latin typeface="Yu Gothic"/>
+                        </a:rPr>
+                        <a:t>体重</a:t>
                       </a:r>
                     </a:p>
                   </a:txBody>
@@ -8555,21 +11673,87 @@
                     </a:solidFill>
                   </a:tcPr>
                 </a:tc>
+                <a:tc>
+                  <a:txBody>
+                    <a:bodyPr/>
+                    <a:lstStyle/>
+                    <a:p>
+                      <a:r>
+                        <a:rPr sz="1300" b="0">
+                          <a:solidFill>
+                            <a:srgbClr val="1B1F24"/>
+                          </a:solidFill>
+                          <a:latin typeface="Yu Gothic"/>
+                        </a:rPr>
+                        <a:t>70.8 %</a:t>
+                      </a:r>
+                    </a:p>
+                  </a:txBody>
+                  <a:tcPr marT="38100" marB="38100">
+                    <a:solidFill>
+                      <a:srgbClr val="FFFFFF"/>
+                    </a:solidFill>
+                  </a:tcPr>
+                </a:tc>
+                <a:tc>
+                  <a:txBody>
+                    <a:bodyPr/>
+                    <a:lstStyle/>
+                    <a:p>
+                      <a:r>
+                        <a:rPr sz="1300" b="0">
+                          <a:solidFill>
+                            <a:srgbClr val="1A7F4B"/>
+                          </a:solidFill>
+                          <a:latin typeface="Yu Gothic"/>
+                        </a:rPr>
+                        <a:t>83.3 %</a:t>
+                      </a:r>
+                    </a:p>
+                  </a:txBody>
+                  <a:tcPr marT="38100" marB="38100">
+                    <a:solidFill>
+                      <a:srgbClr val="FFFFFF"/>
+                    </a:solidFill>
+                  </a:tcPr>
+                </a:tc>
+                <a:tc>
+                  <a:txBody>
+                    <a:bodyPr/>
+                    <a:lstStyle/>
+                    <a:p>
+                      <a:r>
+                        <a:rPr sz="1300" b="0">
+                          <a:solidFill>
+                            <a:srgbClr val="1B1F24"/>
+                          </a:solidFill>
+                          <a:latin typeface="Yu Gothic"/>
+                        </a:rPr>
+                        <a:t>手書きの小さな小数点を読み落とす（430→43.0 と範囲で判断）</a:t>
+                      </a:r>
+                    </a:p>
+                  </a:txBody>
+                  <a:tcPr marT="38100" marB="38100">
+                    <a:solidFill>
+                      <a:srgbClr val="FFFFFF"/>
+                    </a:solidFill>
+                  </a:tcPr>
+                </a:tc>
               </a:tr>
-              <a:tr h="402336">
-                <a:tc>
-                  <a:txBody>
-                    <a:bodyPr/>
-                    <a:lstStyle/>
-                    <a:p>
-                      <a:r>
-                        <a:rPr sz="1350" b="0">
-                          <a:solidFill>
-                            <a:srgbClr val="1B1F24"/>
-                          </a:solidFill>
-                          <a:latin typeface="Yu Gothic"/>
-                        </a:rPr>
-                        <a:t>Qwen3-4B-Instruct-2507-Q4_K_M.gguf</a:t>
+              <a:tr h="399288">
+                <a:tc>
+                  <a:txBody>
+                    <a:bodyPr/>
+                    <a:lstStyle/>
+                    <a:p>
+                      <a:r>
+                        <a:rPr sz="1300" b="0">
+                          <a:solidFill>
+                            <a:srgbClr val="1B1F24"/>
+                          </a:solidFill>
+                          <a:latin typeface="Yu Gothic"/>
+                        </a:rPr>
+                        <a:t>連絡先</a:t>
                       </a:r>
                     </a:p>
                   </a:txBody>
@@ -8585,13 +11769,13 @@
                     <a:lstStyle/>
                     <a:p>
                       <a:r>
-                        <a:rPr sz="1350" b="0">
-                          <a:solidFill>
-                            <a:srgbClr val="1B1F24"/>
-                          </a:solidFill>
-                          <a:latin typeface="Yu Gothic"/>
-                        </a:rPr>
-                        <a:t>2.3 GB</a:t>
+                        <a:rPr sz="1300" b="0">
+                          <a:solidFill>
+                            <a:srgbClr val="1B1F24"/>
+                          </a:solidFill>
+                          <a:latin typeface="Yu Gothic"/>
+                        </a:rPr>
+                        <a:t>80.1 %</a:t>
                       </a:r>
                     </a:p>
                   </a:txBody>
@@ -8607,13 +11791,13 @@
                     <a:lstStyle/>
                     <a:p>
                       <a:r>
-                        <a:rPr sz="1350" b="0">
-                          <a:solidFill>
-                            <a:srgbClr val="1B1F24"/>
-                          </a:solidFill>
-                          <a:latin typeface="Yu Gothic"/>
-                        </a:rPr>
-                        <a:t>11/12</a:t>
+                        <a:rPr sz="1300" b="0">
+                          <a:solidFill>
+                            <a:srgbClr val="1A7F4B"/>
+                          </a:solidFill>
+                          <a:latin typeface="Yu Gothic"/>
+                        </a:rPr>
+                        <a:t>86.5 %</a:t>
                       </a:r>
                     </a:p>
                   </a:txBody>
@@ -8629,13 +11813,13 @@
                     <a:lstStyle/>
                     <a:p>
                       <a:r>
-                        <a:rPr sz="1350" b="0">
-                          <a:solidFill>
-                            <a:srgbClr val="1B1F24"/>
-                          </a:solidFill>
-                          <a:latin typeface="Yu Gothic"/>
-                        </a:rPr>
-                        <a:t>4/4</a:t>
+                        <a:rPr sz="1300" b="0">
+                          <a:solidFill>
+                            <a:srgbClr val="1B1F24"/>
+                          </a:solidFill>
+                          <a:latin typeface="Yu Gothic"/>
+                        </a:rPr>
+                        <a:t>同上（位置検出の取りこぼし）</a:t>
                       </a:r>
                     </a:p>
                   </a:txBody>
@@ -8645,43 +11829,21 @@
                     </a:solidFill>
                   </a:tcPr>
                 </a:tc>
-                <a:tc>
-                  <a:txBody>
-                    <a:bodyPr/>
-                    <a:lstStyle/>
-                    <a:p>
-                      <a:r>
-                        <a:rPr sz="1350" b="0">
-                          <a:solidFill>
-                            <a:srgbClr val="1B1F24"/>
-                          </a:solidFill>
-                          <a:latin typeface="Yu Gothic"/>
-                        </a:rPr>
-                        <a:t>1.30 秒</a:t>
-                      </a:r>
-                    </a:p>
-                  </a:txBody>
-                  <a:tcPr marT="38100" marB="38100">
-                    <a:solidFill>
-                      <a:srgbClr val="F2F5F9"/>
-                    </a:solidFill>
-                  </a:tcPr>
-                </a:tc>
               </a:tr>
-              <a:tr h="402336">
-                <a:tc>
-                  <a:txBody>
-                    <a:bodyPr/>
-                    <a:lstStyle/>
-                    <a:p>
-                      <a:r>
-                        <a:rPr sz="1350" b="0">
-                          <a:solidFill>
-                            <a:srgbClr val="1B1F24"/>
-                          </a:solidFill>
-                          <a:latin typeface="Yu Gothic"/>
-                        </a:rPr>
-                        <a:t>qwen2.5-1.5b-instruct-q4_k_m.gguf</a:t>
+              <a:tr h="399288">
+                <a:tc>
+                  <a:txBody>
+                    <a:bodyPr/>
+                    <a:lstStyle/>
+                    <a:p>
+                      <a:r>
+                        <a:rPr sz="1300" b="0">
+                          <a:solidFill>
+                            <a:srgbClr val="1B1F24"/>
+                          </a:solidFill>
+                          <a:latin typeface="Yu Gothic"/>
+                        </a:rPr>
+                        <a:t>文字全体</a:t>
                       </a:r>
                     </a:p>
                   </a:txBody>
@@ -8697,13 +11859,13 @@
                     <a:lstStyle/>
                     <a:p>
                       <a:r>
-                        <a:rPr sz="1350" b="0">
-                          <a:solidFill>
-                            <a:srgbClr val="1B1F24"/>
-                          </a:solidFill>
-                          <a:latin typeface="Yu Gothic"/>
-                        </a:rPr>
-                        <a:t>1.0 GB</a:t>
+                        <a:rPr sz="1300" b="0">
+                          <a:solidFill>
+                            <a:srgbClr val="1B1F24"/>
+                          </a:solidFill>
+                          <a:latin typeface="Yu Gothic"/>
+                        </a:rPr>
+                        <a:t>84.3 %</a:t>
                       </a:r>
                     </a:p>
                   </a:txBody>
@@ -8719,13 +11881,13 @@
                     <a:lstStyle/>
                     <a:p>
                       <a:r>
-                        <a:rPr sz="1350" b="0">
-                          <a:solidFill>
-                            <a:srgbClr val="1B1F24"/>
-                          </a:solidFill>
-                          <a:latin typeface="Yu Gothic"/>
-                        </a:rPr>
-                        <a:t>10/12</a:t>
+                        <a:rPr sz="1300" b="0">
+                          <a:solidFill>
+                            <a:srgbClr val="1A7F4B"/>
+                          </a:solidFill>
+                          <a:latin typeface="Yu Gothic"/>
+                        </a:rPr>
+                        <a:t>88.4 %</a:t>
                       </a:r>
                     </a:p>
                   </a:txBody>
@@ -8741,153 +11903,19 @@
                     <a:lstStyle/>
                     <a:p>
                       <a:r>
-                        <a:rPr sz="1350" b="0">
-                          <a:solidFill>
-                            <a:srgbClr val="1B1F24"/>
-                          </a:solidFill>
-                          <a:latin typeface="Yu Gothic"/>
-                        </a:rPr>
-                        <a:t>4/4</a:t>
+                        <a:rPr sz="1300" b="0">
+                          <a:solidFill>
+                            <a:srgbClr val="1B1F24"/>
+                          </a:solidFill>
+                          <a:latin typeface="Yu Gothic"/>
+                        </a:rPr>
+                        <a:t/>
                       </a:r>
                     </a:p>
                   </a:txBody>
                   <a:tcPr marT="38100" marB="38100">
                     <a:solidFill>
                       <a:srgbClr val="FFFFFF"/>
-                    </a:solidFill>
-                  </a:tcPr>
-                </a:tc>
-                <a:tc>
-                  <a:txBody>
-                    <a:bodyPr/>
-                    <a:lstStyle/>
-                    <a:p>
-                      <a:r>
-                        <a:rPr sz="1350" b="0">
-                          <a:solidFill>
-                            <a:srgbClr val="1B1F24"/>
-                          </a:solidFill>
-                          <a:latin typeface="Yu Gothic"/>
-                        </a:rPr>
-                        <a:t>0.50 秒</a:t>
-                      </a:r>
-                    </a:p>
-                  </a:txBody>
-                  <a:tcPr marT="38100" marB="38100">
-                    <a:solidFill>
-                      <a:srgbClr val="FFFFFF"/>
-                    </a:solidFill>
-                  </a:tcPr>
-                </a:tc>
-              </a:tr>
-              <a:tr h="402336">
-                <a:tc>
-                  <a:txBody>
-                    <a:bodyPr/>
-                    <a:lstStyle/>
-                    <a:p>
-                      <a:r>
-                        <a:rPr sz="1350" b="0">
-                          <a:solidFill>
-                            <a:srgbClr val="1B1F24"/>
-                          </a:solidFill>
-                          <a:latin typeface="Yu Gothic"/>
-                        </a:rPr>
-                        <a:t>qwen2.5-3b-instruct-q4_k_m.gguf</a:t>
-                      </a:r>
-                    </a:p>
-                  </a:txBody>
-                  <a:tcPr marT="38100" marB="38100">
-                    <a:solidFill>
-                      <a:srgbClr val="F2F5F9"/>
-                    </a:solidFill>
-                  </a:tcPr>
-                </a:tc>
-                <a:tc>
-                  <a:txBody>
-                    <a:bodyPr/>
-                    <a:lstStyle/>
-                    <a:p>
-                      <a:r>
-                        <a:rPr sz="1350" b="0">
-                          <a:solidFill>
-                            <a:srgbClr val="1B1F24"/>
-                          </a:solidFill>
-                          <a:latin typeface="Yu Gothic"/>
-                        </a:rPr>
-                        <a:t>2.0 GB</a:t>
-                      </a:r>
-                    </a:p>
-                  </a:txBody>
-                  <a:tcPr marT="38100" marB="38100">
-                    <a:solidFill>
-                      <a:srgbClr val="F2F5F9"/>
-                    </a:solidFill>
-                  </a:tcPr>
-                </a:tc>
-                <a:tc>
-                  <a:txBody>
-                    <a:bodyPr/>
-                    <a:lstStyle/>
-                    <a:p>
-                      <a:r>
-                        <a:rPr sz="1350" b="0">
-                          <a:solidFill>
-                            <a:srgbClr val="1B1F24"/>
-                          </a:solidFill>
-                          <a:latin typeface="Yu Gothic"/>
-                        </a:rPr>
-                        <a:t>10/12</a:t>
-                      </a:r>
-                    </a:p>
-                  </a:txBody>
-                  <a:tcPr marT="38100" marB="38100">
-                    <a:solidFill>
-                      <a:srgbClr val="F2F5F9"/>
-                    </a:solidFill>
-                  </a:tcPr>
-                </a:tc>
-                <a:tc>
-                  <a:txBody>
-                    <a:bodyPr/>
-                    <a:lstStyle/>
-                    <a:p>
-                      <a:r>
-                        <a:rPr sz="1350" b="0">
-                          <a:solidFill>
-                            <a:srgbClr val="1B1F24"/>
-                          </a:solidFill>
-                          <a:latin typeface="Yu Gothic"/>
-                        </a:rPr>
-                        <a:t>4/4</a:t>
-                      </a:r>
-                    </a:p>
-                  </a:txBody>
-                  <a:tcPr marT="38100" marB="38100">
-                    <a:solidFill>
-                      <a:srgbClr val="F2F5F9"/>
-                    </a:solidFill>
-                  </a:tcPr>
-                </a:tc>
-                <a:tc>
-                  <a:txBody>
-                    <a:bodyPr/>
-                    <a:lstStyle/>
-                    <a:p>
-                      <a:r>
-                        <a:rPr sz="1350" b="0">
-                          <a:solidFill>
-                            <a:srgbClr val="1B1F24"/>
-                          </a:solidFill>
-                          <a:latin typeface="Yu Gothic"/>
-                        </a:rPr>
-                        <a:t>1.01 秒</a:t>
-                      </a:r>
-                    </a:p>
-                  </a:txBody>
-                  <a:tcPr marT="38100" marB="38100">
-                    <a:solidFill>
-                      <a:srgbClr val="F2F5F9"/>
                     </a:solidFill>
                   </a:tcPr>
                 </a:tc>
@@ -8904,7 +11932,7 @@
         </p:nvSpPr>
         <p:spPr>
           <a:xfrm>
-            <a:off x="685800" y="3794760"/>
+            <a:off x="685800" y="4480560"/>
             <a:ext cx="10881360" cy="4572000"/>
           </a:xfrm>
           <a:prstGeom prst="rect">
@@ -8930,7 +11958,23 @@
                 </a:solidFill>
                 <a:latin typeface="Yu Gothic"/>
               </a:rPr>
-              <a:t>・辞書だけでも 12問中9問は正しく直る。LLM は「辞書に無い表記ゆれ」への保険</a:t>
+              <a:t>・「ふりがな」は0.00%だった。読めていたのに、後処理が全部捨てていた</a:t>
+            </a:r>
+          </a:p>
+          <a:p>
+            <a:pPr algn="l">
+              <a:spcBef>
+                <a:spcPts val="200"/>
+              </a:spcBef>
+            </a:pPr>
+            <a:r>
+              <a:rPr sz="1200" b="0">
+                <a:solidFill>
+                  <a:srgbClr val="5B636E"/>
+                </a:solidFill>
+                <a:latin typeface="Yu Gothic"/>
+              </a:rPr>
+              <a:t>　　様式の欄名どおり、書かれるのはひらがな。カタカナだけを許していた</a:t>
             </a:r>
           </a:p>
           <a:p>
@@ -8946,7 +11990,7 @@
                 </a:solidFill>
                 <a:latin typeface="Yu Gothic"/>
               </a:rPr>
-              <a:t>・短い欄（傷病名など）は候補を出すだけで、値は自動確定しない</a:t>
+              <a:t>・日付は年・月・日を別々に測る</a:t>
             </a:r>
           </a:p>
           <a:p>
@@ -8962,39 +12006,7 @@
                 </a:solidFill>
                 <a:latin typeface="Yu Gothic"/>
               </a:rPr>
-              <a:t>　　小型LLMは読み取り不能な文字列からも、もっともらしい病名を作り出すため</a:t>
-            </a:r>
-          </a:p>
-          <a:p>
-            <a:pPr algn="l">
-              <a:spcBef>
-                <a:spcPts val="1000"/>
-              </a:spcBef>
-            </a:pPr>
-            <a:r>
-              <a:rPr sz="1500" b="1">
-                <a:solidFill>
-                  <a:srgbClr val="1B1F24"/>
-                </a:solidFill>
-                <a:latin typeface="Yu Gothic"/>
-              </a:rPr>
-              <a:t>・記述欄（経過及び治療内容・特記すべき事項）だけは校正結果を自動反映</a:t>
-            </a:r>
-          </a:p>
-          <a:p>
-            <a:pPr algn="l">
-              <a:spcBef>
-                <a:spcPts val="200"/>
-              </a:spcBef>
-            </a:pPr>
-            <a:r>
-              <a:rPr sz="1200" b="0">
-                <a:solidFill>
-                  <a:srgbClr val="5B636E"/>
-                </a:solidFill>
-                <a:latin typeface="Yu Gothic"/>
-              </a:rPr>
-              <a:t>　　反映前の読みは「OCR生読み」として候補に残るので、1押しで戻せる</a:t>
+              <a:t>　　実測は 年78.1% / 月92.4% / 日94.1%。いちばん悪いのは年（日ではない）</a:t>
             </a:r>
           </a:p>
         </p:txBody>
@@ -9086,7 +12098,23 @@
                 </a:solidFill>
                 <a:latin typeface="Yu Gothic"/>
               </a:rPr>
-              <a:t>ベンチマーク④ 数字の欄と、記述欄の検算</a:t>
+              <a:t>ベンチマーク③ LLMモデルの比較</a:t>
+            </a:r>
+          </a:p>
+          <a:p>
+            <a:pPr algn="l">
+              <a:spcBef>
+                <a:spcPts val="400"/>
+              </a:spcBef>
+            </a:pPr>
+            <a:r>
+              <a:rPr sz="1400" b="0">
+                <a:solidFill>
+                  <a:srgbClr val="5B636E"/>
+                </a:solidFill>
+                <a:latin typeface="Yu Gothic"/>
+              </a:rPr>
+              <a:t>16問（うち4問は「候補を出してはいけない」問題）／ CPU のみ</a:t>
             </a:r>
           </a:p>
         </p:txBody>
@@ -9145,7 +12173,7 @@
         </p:nvGraphicFramePr>
         <p:xfrm>
           <a:off x="685800" y="1783080"/>
-          <a:ext cx="10789920" cy="2011680"/>
+          <a:ext cx="10789918" cy="2011680"/>
         </p:xfrm>
         <a:graphic>
           <a:graphicData uri="http://schemas.openxmlformats.org/drawingml/2006/table">
@@ -9154,9 +12182,11 @@
                 <a:tableStyleId>{5C22544A-7EE6-4342-B048-85BDC9FD1C3A}</a:tableStyleId>
               </a:tblPr>
               <a:tblGrid>
-                <a:gridCol w="3057144"/>
-                <a:gridCol w="4675632"/>
-                <a:gridCol w="3057144"/>
+                <a:gridCol w="4068330"/>
+                <a:gridCol w="1415071"/>
+                <a:gridCol w="1415071"/>
+                <a:gridCol w="2122607"/>
+                <a:gridCol w="1768839"/>
               </a:tblGrid>
               <a:tr h="402336">
                 <a:tc>
@@ -9165,13 +12195,13 @@
                     <a:lstStyle/>
                     <a:p>
                       <a:r>
-                        <a:rPr sz="1250" b="1">
+                        <a:rPr sz="1350" b="1">
                           <a:solidFill>
                             <a:srgbClr val="FFFFFF"/>
                           </a:solidFill>
                           <a:latin typeface="Yu Gothic"/>
                         </a:rPr>
-                        <a:t>対象</a:t>
+                        <a:t>モデル</a:t>
                       </a:r>
                     </a:p>
                   </a:txBody>
@@ -9187,13 +12217,13 @@
                     <a:lstStyle/>
                     <a:p>
                       <a:r>
-                        <a:rPr sz="1250" b="1">
+                        <a:rPr sz="1350" b="1">
                           <a:solidFill>
                             <a:srgbClr val="FFFFFF"/>
                           </a:solidFill>
                           <a:latin typeface="Yu Gothic"/>
                         </a:rPr>
-                        <a:t>やり方</a:t>
+                        <a:t>サイズ</a:t>
                       </a:r>
                     </a:p>
                   </a:txBody>
@@ -9209,13 +12239,57 @@
                     <a:lstStyle/>
                     <a:p>
                       <a:r>
-                        <a:rPr sz="1250" b="1">
+                        <a:rPr sz="1350" b="1">
                           <a:solidFill>
                             <a:srgbClr val="FFFFFF"/>
                           </a:solidFill>
                           <a:latin typeface="Yu Gothic"/>
                         </a:rPr>
-                        <a:t>結果</a:t>
+                        <a:t>正答</a:t>
+                      </a:r>
+                    </a:p>
+                  </a:txBody>
+                  <a:tcPr marT="38100" marB="38100">
+                    <a:solidFill>
+                      <a:srgbClr val="1E5AA8"/>
+                    </a:solidFill>
+                  </a:tcPr>
+                </a:tc>
+                <a:tc>
+                  <a:txBody>
+                    <a:bodyPr/>
+                    <a:lstStyle/>
+                    <a:p>
+                      <a:r>
+                        <a:rPr sz="1350" b="1">
+                          <a:solidFill>
+                            <a:srgbClr val="FFFFFF"/>
+                          </a:solidFill>
+                          <a:latin typeface="Yu Gothic"/>
+                        </a:rPr>
+                        <a:t>安全（作り出さない）</a:t>
+                      </a:r>
+                    </a:p>
+                  </a:txBody>
+                  <a:tcPr marT="38100" marB="38100">
+                    <a:solidFill>
+                      <a:srgbClr val="1E5AA8"/>
+                    </a:solidFill>
+                  </a:tcPr>
+                </a:tc>
+                <a:tc>
+                  <a:txBody>
+                    <a:bodyPr/>
+                    <a:lstStyle/>
+                    <a:p>
+                      <a:r>
+                        <a:rPr sz="1350" b="1">
+                          <a:solidFill>
+                            <a:srgbClr val="FFFFFF"/>
+                          </a:solidFill>
+                          <a:latin typeface="Yu Gothic"/>
+                        </a:rPr>
+                        <a:t>1件あたり</a:t>
                       </a:r>
                     </a:p>
                   </a:txBody>
@@ -9233,13 +12307,13 @@
                     <a:lstStyle/>
                     <a:p>
                       <a:r>
-                        <a:rPr sz="1250" b="0">
-                          <a:solidFill>
-                            <a:srgbClr val="1B1F24"/>
-                          </a:solidFill>
-                          <a:latin typeface="Yu Gothic"/>
-                        </a:rPr>
-                        <a:t>記入日・生年月日・最終診察日・発症年月日</a:t>
+                        <a:rPr sz="1350" b="0">
+                          <a:solidFill>
+                            <a:srgbClr val="1B1F24"/>
+                          </a:solidFill>
+                          <a:latin typeface="Yu Gothic"/>
+                        </a:rPr>
+                        <a:t>辞書のみ（LLM不使用）</a:t>
                       </a:r>
                     </a:p>
                   </a:txBody>
@@ -9255,13 +12329,13 @@
                     <a:lstStyle/>
                     <a:p>
                       <a:r>
-                        <a:rPr sz="1250" b="0">
-                          <a:solidFill>
-                            <a:srgbClr val="1B1F24"/>
-                          </a:solidFill>
-                          <a:latin typeface="Yu Gothic"/>
-                        </a:rPr>
-                        <a:t>元号は読まず数字だけを読み、印刷された年／月／日で区切る</a:t>
+                        <a:rPr sz="1350" b="0">
+                          <a:solidFill>
+                            <a:srgbClr val="1B1F24"/>
+                          </a:solidFill>
+                          <a:latin typeface="Yu Gothic"/>
+                        </a:rPr>
+                        <a:t>—</a:t>
                       </a:r>
                     </a:p>
                   </a:txBody>
@@ -9277,13 +12351,57 @@
                     <a:lstStyle/>
                     <a:p>
                       <a:r>
-                        <a:rPr sz="1250" b="0">
-                          <a:solidFill>
-                            <a:srgbClr val="1B1F24"/>
-                          </a:solidFill>
-                          <a:latin typeface="Yu Gothic"/>
-                        </a:rPr>
-                        <a:t>10 / 10 正解</a:t>
+                        <a:rPr sz="1350" b="0">
+                          <a:solidFill>
+                            <a:srgbClr val="1B1F24"/>
+                          </a:solidFill>
+                          <a:latin typeface="Yu Gothic"/>
+                        </a:rPr>
+                        <a:t>9/12</a:t>
+                      </a:r>
+                    </a:p>
+                  </a:txBody>
+                  <a:tcPr marT="38100" marB="38100">
+                    <a:solidFill>
+                      <a:srgbClr val="FFFFFF"/>
+                    </a:solidFill>
+                  </a:tcPr>
+                </a:tc>
+                <a:tc>
+                  <a:txBody>
+                    <a:bodyPr/>
+                    <a:lstStyle/>
+                    <a:p>
+                      <a:r>
+                        <a:rPr sz="1350" b="0">
+                          <a:solidFill>
+                            <a:srgbClr val="1B1F24"/>
+                          </a:solidFill>
+                          <a:latin typeface="Yu Gothic"/>
+                        </a:rPr>
+                        <a:t>4/4</a:t>
+                      </a:r>
+                    </a:p>
+                  </a:txBody>
+                  <a:tcPr marT="38100" marB="38100">
+                    <a:solidFill>
+                      <a:srgbClr val="FFFFFF"/>
+                    </a:solidFill>
+                  </a:tcPr>
+                </a:tc>
+                <a:tc>
+                  <a:txBody>
+                    <a:bodyPr/>
+                    <a:lstStyle/>
+                    <a:p>
+                      <a:r>
+                        <a:rPr sz="1350" b="0">
+                          <a:solidFill>
+                            <a:srgbClr val="1B1F24"/>
+                          </a:solidFill>
+                          <a:latin typeface="Yu Gothic"/>
+                        </a:rPr>
+                        <a:t>即時</a:t>
                       </a:r>
                     </a:p>
                   </a:txBody>
@@ -9301,13 +12419,13 @@
                     <a:lstStyle/>
                     <a:p>
                       <a:r>
-                        <a:rPr sz="1250" b="0">
-                          <a:solidFill>
-                            <a:srgbClr val="1B1F24"/>
-                          </a:solidFill>
-                          <a:latin typeface="Yu Gothic"/>
-                        </a:rPr>
-                        <a:t>電話番号・郵便番号</a:t>
+                        <a:rPr sz="1350" b="0">
+                          <a:solidFill>
+                            <a:srgbClr val="1B1F24"/>
+                          </a:solidFill>
+                          <a:latin typeface="Yu Gothic"/>
+                        </a:rPr>
+                        <a:t>Qwen3-4B-Instruct-2507-Q4_K_M.gguf</a:t>
                       </a:r>
                     </a:p>
                   </a:txBody>
@@ -9323,13 +12441,13 @@
                     <a:lstStyle/>
                     <a:p>
                       <a:r>
-                        <a:rPr sz="1250" b="0">
-                          <a:solidFill>
-                            <a:srgbClr val="1B1F24"/>
-                          </a:solidFill>
-                          <a:latin typeface="Yu Gothic"/>
-                        </a:rPr>
-                        <a:t>文字種を限定し、書式を整える</a:t>
+                        <a:rPr sz="1350" b="0">
+                          <a:solidFill>
+                            <a:srgbClr val="1B1F24"/>
+                          </a:solidFill>
+                          <a:latin typeface="Yu Gothic"/>
+                        </a:rPr>
+                        <a:t>2.3 GB</a:t>
                       </a:r>
                     </a:p>
                   </a:txBody>
@@ -9345,13 +12463,57 @@
                     <a:lstStyle/>
                     <a:p>
                       <a:r>
-                        <a:rPr sz="1250" b="0">
-                          <a:solidFill>
-                            <a:srgbClr val="1B1F24"/>
-                          </a:solidFill>
-                          <a:latin typeface="Yu Gothic"/>
-                        </a:rPr>
-                        <a:t>029-873-3111 の形に統一</a:t>
+                        <a:rPr sz="1350" b="0">
+                          <a:solidFill>
+                            <a:srgbClr val="1B1F24"/>
+                          </a:solidFill>
+                          <a:latin typeface="Yu Gothic"/>
+                        </a:rPr>
+                        <a:t>11/12</a:t>
+                      </a:r>
+                    </a:p>
+                  </a:txBody>
+                  <a:tcPr marT="38100" marB="38100">
+                    <a:solidFill>
+                      <a:srgbClr val="F2F5F9"/>
+                    </a:solidFill>
+                  </a:tcPr>
+                </a:tc>
+                <a:tc>
+                  <a:txBody>
+                    <a:bodyPr/>
+                    <a:lstStyle/>
+                    <a:p>
+                      <a:r>
+                        <a:rPr sz="1350" b="0">
+                          <a:solidFill>
+                            <a:srgbClr val="1B1F24"/>
+                          </a:solidFill>
+                          <a:latin typeface="Yu Gothic"/>
+                        </a:rPr>
+                        <a:t>4/4</a:t>
+                      </a:r>
+                    </a:p>
+                  </a:txBody>
+                  <a:tcPr marT="38100" marB="38100">
+                    <a:solidFill>
+                      <a:srgbClr val="F2F5F9"/>
+                    </a:solidFill>
+                  </a:tcPr>
+                </a:tc>
+                <a:tc>
+                  <a:txBody>
+                    <a:bodyPr/>
+                    <a:lstStyle/>
+                    <a:p>
+                      <a:r>
+                        <a:rPr sz="1350" b="0">
+                          <a:solidFill>
+                            <a:srgbClr val="1B1F24"/>
+                          </a:solidFill>
+                          <a:latin typeface="Yu Gothic"/>
+                        </a:rPr>
+                        <a:t>1.30 秒</a:t>
                       </a:r>
                     </a:p>
                   </a:txBody>
@@ -9369,13 +12531,13 @@
                     <a:lstStyle/>
                     <a:p>
                       <a:r>
-                        <a:rPr sz="1250" b="0">
-                          <a:solidFill>
-                            <a:srgbClr val="1B1F24"/>
-                          </a:solidFill>
-                          <a:latin typeface="Yu Gothic"/>
-                        </a:rPr>
-                        <a:t>記述欄の左端</a:t>
+                        <a:rPr sz="1350" b="0">
+                          <a:solidFill>
+                            <a:srgbClr val="1B1F24"/>
+                          </a:solidFill>
+                          <a:latin typeface="Yu Gothic"/>
+                        </a:rPr>
+                        <a:t>qwen2.5-1.5b-instruct-q4_k_m.gguf</a:t>
                       </a:r>
                     </a:p>
                   </a:txBody>
@@ -9391,13 +12553,13 @@
                     <a:lstStyle/>
                     <a:p>
                       <a:r>
-                        <a:rPr sz="1250" b="0">
-                          <a:solidFill>
-                            <a:srgbClr val="1B1F24"/>
-                          </a:solidFill>
-                          <a:latin typeface="Yu Gothic"/>
-                        </a:rPr>
-                        <a:t>白紙様式を見て、印刷にぶつからない範囲で読み取り枠を広げる</a:t>
+                        <a:rPr sz="1350" b="0">
+                          <a:solidFill>
+                            <a:srgbClr val="1B1F24"/>
+                          </a:solidFill>
+                          <a:latin typeface="Yu Gothic"/>
+                        </a:rPr>
+                        <a:t>1.0 GB</a:t>
                       </a:r>
                     </a:p>
                   </a:txBody>
@@ -9413,13 +12575,57 @@
                     <a:lstStyle/>
                     <a:p>
                       <a:r>
-                        <a:rPr sz="1250" b="0">
-                          <a:solidFill>
-                            <a:srgbClr val="1B1F24"/>
-                          </a:solidFill>
-                          <a:latin typeface="Yu Gothic"/>
-                        </a:rPr>
-                        <a:t>症状名は9件中9件で先頭が切れていた → 解消</a:t>
+                        <a:rPr sz="1350" b="0">
+                          <a:solidFill>
+                            <a:srgbClr val="1B1F24"/>
+                          </a:solidFill>
+                          <a:latin typeface="Yu Gothic"/>
+                        </a:rPr>
+                        <a:t>10/12</a:t>
+                      </a:r>
+                    </a:p>
+                  </a:txBody>
+                  <a:tcPr marT="38100" marB="38100">
+                    <a:solidFill>
+                      <a:srgbClr val="FFFFFF"/>
+                    </a:solidFill>
+                  </a:tcPr>
+                </a:tc>
+                <a:tc>
+                  <a:txBody>
+                    <a:bodyPr/>
+                    <a:lstStyle/>
+                    <a:p>
+                      <a:r>
+                        <a:rPr sz="1350" b="0">
+                          <a:solidFill>
+                            <a:srgbClr val="1B1F24"/>
+                          </a:solidFill>
+                          <a:latin typeface="Yu Gothic"/>
+                        </a:rPr>
+                        <a:t>4/4</a:t>
+                      </a:r>
+                    </a:p>
+                  </a:txBody>
+                  <a:tcPr marT="38100" marB="38100">
+                    <a:solidFill>
+                      <a:srgbClr val="FFFFFF"/>
+                    </a:solidFill>
+                  </a:tcPr>
+                </a:tc>
+                <a:tc>
+                  <a:txBody>
+                    <a:bodyPr/>
+                    <a:lstStyle/>
+                    <a:p>
+                      <a:r>
+                        <a:rPr sz="1350" b="0">
+                          <a:solidFill>
+                            <a:srgbClr val="1B1F24"/>
+                          </a:solidFill>
+                          <a:latin typeface="Yu Gothic"/>
+                        </a:rPr>
+                        <a:t>0.50 秒</a:t>
                       </a:r>
                     </a:p>
                   </a:txBody>
@@ -9437,13 +12643,13 @@
                     <a:lstStyle/>
                     <a:p>
                       <a:r>
-                        <a:rPr sz="1250" b="0">
-                          <a:solidFill>
-                            <a:srgbClr val="1B1F24"/>
-                          </a:solidFill>
-                          <a:latin typeface="Yu Gothic"/>
-                        </a:rPr>
-                        <a:t>記入が無い欄の拾い読み</a:t>
+                        <a:rPr sz="1350" b="0">
+                          <a:solidFill>
+                            <a:srgbClr val="1B1F24"/>
+                          </a:solidFill>
+                          <a:latin typeface="Yu Gothic"/>
+                        </a:rPr>
+                        <a:t>qwen2.5-3b-instruct-q4_k_m.gguf</a:t>
                       </a:r>
                     </a:p>
                   </a:txBody>
@@ -9459,13 +12665,13 @@
                     <a:lstStyle/>
                     <a:p>
                       <a:r>
-                        <a:rPr sz="1250" b="0">
-                          <a:solidFill>
-                            <a:srgbClr val="1B1F24"/>
-                          </a:solidFill>
-                          <a:latin typeface="Yu Gothic"/>
-                        </a:rPr>
-                        <a:t>書き込みが1文字ぶんも無いのに文字が読めた場合を検出</a:t>
+                        <a:rPr sz="1350" b="0">
+                          <a:solidFill>
+                            <a:srgbClr val="1B1F24"/>
+                          </a:solidFill>
+                          <a:latin typeface="Yu Gothic"/>
+                        </a:rPr>
+                        <a:t>2.0 GB</a:t>
                       </a:r>
                     </a:p>
                   </a:txBody>
@@ -9481,13 +12687,57 @@
                     <a:lstStyle/>
                     <a:p>
                       <a:r>
-                        <a:rPr sz="1250" b="0">
-                          <a:solidFill>
-                            <a:srgbClr val="1B1F24"/>
-                          </a:solidFill>
-                          <a:latin typeface="Yu Gothic"/>
-                        </a:rPr>
-                        <a:t>449欄中28欄を検出（確信度0.8以上の誤りは0件）</a:t>
+                        <a:rPr sz="1350" b="0">
+                          <a:solidFill>
+                            <a:srgbClr val="1B1F24"/>
+                          </a:solidFill>
+                          <a:latin typeface="Yu Gothic"/>
+                        </a:rPr>
+                        <a:t>10/12</a:t>
+                      </a:r>
+                    </a:p>
+                  </a:txBody>
+                  <a:tcPr marT="38100" marB="38100">
+                    <a:solidFill>
+                      <a:srgbClr val="F2F5F9"/>
+                    </a:solidFill>
+                  </a:tcPr>
+                </a:tc>
+                <a:tc>
+                  <a:txBody>
+                    <a:bodyPr/>
+                    <a:lstStyle/>
+                    <a:p>
+                      <a:r>
+                        <a:rPr sz="1350" b="0">
+                          <a:solidFill>
+                            <a:srgbClr val="1B1F24"/>
+                          </a:solidFill>
+                          <a:latin typeface="Yu Gothic"/>
+                        </a:rPr>
+                        <a:t>4/4</a:t>
+                      </a:r>
+                    </a:p>
+                  </a:txBody>
+                  <a:tcPr marT="38100" marB="38100">
+                    <a:solidFill>
+                      <a:srgbClr val="F2F5F9"/>
+                    </a:solidFill>
+                  </a:tcPr>
+                </a:tc>
+                <a:tc>
+                  <a:txBody>
+                    <a:bodyPr/>
+                    <a:lstStyle/>
+                    <a:p>
+                      <a:r>
+                        <a:rPr sz="1350" b="0">
+                          <a:solidFill>
+                            <a:srgbClr val="1B1F24"/>
+                          </a:solidFill>
+                          <a:latin typeface="Yu Gothic"/>
+                        </a:rPr>
+                        <a:t>1.01 秒</a:t>
                       </a:r>
                     </a:p>
                   </a:txBody>
@@ -9510,8 +12760,8 @@
         </p:nvSpPr>
         <p:spPr>
           <a:xfrm>
-            <a:off x="685800" y="5029200"/>
-            <a:ext cx="10881360" cy="548640"/>
+            <a:off x="685800" y="3794760"/>
+            <a:ext cx="10881360" cy="4572000"/>
           </a:xfrm>
           <a:prstGeom prst="rect">
             <a:avLst/>
@@ -9526,17 +12776,81 @@
           <a:p>
             <a:pPr algn="l">
               <a:spcBef>
-                <a:spcPts val="0"/>
-              </a:spcBef>
-            </a:pPr>
-            <a:r>
-              <a:rPr sz="1300" b="0">
+                <a:spcPts val="1000"/>
+              </a:spcBef>
+            </a:pPr>
+            <a:r>
+              <a:rPr sz="1500" b="1">
+                <a:solidFill>
+                  <a:srgbClr val="1B1F24"/>
+                </a:solidFill>
+                <a:latin typeface="Yu Gothic"/>
+              </a:rPr>
+              <a:t>・辞書だけでも 12問中9問は正しく直る。LLM は「辞書に無い表記ゆれ」への保険</a:t>
+            </a:r>
+          </a:p>
+          <a:p>
+            <a:pPr algn="l">
+              <a:spcBef>
+                <a:spcPts val="1000"/>
+              </a:spcBef>
+            </a:pPr>
+            <a:r>
+              <a:rPr sz="1500" b="1">
+                <a:solidFill>
+                  <a:srgbClr val="1B1F24"/>
+                </a:solidFill>
+                <a:latin typeface="Yu Gothic"/>
+              </a:rPr>
+              <a:t>・短い欄（傷病名など）は候補を出すだけで、値は自動確定しない</a:t>
+            </a:r>
+          </a:p>
+          <a:p>
+            <a:pPr algn="l">
+              <a:spcBef>
+                <a:spcPts val="200"/>
+              </a:spcBef>
+            </a:pPr>
+            <a:r>
+              <a:rPr sz="1200" b="0">
                 <a:solidFill>
                   <a:srgbClr val="5B636E"/>
                 </a:solidFill>
                 <a:latin typeface="Yu Gothic"/>
               </a:rPr>
-              <a:t>値は書き換えず、確信度を下げて理由を出す。「読めた文字が少ないから補う」ことはしない（無い記載を作らないため）。</a:t>
+              <a:t>　　小型LLMは読み取り不能な文字列からも、もっともらしい病名を作り出すため</a:t>
+            </a:r>
+          </a:p>
+          <a:p>
+            <a:pPr algn="l">
+              <a:spcBef>
+                <a:spcPts val="1000"/>
+              </a:spcBef>
+            </a:pPr>
+            <a:r>
+              <a:rPr sz="1500" b="1">
+                <a:solidFill>
+                  <a:srgbClr val="1B1F24"/>
+                </a:solidFill>
+                <a:latin typeface="Yu Gothic"/>
+              </a:rPr>
+              <a:t>・記述欄（経過及び治療内容・特記すべき事項）だけは校正結果を自動反映</a:t>
+            </a:r>
+          </a:p>
+          <a:p>
+            <a:pPr algn="l">
+              <a:spcBef>
+                <a:spcPts val="200"/>
+              </a:spcBef>
+            </a:pPr>
+            <a:r>
+              <a:rPr sz="1200" b="0">
+                <a:solidFill>
+                  <a:srgbClr val="5B636E"/>
+                </a:solidFill>
+                <a:latin typeface="Yu Gothic"/>
+              </a:rPr>
+              <a:t>　　反映前の読みは「OCR生読み」として候補に残るので、1押しで戻せる</a:t>
             </a:r>
           </a:p>
         </p:txBody>
@@ -9628,7 +12942,7 @@
                 </a:solidFill>
                 <a:latin typeface="Yu Gothic"/>
               </a:rPr>
-              <a:t>医療辞書と医療機関一覧</a:t>
+              <a:t>ベンチマーク④ 数字の欄と、記述欄の検算</a:t>
             </a:r>
           </a:p>
         </p:txBody>
@@ -9677,16 +12991,383 @@
           </a:p>
         </p:txBody>
       </p:sp>
-      <p:sp>
-        <p:nvSpPr>
-          <p:cNvPr id="4" name="TextBox 3"/>
+      <p:graphicFrame>
+        <p:nvGraphicFramePr>
+          <p:cNvPr id="4" name="Table 3"/>
+          <p:cNvGraphicFramePr>
+            <a:graphicFrameLocks noGrp="1"/>
+          </p:cNvGraphicFramePr>
+          <p:nvPr/>
+        </p:nvGraphicFramePr>
+        <p:xfrm>
+          <a:off x="685800" y="1783080"/>
+          <a:ext cx="10789920" cy="2011680"/>
+        </p:xfrm>
+        <a:graphic>
+          <a:graphicData uri="http://schemas.openxmlformats.org/drawingml/2006/table">
+            <a:tbl>
+              <a:tblPr firstRow="1" bandRow="1">
+                <a:tableStyleId>{5C22544A-7EE6-4342-B048-85BDC9FD1C3A}</a:tableStyleId>
+              </a:tblPr>
+              <a:tblGrid>
+                <a:gridCol w="3057144"/>
+                <a:gridCol w="4675632"/>
+                <a:gridCol w="3057144"/>
+              </a:tblGrid>
+              <a:tr h="402336">
+                <a:tc>
+                  <a:txBody>
+                    <a:bodyPr/>
+                    <a:lstStyle/>
+                    <a:p>
+                      <a:r>
+                        <a:rPr sz="1250" b="1">
+                          <a:solidFill>
+                            <a:srgbClr val="FFFFFF"/>
+                          </a:solidFill>
+                          <a:latin typeface="Yu Gothic"/>
+                        </a:rPr>
+                        <a:t>対象</a:t>
+                      </a:r>
+                    </a:p>
+                  </a:txBody>
+                  <a:tcPr marT="38100" marB="38100">
+                    <a:solidFill>
+                      <a:srgbClr val="1E5AA8"/>
+                    </a:solidFill>
+                  </a:tcPr>
+                </a:tc>
+                <a:tc>
+                  <a:txBody>
+                    <a:bodyPr/>
+                    <a:lstStyle/>
+                    <a:p>
+                      <a:r>
+                        <a:rPr sz="1250" b="1">
+                          <a:solidFill>
+                            <a:srgbClr val="FFFFFF"/>
+                          </a:solidFill>
+                          <a:latin typeface="Yu Gothic"/>
+                        </a:rPr>
+                        <a:t>やり方</a:t>
+                      </a:r>
+                    </a:p>
+                  </a:txBody>
+                  <a:tcPr marT="38100" marB="38100">
+                    <a:solidFill>
+                      <a:srgbClr val="1E5AA8"/>
+                    </a:solidFill>
+                  </a:tcPr>
+                </a:tc>
+                <a:tc>
+                  <a:txBody>
+                    <a:bodyPr/>
+                    <a:lstStyle/>
+                    <a:p>
+                      <a:r>
+                        <a:rPr sz="1250" b="1">
+                          <a:solidFill>
+                            <a:srgbClr val="FFFFFF"/>
+                          </a:solidFill>
+                          <a:latin typeface="Yu Gothic"/>
+                        </a:rPr>
+                        <a:t>結果</a:t>
+                      </a:r>
+                    </a:p>
+                  </a:txBody>
+                  <a:tcPr marT="38100" marB="38100">
+                    <a:solidFill>
+                      <a:srgbClr val="1E5AA8"/>
+                    </a:solidFill>
+                  </a:tcPr>
+                </a:tc>
+              </a:tr>
+              <a:tr h="402336">
+                <a:tc>
+                  <a:txBody>
+                    <a:bodyPr/>
+                    <a:lstStyle/>
+                    <a:p>
+                      <a:r>
+                        <a:rPr sz="1250" b="0">
+                          <a:solidFill>
+                            <a:srgbClr val="1B1F24"/>
+                          </a:solidFill>
+                          <a:latin typeface="Yu Gothic"/>
+                        </a:rPr>
+                        <a:t>記入日・生年月日・最終診察日・発症年月日</a:t>
+                      </a:r>
+                    </a:p>
+                  </a:txBody>
+                  <a:tcPr marT="38100" marB="38100">
+                    <a:solidFill>
+                      <a:srgbClr val="FFFFFF"/>
+                    </a:solidFill>
+                  </a:tcPr>
+                </a:tc>
+                <a:tc>
+                  <a:txBody>
+                    <a:bodyPr/>
+                    <a:lstStyle/>
+                    <a:p>
+                      <a:r>
+                        <a:rPr sz="1250" b="0">
+                          <a:solidFill>
+                            <a:srgbClr val="1B1F24"/>
+                          </a:solidFill>
+                          <a:latin typeface="Yu Gothic"/>
+                        </a:rPr>
+                        <a:t>元号は読まず数字だけを読み、印刷された年／月／日で区切る</a:t>
+                      </a:r>
+                    </a:p>
+                  </a:txBody>
+                  <a:tcPr marT="38100" marB="38100">
+                    <a:solidFill>
+                      <a:srgbClr val="FFFFFF"/>
+                    </a:solidFill>
+                  </a:tcPr>
+                </a:tc>
+                <a:tc>
+                  <a:txBody>
+                    <a:bodyPr/>
+                    <a:lstStyle/>
+                    <a:p>
+                      <a:r>
+                        <a:rPr sz="1250" b="0">
+                          <a:solidFill>
+                            <a:srgbClr val="1B1F24"/>
+                          </a:solidFill>
+                          <a:latin typeface="Yu Gothic"/>
+                        </a:rPr>
+                        <a:t>10 / 10 正解</a:t>
+                      </a:r>
+                    </a:p>
+                  </a:txBody>
+                  <a:tcPr marT="38100" marB="38100">
+                    <a:solidFill>
+                      <a:srgbClr val="FFFFFF"/>
+                    </a:solidFill>
+                  </a:tcPr>
+                </a:tc>
+              </a:tr>
+              <a:tr h="402336">
+                <a:tc>
+                  <a:txBody>
+                    <a:bodyPr/>
+                    <a:lstStyle/>
+                    <a:p>
+                      <a:r>
+                        <a:rPr sz="1250" b="0">
+                          <a:solidFill>
+                            <a:srgbClr val="1B1F24"/>
+                          </a:solidFill>
+                          <a:latin typeface="Yu Gothic"/>
+                        </a:rPr>
+                        <a:t>電話番号・郵便番号</a:t>
+                      </a:r>
+                    </a:p>
+                  </a:txBody>
+                  <a:tcPr marT="38100" marB="38100">
+                    <a:solidFill>
+                      <a:srgbClr val="F2F5F9"/>
+                    </a:solidFill>
+                  </a:tcPr>
+                </a:tc>
+                <a:tc>
+                  <a:txBody>
+                    <a:bodyPr/>
+                    <a:lstStyle/>
+                    <a:p>
+                      <a:r>
+                        <a:rPr sz="1250" b="0">
+                          <a:solidFill>
+                            <a:srgbClr val="1B1F24"/>
+                          </a:solidFill>
+                          <a:latin typeface="Yu Gothic"/>
+                        </a:rPr>
+                        <a:t>文字種を限定し、書式を整える</a:t>
+                      </a:r>
+                    </a:p>
+                  </a:txBody>
+                  <a:tcPr marT="38100" marB="38100">
+                    <a:solidFill>
+                      <a:srgbClr val="F2F5F9"/>
+                    </a:solidFill>
+                  </a:tcPr>
+                </a:tc>
+                <a:tc>
+                  <a:txBody>
+                    <a:bodyPr/>
+                    <a:lstStyle/>
+                    <a:p>
+                      <a:r>
+                        <a:rPr sz="1250" b="0">
+                          <a:solidFill>
+                            <a:srgbClr val="1B1F24"/>
+                          </a:solidFill>
+                          <a:latin typeface="Yu Gothic"/>
+                        </a:rPr>
+                        <a:t>029-873-3111 の形に統一</a:t>
+                      </a:r>
+                    </a:p>
+                  </a:txBody>
+                  <a:tcPr marT="38100" marB="38100">
+                    <a:solidFill>
+                      <a:srgbClr val="F2F5F9"/>
+                    </a:solidFill>
+                  </a:tcPr>
+                </a:tc>
+              </a:tr>
+              <a:tr h="402336">
+                <a:tc>
+                  <a:txBody>
+                    <a:bodyPr/>
+                    <a:lstStyle/>
+                    <a:p>
+                      <a:r>
+                        <a:rPr sz="1250" b="0">
+                          <a:solidFill>
+                            <a:srgbClr val="1B1F24"/>
+                          </a:solidFill>
+                          <a:latin typeface="Yu Gothic"/>
+                        </a:rPr>
+                        <a:t>記述欄の左端</a:t>
+                      </a:r>
+                    </a:p>
+                  </a:txBody>
+                  <a:tcPr marT="38100" marB="38100">
+                    <a:solidFill>
+                      <a:srgbClr val="FFFFFF"/>
+                    </a:solidFill>
+                  </a:tcPr>
+                </a:tc>
+                <a:tc>
+                  <a:txBody>
+                    <a:bodyPr/>
+                    <a:lstStyle/>
+                    <a:p>
+                      <a:r>
+                        <a:rPr sz="1250" b="0">
+                          <a:solidFill>
+                            <a:srgbClr val="1B1F24"/>
+                          </a:solidFill>
+                          <a:latin typeface="Yu Gothic"/>
+                        </a:rPr>
+                        <a:t>白紙様式を見て、印刷にぶつからない範囲で読み取り枠を広げる</a:t>
+                      </a:r>
+                    </a:p>
+                  </a:txBody>
+                  <a:tcPr marT="38100" marB="38100">
+                    <a:solidFill>
+                      <a:srgbClr val="FFFFFF"/>
+                    </a:solidFill>
+                  </a:tcPr>
+                </a:tc>
+                <a:tc>
+                  <a:txBody>
+                    <a:bodyPr/>
+                    <a:lstStyle/>
+                    <a:p>
+                      <a:r>
+                        <a:rPr sz="1250" b="0">
+                          <a:solidFill>
+                            <a:srgbClr val="1B1F24"/>
+                          </a:solidFill>
+                          <a:latin typeface="Yu Gothic"/>
+                        </a:rPr>
+                        <a:t>症状名は9件中9件で先頭が切れていた → 解消</a:t>
+                      </a:r>
+                    </a:p>
+                  </a:txBody>
+                  <a:tcPr marT="38100" marB="38100">
+                    <a:solidFill>
+                      <a:srgbClr val="FFFFFF"/>
+                    </a:solidFill>
+                  </a:tcPr>
+                </a:tc>
+              </a:tr>
+              <a:tr h="402336">
+                <a:tc>
+                  <a:txBody>
+                    <a:bodyPr/>
+                    <a:lstStyle/>
+                    <a:p>
+                      <a:r>
+                        <a:rPr sz="1250" b="0">
+                          <a:solidFill>
+                            <a:srgbClr val="1B1F24"/>
+                          </a:solidFill>
+                          <a:latin typeface="Yu Gothic"/>
+                        </a:rPr>
+                        <a:t>記入が無い欄の拾い読み</a:t>
+                      </a:r>
+                    </a:p>
+                  </a:txBody>
+                  <a:tcPr marT="38100" marB="38100">
+                    <a:solidFill>
+                      <a:srgbClr val="F2F5F9"/>
+                    </a:solidFill>
+                  </a:tcPr>
+                </a:tc>
+                <a:tc>
+                  <a:txBody>
+                    <a:bodyPr/>
+                    <a:lstStyle/>
+                    <a:p>
+                      <a:r>
+                        <a:rPr sz="1250" b="0">
+                          <a:solidFill>
+                            <a:srgbClr val="1B1F24"/>
+                          </a:solidFill>
+                          <a:latin typeface="Yu Gothic"/>
+                        </a:rPr>
+                        <a:t>書き込みが1文字ぶんも無いのに文字が読めた場合を検出</a:t>
+                      </a:r>
+                    </a:p>
+                  </a:txBody>
+                  <a:tcPr marT="38100" marB="38100">
+                    <a:solidFill>
+                      <a:srgbClr val="F2F5F9"/>
+                    </a:solidFill>
+                  </a:tcPr>
+                </a:tc>
+                <a:tc>
+                  <a:txBody>
+                    <a:bodyPr/>
+                    <a:lstStyle/>
+                    <a:p>
+                      <a:r>
+                        <a:rPr sz="1250" b="0">
+                          <a:solidFill>
+                            <a:srgbClr val="1B1F24"/>
+                          </a:solidFill>
+                          <a:latin typeface="Yu Gothic"/>
+                        </a:rPr>
+                        <a:t>449欄中28欄を検出（確信度0.8以上の誤りは0件）</a:t>
+                      </a:r>
+                    </a:p>
+                  </a:txBody>
+                  <a:tcPr marT="38100" marB="38100">
+                    <a:solidFill>
+                      <a:srgbClr val="F2F5F9"/>
+                    </a:solidFill>
+                  </a:tcPr>
+                </a:tc>
+              </a:tr>
+            </a:tbl>
+          </a:graphicData>
+        </a:graphic>
+      </p:graphicFrame>
+      <p:sp>
+        <p:nvSpPr>
+          <p:cNvPr id="5" name="TextBox 4"/>
           <p:cNvSpPr txBox="1"/>
           <p:nvPr/>
         </p:nvSpPr>
         <p:spPr>
           <a:xfrm>
-            <a:off x="685800" y="1691640"/>
-            <a:ext cx="10881360" cy="4572000"/>
+            <a:off x="685800" y="5029200"/>
+            <a:ext cx="10881360" cy="548640"/>
           </a:xfrm>
           <a:prstGeom prst="rect">
             <a:avLst/>
@@ -9701,120 +13382,24 @@
           <a:p>
             <a:pPr algn="l">
               <a:spcBef>
-                <a:spcPts val="1000"/>
-              </a:spcBef>
-            </a:pPr>
-            <a:r>
-              <a:rPr sz="1700" b="1">
-                <a:solidFill>
-                  <a:srgbClr val="1B1F24"/>
-                </a:solidFill>
-                <a:latin typeface="Yu Gothic"/>
-              </a:rPr>
-              <a:t>・傷病名は ICD-10 コードと介護保険の特定疾病フラグを持つ</a:t>
-            </a:r>
-          </a:p>
-          <a:p>
-            <a:pPr algn="l">
-              <a:spcBef>
-                <a:spcPts val="200"/>
-              </a:spcBef>
-            </a:pPr>
-            <a:r>
-              <a:rPr sz="1400" b="0">
+                <a:spcPts val="0"/>
+              </a:spcBef>
+            </a:pPr>
+            <a:r>
+              <a:rPr sz="1300" b="0">
                 <a:solidFill>
                   <a:srgbClr val="5B636E"/>
                 </a:solidFill>
                 <a:latin typeface="Yu Gothic"/>
               </a:rPr>
-              <a:t>　　編集距離ベースの照合で1文字違いも拾う（骨粗葵症→骨粗鬆症、慢性裳臓病→慢性腎臓病）</a:t>
-            </a:r>
-          </a:p>
-          <a:p>
-            <a:pPr algn="l">
-              <a:spcBef>
-                <a:spcPts val="1000"/>
-              </a:spcBef>
-            </a:pPr>
-            <a:r>
-              <a:rPr sz="1700" b="1">
-                <a:solidFill>
-                  <a:srgbClr val="1B1F24"/>
-                </a:solidFill>
-                <a:latin typeface="Yu Gothic"/>
-              </a:rPr>
-              <a:t>・診療科しか入らない欄には診療科の辞書を当てる</a:t>
-            </a:r>
-          </a:p>
-          <a:p>
-            <a:pPr algn="l">
-              <a:spcBef>
-                <a:spcPts val="1000"/>
-              </a:spcBef>
-            </a:pPr>
-            <a:r>
-              <a:rPr sz="1700" b="1">
-                <a:solidFill>
-                  <a:srgbClr val="1B1F24"/>
-                </a:solidFill>
-                <a:latin typeface="Yu Gothic"/>
-              </a:rPr>
-              <a:t>・医療機関は厚生労働省の一覧と突き合わせる（47 都道府県 / 97,399 件 / 2026-09-06 現在）</a:t>
-            </a:r>
-          </a:p>
-          <a:p>
-            <a:pPr algn="l">
-              <a:spcBef>
-                <a:spcPts val="200"/>
-              </a:spcBef>
-            </a:pPr>
-            <a:r>
-              <a:rPr sz="1400" b="0">
-                <a:solidFill>
-                  <a:srgbClr val="5B636E"/>
-                </a:solidFill>
-                <a:latin typeface="Yu Gothic"/>
-              </a:rPr>
-              <a:t>　　確認画面では都道府県を選んで検索でき、選ぶと所在地と電話も自動で入る</a:t>
-            </a:r>
-          </a:p>
-          <a:p>
-            <a:pPr algn="l">
-              <a:spcBef>
-                <a:spcPts val="1000"/>
-              </a:spcBef>
-            </a:pPr>
-            <a:r>
-              <a:rPr sz="1700" b="1">
-                <a:solidFill>
-                  <a:srgbClr val="1B1F24"/>
-                </a:solidFill>
-                <a:latin typeface="Yu Gothic"/>
-              </a:rPr>
-              <a:t>・辞書で「短くしてしまう」置き換えはしない</a:t>
-            </a:r>
-          </a:p>
-          <a:p>
-            <a:pPr algn="l">
-              <a:spcBef>
-                <a:spcPts val="200"/>
-              </a:spcBef>
-            </a:pPr>
-            <a:r>
-              <a:rPr sz="1400" b="0">
-                <a:solidFill>
-                  <a:srgbClr val="5B636E"/>
-                </a:solidFill>
-                <a:latin typeface="Yu Gothic"/>
-              </a:rPr>
-              <a:t>　　『筑波記念病院』が『病院』に、『右大腿骨骨折』が『骨折』に潰れていたのを修正</a:t>
-            </a:r>
-          </a:p>
-        </p:txBody>
-      </p:sp>
-      <p:sp>
-        <p:nvSpPr>
-          <p:cNvPr id="5" name="TextBox 4"/>
+              <a:t>値は書き換えず、確信度を下げて理由を出す。「読めた文字が少ないから補う」ことはしない（無い記載を作らないため）。</a:t>
+            </a:r>
+          </a:p>
+        </p:txBody>
+      </p:sp>
+      <p:sp>
+        <p:nvSpPr>
+          <p:cNvPr id="6" name="TextBox 5"/>
           <p:cNvSpPr txBox="1"/>
           <p:nvPr/>
         </p:nvSpPr>
